--- a/slides/datasets-in-10-minutes-cluewsc2020.pptx
+++ b/slides/datasets-in-10-minutes-cluewsc2020.pptx
@@ -18,7 +18,6 @@
     <p:sldId id="266" r:id="rId16"/>
     <p:sldId id="267" r:id="rId17"/>
     <p:sldId id="268" r:id="rId18"/>
-    <p:sldId id="269" r:id="rId19"/>
     <p:sldId id="270" r:id="rId20"/>
     <p:sldId id="271" r:id="rId21"/>
     <p:sldId id="272" r:id="rId22"/>
@@ -30,7 +29,6 @@
     <p:sldId id="278" r:id="rId28"/>
     <p:sldId id="279" r:id="rId29"/>
     <p:sldId id="280" r:id="rId30"/>
-    <p:sldId id="281" r:id="rId31"/>
     <p:sldId id="282" r:id="rId32"/>
     <p:sldId id="283" r:id="rId33"/>
     <p:sldId id="284" r:id="rId34"/>
@@ -50,16 +48,11 @@
     <p:sldId id="298" r:id="rId48"/>
     <p:sldId id="299" r:id="rId49"/>
     <p:sldId id="300" r:id="rId50"/>
-    <p:sldId id="301" r:id="rId51"/>
-    <p:sldId id="302" r:id="rId52"/>
     <p:sldId id="303" r:id="rId53"/>
     <p:sldId id="304" r:id="rId54"/>
-    <p:sldId id="305" r:id="rId55"/>
     <p:sldId id="306" r:id="rId56"/>
     <p:sldId id="307" r:id="rId57"/>
     <p:sldId id="308" r:id="rId58"/>
-    <p:sldId id="309" r:id="rId59"/>
-    <p:sldId id="310" r:id="rId60"/>
     <p:sldId id="311" r:id="rId61"/>
     <p:sldId id="312" r:id="rId62"/>
     <p:sldId id="313" r:id="rId63"/>
@@ -7705,7 +7698,7 @@
                 <a:ea typeface="Noto Sans CJK JP"/>
                 <a:cs typeface="Noto Sans"/>
               </a:rPr>
-              <a:t>train.json / 行4 / idx 261　　緑：候補の名詞句　青：指定された代名詞</a:t>
+              <a:t>緑：候補の名詞句／青：指定された代名詞</a:t>
             </a:r>
           </a:p>
         </p:txBody>
@@ -7759,7 +7752,7 @@
                 <a:ea typeface="Noto Sans CJK JP"/>
                 <a:cs typeface="Noto Sans"/>
               </a:rPr>
-              <a:t>中国語：配布text全文と指定span</a:t>
+              <a:t>中国語：文章全文と指定された語句</a:t>
             </a:r>
           </a:p>
         </p:txBody>
@@ -8299,7 +8292,7 @@
                 <a:ea typeface="Noto Sans CJK JP"/>
                 <a:cs typeface="Noto Sans"/>
               </a:rPr>
-              <a:t>[1] CLUEbenchmark. CLUEWSC2020 / train.json / line 4 / idx 261.</a:t>
+              <a:t>[1] CLUEbenchmark. CLUEWSC2020 public data.</a:t>
             </a:r>
             <a:r>
               <a:rPr sz="810" b="0" lang="ja-JP" altLang="en-US">
@@ -8441,7 +8434,7 @@
                 <a:ea typeface="Noto Sans CJK JP"/>
                 <a:cs typeface="Noto Sans"/>
               </a:rPr>
-              <a:t>鳴る物と利用停止の説明は携帯電話を指す。指定された候補はベッドなのでfalse。</a:t>
+              <a:t>利用停止になっていて、突然鳴ったのは携帯電話。「それ」が指す物と、候補のベッドは異なるのでfalseになる。</a:t>
             </a:r>
           </a:p>
           <a:p>
@@ -8471,37 +8464,7 @@
                 <a:ea typeface="Noto Sans CJK JP"/>
                 <a:cs typeface="Noto Sans"/>
               </a:rPr>
-              <a:t>文章中に床・枕・携帯電話があっても、元レコードが指定した候補は「床」。候補を携帯電話へ読み替えると、別の問題になる。</a:t>
-            </a:r>
-          </a:p>
-          <a:p>
-            <a:pPr marL="457200" indent="-355600">
-              <a:lnSpc>
-                <a:spcPts val="2320"/>
-              </a:lnSpc>
-              <a:spcAft>
-                <a:spcPts val="0"/>
-              </a:spcAft>
-              <a:buSzPct val="68205"/>
-              <a:buFont typeface="Noto Sans CJK JP"/>
-              <a:buChar char="●"/>
-              <a:defRPr sz="1950" b="0">
-                <a:solidFill>
-                  <a:srgbClr val="303437"/>
-                </a:solidFill>
-                <a:latin typeface="Noto Sans"/>
-              </a:defRPr>
-            </a:pPr>
-            <a:r>
-              <a:rPr sz="1950" b="0" lang="ja-JP" altLang="en-US">
-                <a:solidFill>
-                  <a:srgbClr val="303437"/>
-                </a:solidFill>
-                <a:latin typeface="Noto Sans"/>
-                <a:ea typeface="Noto Sans CJK JP"/>
-                <a:cs typeface="Noto Sans"/>
-              </a:rPr>
-              <a:t>ここに示す対象欄と色分けは、元のtextとtargetを読みやすく並べたもの。元データは文章・指定箇所・二値ラベルを持つ。</a:t>
+              <a:t>この問題では、代名詞が指す物を見つけたうえで、指定された候補と一致するかを判定する。文章にはベッドや枕も出てくるが、電話が鳴るという動作と利用停止の説明が手掛かりになる。</a:t>
             </a:r>
           </a:p>
         </p:txBody>
@@ -8603,7 +8566,7 @@
                 <a:ea typeface="Noto Sans CJK JP"/>
                 <a:cs typeface="Noto Sans"/>
               </a:rPr>
-              <a:t>[1] CLUEbenchmark. CLUEWSC2020 / train.json / line 4 / idx 261.</a:t>
+              <a:t>[1] CLUEbenchmark. CLUEWSC2020 public data.</a:t>
             </a:r>
             <a:r>
               <a:rPr sz="810" b="0" lang="ja-JP" altLang="en-US">
@@ -8889,7 +8852,7 @@
                 <a:ea typeface="Noto Sans CJK JP"/>
                 <a:cs typeface="Noto Sans"/>
               </a:rPr>
-              <a:t>一つの文章に対して、異なる名詞句と代名詞の組を指定できる。同じ文章から作った複数の行を、独立した文章数と混同しない。</a:t>
+              <a:t>一つの文章から、異なる名詞句と代名詞の組を指定して複数の問題を作れる。たとえば実例2の文章では、准教授を候補にするとtrue、同業者を候補にするとfalseになる。</a:t>
             </a:r>
           </a:p>
           <a:p>
@@ -8919,7 +8882,7 @@
                 <a:ea typeface="Noto Sans CJK JP"/>
                 <a:cs typeface="Noto Sans"/>
               </a:rPr>
-              <a:t>原レコードには作品名や作者名の欄がない。登場人物の名前から、作品や著者を推測して補っていない。</a:t>
+              <a:t>配布データには文章と指定箇所、正解が収められている。個々の文章の作品名・作者名は記載されていない。</a:t>
             </a:r>
           </a:p>
         </p:txBody>
@@ -9072,7 +9035,7 @@
                 <a:ea typeface="Noto Sans CJK JP"/>
                 <a:cs typeface="Noto Sans"/>
               </a:rPr>
-              <a:t>[2] CLUEbenchmark. cluewsc2020_public.zip; README dated 2021-08-29.</a:t>
+              <a:t>[2] CLUEbenchmark. CLUEWSC2020 public data; test update 2021-08-29.</a:t>
             </a:r>
             <a:r>
               <a:rPr sz="810" b="0" lang="ja-JP" altLang="en-US">
@@ -9096,849 +9059,6 @@
                 <a:hlinkClick r:id="rId3"/>
               </a:rPr>
               <a:t>https://storage.googleapis.com/cluebenchmark/tasks/cluewsc2020_public.zip</a:t>
-            </a:r>
-          </a:p>
-        </p:txBody>
-      </p:sp>
-    </p:spTree>
-  </p:cSld>
-  <p:clrMapOvr>
-    <a:masterClrMapping/>
-  </p:clrMapOvr>
-</p:sld>
-</file>
-
-<file path=ppt/slides/slide14.xml><?xml version="1.0" encoding="utf-8"?>
-<p:sld xmlns:a="http://schemas.openxmlformats.org/drawingml/2006/main" xmlns:p="http://schemas.openxmlformats.org/presentationml/2006/main" xmlns:r="http://schemas.openxmlformats.org/officeDocument/2006/relationships">
-  <p:cSld>
-    <p:spTree>
-      <p:nvGrpSpPr>
-        <p:cNvPr id="1" name=""/>
-        <p:cNvGrpSpPr/>
-        <p:nvPr/>
-      </p:nvGrpSpPr>
-      <p:grpSpPr/>
-      <p:sp>
-        <p:nvSpPr>
-          <p:cNvPr id="2" name="Title 1"/>
-          <p:cNvSpPr>
-            <a:spLocks noGrp="1"/>
-          </p:cNvSpPr>
-          <p:nvPr>
-            <p:ph type="title"/>
-          </p:nvPr>
-        </p:nvSpPr>
-        <p:spPr>
-          <a:xfrm>
-            <a:off x="468172" y="650138"/>
-            <a:ext cx="8206740" cy="616305"/>
-          </a:xfrm>
-        </p:spPr>
-        <p:txBody>
-          <a:bodyPr wrap="square" lIns="0" rIns="0" tIns="0" bIns="0">
-            <a:noAutofit/>
-          </a:bodyPr>
-          <a:lstStyle/>
-          <a:p>
-            <a:pPr algn="l">
-              <a:lnSpc>
-                <a:spcPct val="110000"/>
-              </a:lnSpc>
-              <a:buNone/>
-              <a:defRPr sz="2800" b="0">
-                <a:solidFill>
-                  <a:srgbClr val="303437"/>
-                </a:solidFill>
-                <a:latin typeface="Noto Sans"/>
-              </a:defRPr>
-            </a:pPr>
-            <a:r>
-              <a:rPr sz="2800" b="1" lang="ja-JP" altLang="en-US">
-                <a:solidFill>
-                  <a:srgbClr val="303437"/>
-                </a:solidFill>
-                <a:latin typeface="Noto Sans"/>
-                <a:ea typeface="Noto Sans CJK JP"/>
-                <a:cs typeface="Noto Sans"/>
-              </a:rPr>
-              <a:t>文章、二つのspan、二値ラベル</a:t>
-            </a:r>
-          </a:p>
-        </p:txBody>
-      </p:sp>
-      <p:sp>
-        <p:nvSpPr>
-          <p:cNvPr id="3" name="Title 2"/>
-          <p:cNvSpPr>
-            <a:spLocks noGrp="1"/>
-          </p:cNvSpPr>
-          <p:nvPr>
-            <p:ph type="title" idx="2"/>
-          </p:nvPr>
-        </p:nvSpPr>
-        <p:spPr>
-          <a:xfrm>
-            <a:off x="75895" y="0"/>
-            <a:ext cx="8115300" cy="480060"/>
-          </a:xfrm>
-        </p:spPr>
-        <p:txBody>
-          <a:bodyPr wrap="square" lIns="0" rIns="0" tIns="0" bIns="0" anchor="ctr">
-            <a:noAutofit/>
-          </a:bodyPr>
-          <a:lstStyle/>
-          <a:p>
-            <a:pPr algn="l">
-              <a:lnSpc>
-                <a:spcPct val="110000"/>
-              </a:lnSpc>
-              <a:buNone/>
-              <a:defRPr sz="1400" b="0">
-                <a:solidFill>
-                  <a:srgbClr val="303437"/>
-                </a:solidFill>
-                <a:latin typeface="Noto Sans"/>
-              </a:defRPr>
-            </a:pPr>
-            <a:r>
-              <a:rPr sz="1400" b="1" lang="ja-JP" altLang="en-US">
-                <a:solidFill>
-                  <a:srgbClr val="FFFEF8"/>
-                </a:solidFill>
-                <a:latin typeface="Noto Sans"/>
-                <a:ea typeface="Noto Sans CJK JP"/>
-                <a:cs typeface="Noto Sans"/>
-              </a:rPr>
-              <a:t>2. 収集と、データの構成</a:t>
-            </a:r>
-          </a:p>
-        </p:txBody>
-      </p:sp>
-      <p:sp>
-        <p:nvSpPr>
-          <p:cNvPr id="4" name="Rounded Rectangle 3"/>
-          <p:cNvSpPr/>
-          <p:nvPr/>
-        </p:nvSpPr>
-        <p:spPr>
-          <a:xfrm>
-            <a:off x="594360" y="1828800"/>
-            <a:ext cx="2468880" cy="1234440"/>
-          </a:xfrm>
-          <a:prstGeom prst="roundRect">
-            <a:avLst/>
-          </a:prstGeom>
-          <a:solidFill>
-            <a:srgbClr val="EBEDEB"/>
-          </a:solidFill>
-          <a:ln>
-            <a:noFill/>
-          </a:ln>
-        </p:spPr>
-        <p:style>
-          <a:lnRef idx="1">
-            <a:schemeClr val="accent1"/>
-          </a:lnRef>
-          <a:fillRef idx="3">
-            <a:schemeClr val="accent1"/>
-          </a:fillRef>
-          <a:effectRef idx="2">
-            <a:schemeClr val="accent1"/>
-          </a:effectRef>
-          <a:fontRef idx="minor">
-            <a:schemeClr val="lt1"/>
-          </a:fontRef>
-        </p:style>
-        <p:txBody>
-          <a:bodyPr rtlCol="0" anchor="ctr"/>
-          <a:lstStyle/>
-          <a:p>
-            <a:pPr algn="ctr"/>
-          </a:p>
-        </p:txBody>
-      </p:sp>
-      <p:sp>
-        <p:nvSpPr>
-          <p:cNvPr id="5" name="TextBox 4"/>
-          <p:cNvSpPr txBox="1"/>
-          <p:nvPr/>
-        </p:nvSpPr>
-        <p:spPr>
-          <a:xfrm>
-            <a:off x="704088" y="1984248"/>
-            <a:ext cx="2249424" cy="365760"/>
-          </a:xfrm>
-          <a:prstGeom prst="rect">
-            <a:avLst/>
-          </a:prstGeom>
-          <a:noFill/>
-        </p:spPr>
-        <p:txBody>
-          <a:bodyPr wrap="square" lIns="0" rIns="0" tIns="0" bIns="0">
-            <a:noAutofit/>
-          </a:bodyPr>
-          <a:lstStyle/>
-          <a:p>
-            <a:pPr algn="l">
-              <a:lnSpc>
-                <a:spcPts val="2222"/>
-              </a:lnSpc>
-              <a:spcBef>
-                <a:spcPts val="0"/>
-              </a:spcBef>
-              <a:spcAft>
-                <a:spcPts val="0"/>
-              </a:spcAft>
-              <a:buNone/>
-              <a:defRPr sz="1900" b="0">
-                <a:solidFill>
-                  <a:srgbClr val="303437"/>
-                </a:solidFill>
-                <a:latin typeface="Noto Sans"/>
-              </a:defRPr>
-            </a:pPr>
-            <a:r>
-              <a:rPr sz="1900" b="1" lang="ja-JP" altLang="en-US">
-                <a:solidFill>
-                  <a:srgbClr val="303437"/>
-                </a:solidFill>
-                <a:latin typeface="Noto Sans"/>
-                <a:ea typeface="Noto Sans CJK JP"/>
-                <a:cs typeface="Noto Sans"/>
-              </a:rPr>
-              <a:t>文章 text</a:t>
-            </a:r>
-          </a:p>
-        </p:txBody>
-      </p:sp>
-      <p:sp>
-        <p:nvSpPr>
-          <p:cNvPr id="6" name="TextBox 5"/>
-          <p:cNvSpPr txBox="1"/>
-          <p:nvPr/>
-        </p:nvSpPr>
-        <p:spPr>
-          <a:xfrm>
-            <a:off x="704088" y="2423160"/>
-            <a:ext cx="2249424" cy="484632"/>
-          </a:xfrm>
-          <a:prstGeom prst="rect">
-            <a:avLst/>
-          </a:prstGeom>
-          <a:noFill/>
-        </p:spPr>
-        <p:txBody>
-          <a:bodyPr wrap="square" lIns="0" rIns="0" tIns="0" bIns="0">
-            <a:noAutofit/>
-          </a:bodyPr>
-          <a:lstStyle/>
-          <a:p>
-            <a:pPr algn="l">
-              <a:lnSpc>
-                <a:spcPts val="1754"/>
-              </a:lnSpc>
-              <a:spcBef>
-                <a:spcPts val="0"/>
-              </a:spcBef>
-              <a:spcAft>
-                <a:spcPts val="0"/>
-              </a:spcAft>
-              <a:buNone/>
-              <a:defRPr sz="1500" b="0">
-                <a:solidFill>
-                  <a:srgbClr val="303437"/>
-                </a:solidFill>
-                <a:latin typeface="Noto Sans"/>
-              </a:defRPr>
-            </a:pPr>
-            <a:r>
-              <a:rPr sz="1500" b="0" lang="ja-JP" altLang="en-US">
-                <a:solidFill>
-                  <a:srgbClr val="303437"/>
-                </a:solidFill>
-                <a:latin typeface="Noto Sans"/>
-                <a:ea typeface="Noto Sans CJK JP"/>
-                <a:cs typeface="Noto Sans"/>
-              </a:rPr>
-              <a:t>場面・動作・登場人物を読む</a:t>
-            </a:r>
-          </a:p>
-        </p:txBody>
-      </p:sp>
-      <p:sp>
-        <p:nvSpPr>
-          <p:cNvPr id="7" name="TextBox 6"/>
-          <p:cNvSpPr txBox="1"/>
-          <p:nvPr/>
-        </p:nvSpPr>
-        <p:spPr>
-          <a:xfrm>
-            <a:off x="3081528" y="2176272"/>
-            <a:ext cx="237744" cy="365760"/>
-          </a:xfrm>
-          <a:prstGeom prst="rect">
-            <a:avLst/>
-          </a:prstGeom>
-          <a:noFill/>
-        </p:spPr>
-        <p:txBody>
-          <a:bodyPr wrap="square" lIns="0" rIns="0" tIns="0" bIns="0">
-            <a:noAutofit/>
-          </a:bodyPr>
-          <a:lstStyle/>
-          <a:p>
-            <a:pPr algn="l">
-              <a:lnSpc>
-                <a:spcPts val="2340"/>
-              </a:lnSpc>
-              <a:spcBef>
-                <a:spcPts val="0"/>
-              </a:spcBef>
-              <a:spcAft>
-                <a:spcPts val="0"/>
-              </a:spcAft>
-              <a:buNone/>
-              <a:defRPr sz="2000" b="0">
-                <a:solidFill>
-                  <a:srgbClr val="303437"/>
-                </a:solidFill>
-                <a:latin typeface="Noto Sans"/>
-              </a:defRPr>
-            </a:pPr>
-            <a:r>
-              <a:rPr sz="2000" b="1" lang="ja-JP" altLang="en-US">
-                <a:solidFill>
-                  <a:srgbClr val="2C9100"/>
-                </a:solidFill>
-                <a:latin typeface="Noto Sans"/>
-                <a:ea typeface="Noto Sans CJK JP"/>
-                <a:cs typeface="Noto Sans"/>
-              </a:rPr>
-              <a:t>→</a:t>
-            </a:r>
-          </a:p>
-        </p:txBody>
-      </p:sp>
-      <p:sp>
-        <p:nvSpPr>
-          <p:cNvPr id="8" name="Rounded Rectangle 7"/>
-          <p:cNvSpPr/>
-          <p:nvPr/>
-        </p:nvSpPr>
-        <p:spPr>
-          <a:xfrm>
-            <a:off x="3337560" y="1828800"/>
-            <a:ext cx="2468880" cy="1234440"/>
-          </a:xfrm>
-          <a:prstGeom prst="roundRect">
-            <a:avLst/>
-          </a:prstGeom>
-          <a:solidFill>
-            <a:srgbClr val="EBEDEB"/>
-          </a:solidFill>
-          <a:ln>
-            <a:noFill/>
-          </a:ln>
-        </p:spPr>
-        <p:style>
-          <a:lnRef idx="1">
-            <a:schemeClr val="accent1"/>
-          </a:lnRef>
-          <a:fillRef idx="3">
-            <a:schemeClr val="accent1"/>
-          </a:fillRef>
-          <a:effectRef idx="2">
-            <a:schemeClr val="accent1"/>
-          </a:effectRef>
-          <a:fontRef idx="minor">
-            <a:schemeClr val="lt1"/>
-          </a:fontRef>
-        </p:style>
-        <p:txBody>
-          <a:bodyPr rtlCol="0" anchor="ctr"/>
-          <a:lstStyle/>
-          <a:p>
-            <a:pPr algn="ctr"/>
-          </a:p>
-        </p:txBody>
-      </p:sp>
-      <p:sp>
-        <p:nvSpPr>
-          <p:cNvPr id="9" name="TextBox 8"/>
-          <p:cNvSpPr txBox="1"/>
-          <p:nvPr/>
-        </p:nvSpPr>
-        <p:spPr>
-          <a:xfrm>
-            <a:off x="3447288" y="1984248"/>
-            <a:ext cx="2249424" cy="365760"/>
-          </a:xfrm>
-          <a:prstGeom prst="rect">
-            <a:avLst/>
-          </a:prstGeom>
-          <a:noFill/>
-        </p:spPr>
-        <p:txBody>
-          <a:bodyPr wrap="square" lIns="0" rIns="0" tIns="0" bIns="0">
-            <a:noAutofit/>
-          </a:bodyPr>
-          <a:lstStyle/>
-          <a:p>
-            <a:pPr algn="l">
-              <a:lnSpc>
-                <a:spcPts val="2222"/>
-              </a:lnSpc>
-              <a:spcBef>
-                <a:spcPts val="0"/>
-              </a:spcBef>
-              <a:spcAft>
-                <a:spcPts val="0"/>
-              </a:spcAft>
-              <a:buNone/>
-              <a:defRPr sz="1900" b="0">
-                <a:solidFill>
-                  <a:srgbClr val="303437"/>
-                </a:solidFill>
-                <a:latin typeface="Noto Sans"/>
-              </a:defRPr>
-            </a:pPr>
-            <a:r>
-              <a:rPr sz="1900" b="1" lang="ja-JP" altLang="en-US">
-                <a:solidFill>
-                  <a:srgbClr val="303437"/>
-                </a:solidFill>
-                <a:latin typeface="Noto Sans"/>
-                <a:ea typeface="Noto Sans CJK JP"/>
-                <a:cs typeface="Noto Sans"/>
-              </a:rPr>
-              <a:t>対象 target</a:t>
-            </a:r>
-          </a:p>
-        </p:txBody>
-      </p:sp>
-      <p:sp>
-        <p:nvSpPr>
-          <p:cNvPr id="10" name="TextBox 9"/>
-          <p:cNvSpPr txBox="1"/>
-          <p:nvPr/>
-        </p:nvSpPr>
-        <p:spPr>
-          <a:xfrm>
-            <a:off x="3447288" y="2423160"/>
-            <a:ext cx="2249424" cy="484632"/>
-          </a:xfrm>
-          <a:prstGeom prst="rect">
-            <a:avLst/>
-          </a:prstGeom>
-          <a:noFill/>
-        </p:spPr>
-        <p:txBody>
-          <a:bodyPr wrap="square" lIns="0" rIns="0" tIns="0" bIns="0">
-            <a:noAutofit/>
-          </a:bodyPr>
-          <a:lstStyle/>
-          <a:p>
-            <a:pPr algn="l">
-              <a:lnSpc>
-                <a:spcPts val="1754"/>
-              </a:lnSpc>
-              <a:spcBef>
-                <a:spcPts val="0"/>
-              </a:spcBef>
-              <a:spcAft>
-                <a:spcPts val="0"/>
-              </a:spcAft>
-              <a:buNone/>
-              <a:defRPr sz="1500" b="0">
-                <a:solidFill>
-                  <a:srgbClr val="303437"/>
-                </a:solidFill>
-                <a:latin typeface="Noto Sans"/>
-              </a:defRPr>
-            </a:pPr>
-            <a:r>
-              <a:rPr sz="1500" b="0" lang="ja-JP" altLang="en-US">
-                <a:solidFill>
-                  <a:srgbClr val="303437"/>
-                </a:solidFill>
-                <a:latin typeface="Noto Sans"/>
-                <a:ea typeface="Noto Sans CJK JP"/>
-                <a:cs typeface="Noto Sans"/>
-              </a:rPr>
-              <a:t>名詞句と代名詞の位置を指定</a:t>
-            </a:r>
-          </a:p>
-        </p:txBody>
-      </p:sp>
-      <p:sp>
-        <p:nvSpPr>
-          <p:cNvPr id="11" name="TextBox 10"/>
-          <p:cNvSpPr txBox="1"/>
-          <p:nvPr/>
-        </p:nvSpPr>
-        <p:spPr>
-          <a:xfrm>
-            <a:off x="5824728" y="2176272"/>
-            <a:ext cx="237744" cy="365760"/>
-          </a:xfrm>
-          <a:prstGeom prst="rect">
-            <a:avLst/>
-          </a:prstGeom>
-          <a:noFill/>
-        </p:spPr>
-        <p:txBody>
-          <a:bodyPr wrap="square" lIns="0" rIns="0" tIns="0" bIns="0">
-            <a:noAutofit/>
-          </a:bodyPr>
-          <a:lstStyle/>
-          <a:p>
-            <a:pPr algn="l">
-              <a:lnSpc>
-                <a:spcPts val="2340"/>
-              </a:lnSpc>
-              <a:spcBef>
-                <a:spcPts val="0"/>
-              </a:spcBef>
-              <a:spcAft>
-                <a:spcPts val="0"/>
-              </a:spcAft>
-              <a:buNone/>
-              <a:defRPr sz="2000" b="0">
-                <a:solidFill>
-                  <a:srgbClr val="303437"/>
-                </a:solidFill>
-                <a:latin typeface="Noto Sans"/>
-              </a:defRPr>
-            </a:pPr>
-            <a:r>
-              <a:rPr sz="2000" b="1" lang="ja-JP" altLang="en-US">
-                <a:solidFill>
-                  <a:srgbClr val="2C9100"/>
-                </a:solidFill>
-                <a:latin typeface="Noto Sans"/>
-                <a:ea typeface="Noto Sans CJK JP"/>
-                <a:cs typeface="Noto Sans"/>
-              </a:rPr>
-              <a:t>→</a:t>
-            </a:r>
-          </a:p>
-        </p:txBody>
-      </p:sp>
-      <p:sp>
-        <p:nvSpPr>
-          <p:cNvPr id="12" name="Rounded Rectangle 11"/>
-          <p:cNvSpPr/>
-          <p:nvPr/>
-        </p:nvSpPr>
-        <p:spPr>
-          <a:xfrm>
-            <a:off x="6080760" y="1828800"/>
-            <a:ext cx="2468880" cy="1234440"/>
-          </a:xfrm>
-          <a:prstGeom prst="roundRect">
-            <a:avLst/>
-          </a:prstGeom>
-          <a:solidFill>
-            <a:srgbClr val="EBEDEB"/>
-          </a:solidFill>
-          <a:ln>
-            <a:noFill/>
-          </a:ln>
-        </p:spPr>
-        <p:style>
-          <a:lnRef idx="1">
-            <a:schemeClr val="accent1"/>
-          </a:lnRef>
-          <a:fillRef idx="3">
-            <a:schemeClr val="accent1"/>
-          </a:fillRef>
-          <a:effectRef idx="2">
-            <a:schemeClr val="accent1"/>
-          </a:effectRef>
-          <a:fontRef idx="minor">
-            <a:schemeClr val="lt1"/>
-          </a:fontRef>
-        </p:style>
-        <p:txBody>
-          <a:bodyPr rtlCol="0" anchor="ctr"/>
-          <a:lstStyle/>
-          <a:p>
-            <a:pPr algn="ctr"/>
-          </a:p>
-        </p:txBody>
-      </p:sp>
-      <p:sp>
-        <p:nvSpPr>
-          <p:cNvPr id="13" name="TextBox 12"/>
-          <p:cNvSpPr txBox="1"/>
-          <p:nvPr/>
-        </p:nvSpPr>
-        <p:spPr>
-          <a:xfrm>
-            <a:off x="6190488" y="1984248"/>
-            <a:ext cx="2249424" cy="365760"/>
-          </a:xfrm>
-          <a:prstGeom prst="rect">
-            <a:avLst/>
-          </a:prstGeom>
-          <a:noFill/>
-        </p:spPr>
-        <p:txBody>
-          <a:bodyPr wrap="square" lIns="0" rIns="0" tIns="0" bIns="0">
-            <a:noAutofit/>
-          </a:bodyPr>
-          <a:lstStyle/>
-          <a:p>
-            <a:pPr algn="l">
-              <a:lnSpc>
-                <a:spcPts val="2222"/>
-              </a:lnSpc>
-              <a:spcBef>
-                <a:spcPts val="0"/>
-              </a:spcBef>
-              <a:spcAft>
-                <a:spcPts val="0"/>
-              </a:spcAft>
-              <a:buNone/>
-              <a:defRPr sz="1900" b="0">
-                <a:solidFill>
-                  <a:srgbClr val="303437"/>
-                </a:solidFill>
-                <a:latin typeface="Noto Sans"/>
-              </a:defRPr>
-            </a:pPr>
-            <a:r>
-              <a:rPr sz="1900" b="1" lang="ja-JP" altLang="en-US">
-                <a:solidFill>
-                  <a:srgbClr val="303437"/>
-                </a:solidFill>
-                <a:latin typeface="Noto Sans"/>
-                <a:ea typeface="Noto Sans CJK JP"/>
-                <a:cs typeface="Noto Sans"/>
-              </a:rPr>
-              <a:t>ラベル label</a:t>
-            </a:r>
-          </a:p>
-        </p:txBody>
-      </p:sp>
-      <p:sp>
-        <p:nvSpPr>
-          <p:cNvPr id="14" name="TextBox 13"/>
-          <p:cNvSpPr txBox="1"/>
-          <p:nvPr/>
-        </p:nvSpPr>
-        <p:spPr>
-          <a:xfrm>
-            <a:off x="6190488" y="2423160"/>
-            <a:ext cx="2249424" cy="484632"/>
-          </a:xfrm>
-          <a:prstGeom prst="rect">
-            <a:avLst/>
-          </a:prstGeom>
-          <a:noFill/>
-        </p:spPr>
-        <p:txBody>
-          <a:bodyPr wrap="square" lIns="0" rIns="0" tIns="0" bIns="0">
-            <a:noAutofit/>
-          </a:bodyPr>
-          <a:lstStyle/>
-          <a:p>
-            <a:pPr algn="l">
-              <a:lnSpc>
-                <a:spcPts val="1754"/>
-              </a:lnSpc>
-              <a:spcBef>
-                <a:spcPts val="0"/>
-              </a:spcBef>
-              <a:spcAft>
-                <a:spcPts val="0"/>
-              </a:spcAft>
-              <a:buNone/>
-              <a:defRPr sz="1500" b="0">
-                <a:solidFill>
-                  <a:srgbClr val="303437"/>
-                </a:solidFill>
-                <a:latin typeface="Noto Sans"/>
-              </a:defRPr>
-            </a:pPr>
-            <a:r>
-              <a:rPr sz="1500" b="0" lang="ja-JP" altLang="en-US">
-                <a:solidFill>
-                  <a:srgbClr val="303437"/>
-                </a:solidFill>
-                <a:latin typeface="Noto Sans"/>
-                <a:ea typeface="Noto Sans CJK JP"/>
-                <a:cs typeface="Noto Sans"/>
-              </a:rPr>
-              <a:t>同じ対象：true／違う：false</a:t>
-            </a:r>
-          </a:p>
-        </p:txBody>
-      </p:sp>
-      <p:sp>
-        <p:nvSpPr>
-          <p:cNvPr id="15" name="TextBox 14"/>
-          <p:cNvSpPr txBox="1"/>
-          <p:nvPr/>
-        </p:nvSpPr>
-        <p:spPr>
-          <a:xfrm>
-            <a:off x="640080" y="3520440"/>
-            <a:ext cx="7863840" cy="594360"/>
-          </a:xfrm>
-          <a:prstGeom prst="rect">
-            <a:avLst/>
-          </a:prstGeom>
-          <a:noFill/>
-        </p:spPr>
-        <p:txBody>
-          <a:bodyPr wrap="square" lIns="0" rIns="0" tIns="0" bIns="0">
-            <a:noAutofit/>
-          </a:bodyPr>
-          <a:lstStyle/>
-          <a:p>
-            <a:pPr algn="l">
-              <a:lnSpc>
-                <a:spcPts val="2106"/>
-              </a:lnSpc>
-              <a:spcBef>
-                <a:spcPts val="0"/>
-              </a:spcBef>
-              <a:spcAft>
-                <a:spcPts val="0"/>
-              </a:spcAft>
-              <a:buNone/>
-              <a:defRPr sz="1800" b="0">
-                <a:solidFill>
-                  <a:srgbClr val="303437"/>
-                </a:solidFill>
-                <a:latin typeface="Noto Sans"/>
-              </a:defRPr>
-            </a:pPr>
-            <a:r>
-              <a:rPr sz="1800" b="0" lang="ja-JP" altLang="en-US">
-                <a:solidFill>
-                  <a:srgbClr val="303437"/>
-                </a:solidFill>
-                <a:latin typeface="Noto Sans"/>
-                <a:ea typeface="Noto Sans CJK JP"/>
-                <a:cs typeface="Noto Sans"/>
-              </a:rPr>
-              <a:t>分類する単位は、文章と指定された二つの箇所の組。</a:t>
-            </a:r>
-          </a:p>
-          <a:p>
-            <a:pPr algn="l">
-              <a:lnSpc>
-                <a:spcPts val="2106"/>
-              </a:lnSpc>
-              <a:spcBef>
-                <a:spcPts val="0"/>
-              </a:spcBef>
-              <a:spcAft>
-                <a:spcPts val="0"/>
-              </a:spcAft>
-              <a:buNone/>
-              <a:defRPr sz="1800" b="0">
-                <a:solidFill>
-                  <a:srgbClr val="303437"/>
-                </a:solidFill>
-                <a:latin typeface="Noto Sans"/>
-              </a:defRPr>
-            </a:pPr>
-            <a:r>
-              <a:rPr sz="1800" b="0" lang="ja-JP" altLang="en-US">
-                <a:solidFill>
-                  <a:srgbClr val="303437"/>
-                </a:solidFill>
-                <a:latin typeface="Noto Sans"/>
-                <a:ea typeface="Noto Sans CJK JP"/>
-                <a:cs typeface="Noto Sans"/>
-              </a:rPr>
-              <a:t>同じ文章が複数行に現れても、対象の組が違えば別の判定になる。</a:t>
-            </a:r>
-          </a:p>
-        </p:txBody>
-      </p:sp>
-      <p:sp>
-        <p:nvSpPr>
-          <p:cNvPr id="16" name="sources"/>
-          <p:cNvSpPr txBox="1"/>
-          <p:nvPr/>
-        </p:nvSpPr>
-        <p:spPr>
-          <a:xfrm>
-            <a:off x="502920" y="4700016"/>
-            <a:ext cx="8183879" cy="530352"/>
-          </a:xfrm>
-          <a:prstGeom prst="rect">
-            <a:avLst/>
-          </a:prstGeom>
-          <a:noFill/>
-        </p:spPr>
-        <p:txBody>
-          <a:bodyPr wrap="square" lIns="0" rIns="0" tIns="0" bIns="0">
-            <a:noAutofit/>
-          </a:bodyPr>
-          <a:lstStyle/>
-          <a:p>
-            <a:pPr algn="l">
-              <a:lnSpc>
-                <a:spcPts val="940"/>
-              </a:lnSpc>
-              <a:spcBef>
-                <a:spcPts val="0"/>
-              </a:spcBef>
-              <a:spcAft>
-                <a:spcPts val="300"/>
-              </a:spcAft>
-              <a:buNone/>
-              <a:defRPr sz="810" b="0">
-                <a:solidFill>
-                  <a:srgbClr val="303437"/>
-                </a:solidFill>
-                <a:latin typeface="Noto Sans"/>
-              </a:defRPr>
-            </a:pPr>
-            <a:r>
-              <a:rPr sz="810" b="0" lang="ja-JP" altLang="en-US">
-                <a:solidFill>
-                  <a:srgbClr val="626669"/>
-                </a:solidFill>
-                <a:latin typeface="Noto Sans"/>
-                <a:ea typeface="Noto Sans CJK JP"/>
-                <a:cs typeface="Noto Sans"/>
-              </a:rPr>
-              <a:t>[1] CLUE team. CLUEWSC2020: data format and task description.</a:t>
-            </a:r>
-          </a:p>
-          <a:p>
-            <a:pPr>
-              <a:lnSpc>
-                <a:spcPts val="940"/>
-              </a:lnSpc>
-              <a:spcAft>
-                <a:spcPts val="300"/>
-              </a:spcAft>
-              <a:buNone/>
-              <a:defRPr sz="810" b="0">
-                <a:solidFill>
-                  <a:srgbClr val="303437"/>
-                </a:solidFill>
-                <a:latin typeface="Noto Sans"/>
-              </a:defRPr>
-            </a:pPr>
-            <a:r>
-              <a:rPr sz="810" b="0" lang="ja-JP" altLang="en-US">
-                <a:solidFill>
-                  <a:srgbClr val="626669"/>
-                </a:solidFill>
-                <a:latin typeface="Noto Sans"/>
-                <a:ea typeface="Noto Sans CJK JP"/>
-                <a:cs typeface="Noto Sans"/>
-                <a:hlinkClick r:id="rId2"/>
-              </a:rPr>
-              <a:t>https://github.com/CLUEbenchmark/CLUEWSC2020/blob/446646278671444c79a67e7434b3a1d1d1cbbe88/README.md</a:t>
             </a:r>
           </a:p>
         </p:txBody>
@@ -10927,7 +10047,7 @@
                 <a:ea typeface="Noto Sans CJK JP"/>
                 <a:cs typeface="Noto Sans"/>
               </a:rPr>
-              <a:t>READMEは2021年8月29日の新testへの切替えを説明。現在のtrain/dev/testは計4,122行。</a:t>
+              <a:t>2021年8月29日にテストを更新。学習・開発・新テストは計4,122問。</a:t>
             </a:r>
           </a:p>
         </p:txBody>
@@ -11032,7 +10152,7 @@
                 <a:ea typeface="Noto Sans CJK JP"/>
                 <a:cs typeface="Noto Sans"/>
               </a:rPr>
-              <a:t>[2] CLUEbenchmark. cluewsc2020_public.zip; README dated 2021-08-29.</a:t>
+              <a:t>[2] CLUEbenchmark. CLUEWSC2020 public data; test update 2021-08-29.</a:t>
             </a:r>
             <a:r>
               <a:rPr sz="810" b="0" lang="ja-JP" altLang="en-US">
@@ -11121,7 +10241,7 @@
                 <a:ea typeface="Noto Sans CJK JP"/>
                 <a:cs typeface="Noto Sans"/>
               </a:rPr>
-              <a:t>文章数と、対象組の行数は異なる</a:t>
+              <a:t>一つの文章から、複数の問題を作る</a:t>
             </a:r>
           </a:p>
         </p:txBody>
@@ -11281,7 +10401,7 @@
                           <a:ea typeface="Noto Sans CJK JP"/>
                           <a:cs typeface="Noto Sans"/>
                         </a:rPr>
-                        <a:t>行数</a:t>
+                        <a:t>問題数</a:t>
                       </a:r>
                     </a:p>
                   </a:txBody>
@@ -11337,7 +10457,7 @@
                           <a:ea typeface="Noto Sans CJK JP"/>
                           <a:cs typeface="Noto Sans"/>
                         </a:rPr>
-                        <a:t>異なるtext数</a:t>
+                        <a:t>文章数</a:t>
                       </a:r>
                     </a:p>
                   </a:txBody>
@@ -12307,7 +11427,7 @@
                 <a:ea typeface="Noto Sans CJK JP"/>
                 <a:cs typeface="Noto Sans"/>
               </a:rPr>
-              <a:t>現在の公開ZIPから再集計。四ファイル合計4,412行には、新旧テストの両方が含まれる。</a:t>
+              <a:t>学習では387文章から1,244問、開発では104文章から304問を作っている。表は現在の公開データの構成。</a:t>
             </a:r>
           </a:p>
         </p:txBody>
@@ -12361,7 +11481,7 @@
                 <a:ea typeface="Noto Sans CJK JP"/>
                 <a:cs typeface="Noto Sans"/>
               </a:rPr>
-              <a:t>[1] CLUEbenchmark. cluewsc2020_public.zip; README dated 2021-08-29.</a:t>
+              <a:t>[1] CLUEbenchmark. CLUEWSC2020 public data; test update 2021-08-29.</a:t>
             </a:r>
             <a:r>
               <a:rPr sz="810" b="0" lang="ja-JP" altLang="en-US">
@@ -12503,7 +11623,7 @@
                 <a:ea typeface="Noto Sans CJK JP"/>
                 <a:cs typeface="Noto Sans"/>
               </a:rPr>
-              <a:t>他・她・它に加え、他们・她们・它们のような複数形や「其」も含む。人と物、単数と複数の区別が手掛かりになる。</a:t>
+              <a:t>他・她・它に加え、他们・她们・它们のような複数形や「其」も含む。人と物、単数と複数の違いが手掛かりになる。</a:t>
             </a:r>
           </a:p>
           <a:p>
@@ -12533,7 +11653,7 @@
                 <a:ea typeface="Noto Sans CJK JP"/>
                 <a:cs typeface="Noto Sans"/>
               </a:rPr>
-              <a:t>それだけで決まるとは限らない。招く側と招かれる側、物を運ぶ人と運ばれる物など、文の役割と動作の対象を読み分ける。</a:t>
+              <a:t>招く側と招かれる側、物を運ぶ人と運ばれる物など、文の役割と動作の対象も読み取る。複数の人物が続けて登場する文章では、談話の流れが重要になる。</a:t>
             </a:r>
           </a:p>
           <a:p>
@@ -12563,7 +11683,7 @@
                 <a:ea typeface="Noto Sans CJK JP"/>
                 <a:cs typeface="Noto Sans"/>
               </a:rPr>
-              <a:t>本資料の13例は、異なる文章を使った学習・開発の公開例。ラベルを取得できないテストに、推測で正解を付けていない。</a:t>
+              <a:t>本資料では、正解が公開されている学習・開発データから、異なる文章の13問を紹介する。</a:t>
             </a:r>
           </a:p>
         </p:txBody>
@@ -12665,7 +11785,7 @@
                 <a:ea typeface="Noto Sans CJK JP"/>
                 <a:cs typeface="Noto Sans"/>
               </a:rPr>
-              <a:t>[1] CLUEbenchmark. cluewsc2020_public.zip; README dated 2021-08-29.</a:t>
+              <a:t>[1] CLUEbenchmark. CLUEWSC2020 public data; test update 2021-08-29.</a:t>
             </a:r>
             <a:r>
               <a:rPr sz="810" b="0" lang="ja-JP" altLang="en-US">
@@ -12921,7 +12041,7 @@
                 <a:ea typeface="Noto Sans CJK JP"/>
                 <a:cs typeface="Noto Sans"/>
               </a:rPr>
-              <a:t>予測したtrue/falseと、参照ラベルが一致した問題の割合を正答率とする。文章中の名詞を自由に生成して、文字列の類似度を測る課題ではない。</a:t>
+              <a:t>正答率は、予測したtrue/falseが正解ラベルと一致した問題の割合。指定された名詞句と代名詞が、同じ対象を指すかを評価する。</a:t>
             </a:r>
           </a:p>
           <a:p>
@@ -12951,7 +12071,7 @@
                 <a:ea typeface="Noto Sans CJK JP"/>
                 <a:cs typeface="Noto Sans"/>
               </a:rPr>
-              <a:t>歴史的なモデル性能は、2020年のテスト290問に対する報告値。現在の2,574問の公開テストを採点し直した値ではない。</a:t>
+              <a:t>次のモデル性能は、構築時の2020年テスト290問に対する報告値。現在公開されているテストは2,574問に更新されている。</a:t>
             </a:r>
           </a:p>
           <a:p>
@@ -12981,7 +12101,7 @@
                 <a:ea typeface="Noto Sans CJK JP"/>
                 <a:cs typeface="Noto Sans"/>
               </a:rPr>
-              <a:t>CLEVAもaccuracyを用いる。テンプレートで整形した回答やモデルへの提示方法は、元のJSONLとは区別する。</a:t>
+              <a:t>CLEVAの共参照解決でも正答率を用い、言語モデルがプロンプトへ答える形で評価する。</a:t>
             </a:r>
           </a:p>
         </p:txBody>
@@ -13349,7 +12469,7 @@
                 <a:ea typeface="Noto Sans CJK JP"/>
                 <a:cs typeface="Noto Sans"/>
               </a:rPr>
-              <a:t>[1] CLUE team. CLUEWSC2020 official repository. Fixed commit 44664627.</a:t>
+              <a:t>[1] CLUE team. CLUEWSC2020 official repository.</a:t>
             </a:r>
             <a:r>
               <a:rPr sz="810" b="0" lang="ja-JP" altLang="en-US">
@@ -13736,7 +12856,7 @@
                 <a:ea typeface="Noto Sans CJK JP"/>
                 <a:cs typeface="Noto Sans"/>
               </a:rPr>
-              <a:t>注釈者は、開発データ30〜50問を解いて議論した後に評価した。未経験の一般読者が、説明なしに解いた結果ではない。</a:t>
+              <a:t>注釈者は、開発データ30〜50問を解いて議論した後に評価した。</a:t>
             </a:r>
           </a:p>
           <a:p>
@@ -13766,7 +12886,7 @@
                 <a:ea typeface="Noto Sans CJK JP"/>
                 <a:cs typeface="Noto Sans"/>
               </a:rPr>
-              <a:t>モデルは290問、人手はそのうち100問。評価問題数が違うため、81.38％と98％の差を、同じ問題で比べた厳密な差とは扱わない。</a:t>
+              <a:t>モデルの正答率は旧テスト全290問、人手の正答率はそのうち100問に基づく。</a:t>
             </a:r>
           </a:p>
         </p:txBody>
@@ -13957,7 +13077,7 @@
                 <a:ea typeface="Noto Sans CJK JP"/>
                 <a:cs typeface="Noto Sans"/>
               </a:rPr>
-              <a:t>学習の反復と、プロンプトの違いを分ける</a:t>
+              <a:t>モデルは3回微調整し、開発成績で選ぶ</a:t>
             </a:r>
           </a:p>
         </p:txBody>
@@ -14010,7 +13130,7 @@
                 <a:ea typeface="Noto Sans CJK JP"/>
                 <a:cs typeface="Noto Sans"/>
               </a:rPr>
-              <a:t>各モデルを3回微調整し、その中で開発成績が最良のモデルのテスト値を報告した。チェックポイントは早期停止で選び、ハイパーパラメータも開発データで調整した。</a:t>
+              <a:t>各モデルを3回微調整し、開発データで最も良い成績を出したモデルのテスト値を報告した。</a:t>
             </a:r>
           </a:p>
           <a:p>
@@ -14040,37 +13160,7 @@
                 <a:ea typeface="Noto Sans CJK JP"/>
                 <a:cs typeface="Noto Sans"/>
               </a:rPr>
-              <a:t>これは、生成モデルにプロンプトを与えて答えさせるCLEVAの評価とは異なる。3回の微調整を、3種類のプロンプトや3候補の生成と読み替えない。</a:t>
-            </a:r>
-          </a:p>
-          <a:p>
-            <a:pPr marL="457200" indent="-355600">
-              <a:lnSpc>
-                <a:spcPts val="2261"/>
-              </a:lnSpc>
-              <a:spcAft>
-                <a:spcPts val="0"/>
-              </a:spcAft>
-              <a:buSzPct val="70000"/>
-              <a:buFont typeface="Noto Sans CJK JP"/>
-              <a:buChar char="●"/>
-              <a:defRPr sz="1900" b="0">
-                <a:solidFill>
-                  <a:srgbClr val="303437"/>
-                </a:solidFill>
-                <a:latin typeface="Noto Sans"/>
-              </a:defRPr>
-            </a:pPr>
-            <a:r>
-              <a:rPr sz="1900" b="0" lang="ja-JP" altLang="en-US">
-                <a:solidFill>
-                  <a:srgbClr val="303437"/>
-                </a:solidFill>
-                <a:latin typeface="Noto Sans"/>
-                <a:ea typeface="Noto Sans CJK JP"/>
-                <a:cs typeface="Noto Sans"/>
-              </a:rPr>
-              <a:t>公式リポジトリの開発精度と、正式論文のテスト精度も評価対象が違う。ここでは正式論文のテスト値を歴史的な比較として示した。</a:t>
+              <a:t>この結果は、教師あり学習で指示関係を判定するモデルの歴史的な比較。後にCLEVAでは、生成モデルにプロンプトを与えて答えさせる課題としても利用された。</a:t>
             </a:r>
           </a:p>
         </p:txBody>
@@ -14223,7 +13313,7 @@
                 <a:ea typeface="Noto Sans CJK JP"/>
                 <a:cs typeface="Noto Sans"/>
               </a:rPr>
-              <a:t>[2] CLUE team. CLUEWSC2020: data format and task description.</a:t>
+              <a:t>[2] CLUE team. CLUEWSC2020: WSC Winograd模式挑战中文版，中文指代消解任务.</a:t>
             </a:r>
           </a:p>
           <a:p>
@@ -14318,7 +13408,7 @@
                 <a:ea typeface="Noto Sans CJK JP"/>
                 <a:cs typeface="Noto Sans"/>
               </a:rPr>
-              <a:t>採用先と、元の公開データを分ける</a:t>
+              <a:t>中国語の指示関係を、モデル評価へ</a:t>
             </a:r>
           </a:p>
         </p:txBody>
@@ -14485,7 +13575,7 @@
                 <a:ea typeface="Noto Sans CJK JP"/>
                 <a:cs typeface="Noto Sans"/>
               </a:rPr>
-              <a:t>元のWinograd Schema Challengeは、曖昧な代名詞を解く課題。語を一つか二つ変えると、指す対象が入れ替わる文の対を重視した。</a:t>
+              <a:t>Winograd Schema Challenge（2012年）は、常識を使って曖昧な代名詞を解く課題。語を一つか二つ変えると、指す対象が入れ替わる文の対を重視した。</a:t>
             </a:r>
           </a:p>
           <a:p>
@@ -14515,7 +13605,7 @@
                 <a:ea typeface="Noto Sans CJK JP"/>
                 <a:cs typeface="Noto Sans"/>
               </a:rPr>
-              <a:t>CLUEWSC2020は中国語の文学作品から文章を選び、指定された二箇所の同一指示を二値で判定する。元WSCの英語問題をそのまま翻訳した集合ではない。</a:t>
+              <a:t>CLUEWSC2020は、中国語の文学作品から自然な文章を選び、指定された名詞句と代名詞が同じ対象を指すかを二値で判定する。</a:t>
             </a:r>
           </a:p>
           <a:p>
@@ -14545,7 +13635,7 @@
                 <a:ea typeface="Noto Sans CJK JP"/>
                 <a:cs typeface="Noto Sans"/>
               </a:rPr>
-              <a:t>公開の各行が、語を少し変えた最小対になっているとは限らない。作品の文脈、動作、常識を読む自然な文章として扱う。</a:t>
+              <a:t>語を置き換えた文の対に限らず、作品中の動作や会話、常識を手掛かりに、文章内の人物や物の関係を読む。</a:t>
             </a:r>
           </a:p>
         </p:txBody>
@@ -14840,7 +13930,7 @@
                 <a:ea typeface="Noto Sans CJK JP"/>
                 <a:cs typeface="Noto Sans"/>
               </a:rPr>
-              <a:t>CLEVAの論文は、共参照解決にCLUEWSCから抽出したデータを使うと記す。紙面例は本資料の実例2と、文章・対象組・否定の正解が一致する。</a:t>
+              <a:t>CLEVAは、CLUEWSCから抽出した問題を共参照解決の評価に使う。論文に掲載された例が、本資料の実例2に当たる。</a:t>
             </a:r>
           </a:p>
           <a:p>
@@ -14870,7 +13960,7 @@
                 <a:ea typeface="Noto Sans CJK JP"/>
                 <a:cs typeface="Noto Sans"/>
               </a:rPr>
-              <a:t>HELM v0.4.0のCLEVACoreferenceResolutionScenarioは、実例1の塊と「它们」を「不是／是」の二候補で示す。</a:t>
+              <a:t>HELMのCLEVA実装では、プロンプトに文章と問いを組み込み、回答候補を用意する。実例1は「不是／是」の二候補を使う説明例として載っている。</a:t>
             </a:r>
           </a:p>
           <a:p>
@@ -14900,7 +13990,7 @@
                 <a:ea typeface="Noto Sans CJK JP"/>
                 <a:cs typeface="Noto Sans"/>
               </a:rPr>
-              <a:t>ただし、CLEVAが選んだ全問題と変換済みファイルは今回取得できていない。元CLUEの全件数や分割を、CLEVAの実行件数と同一視しない。</a:t>
+              <a:t>CLEVAで選定された全問題や推論条件の詳細は確認できないため、ここでは元のCLUEWSC2020の構成と、公開されている利用方法を紹介する。</a:t>
             </a:r>
           </a:p>
         </p:txBody>
@@ -15083,866 +14173,6 @@
                 <a:hlinkClick r:id="rId3"/>
               </a:rPr>
               <a:t>https://github.com/stanford-crfm/helm/blob/v0.4.0/src/helm/benchmark/scenarios/cleva_scenario.py</a:t>
-            </a:r>
-          </a:p>
-        </p:txBody>
-      </p:sp>
-    </p:spTree>
-  </p:cSld>
-  <p:clrMapOvr>
-    <a:masterClrMapping/>
-  </p:clrMapOvr>
-</p:sld>
-</file>
-
-<file path=ppt/slides/slide26.xml><?xml version="1.0" encoding="utf-8"?>
-<p:sld xmlns:a="http://schemas.openxmlformats.org/drawingml/2006/main" xmlns:p="http://schemas.openxmlformats.org/presentationml/2006/main" xmlns:r="http://schemas.openxmlformats.org/officeDocument/2006/relationships">
-  <p:cSld>
-    <p:spTree>
-      <p:nvGrpSpPr>
-        <p:cNvPr id="1" name=""/>
-        <p:cNvGrpSpPr/>
-        <p:nvPr/>
-      </p:nvGrpSpPr>
-      <p:grpSpPr/>
-      <p:sp>
-        <p:nvSpPr>
-          <p:cNvPr id="2" name="Title 1"/>
-          <p:cNvSpPr>
-            <a:spLocks noGrp="1"/>
-          </p:cNvSpPr>
-          <p:nvPr>
-            <p:ph type="title"/>
-          </p:nvPr>
-        </p:nvSpPr>
-        <p:spPr>
-          <a:xfrm>
-            <a:off x="468172" y="650138"/>
-            <a:ext cx="8206740" cy="616305"/>
-          </a:xfrm>
-        </p:spPr>
-        <p:txBody>
-          <a:bodyPr wrap="square" lIns="0" rIns="0" tIns="0" bIns="0">
-            <a:noAutofit/>
-          </a:bodyPr>
-          <a:lstStyle/>
-          <a:p>
-            <a:pPr algn="l">
-              <a:lnSpc>
-                <a:spcPct val="110000"/>
-              </a:lnSpc>
-              <a:buNone/>
-              <a:defRPr sz="2800" b="0">
-                <a:solidFill>
-                  <a:srgbClr val="303437"/>
-                </a:solidFill>
-                <a:latin typeface="Noto Sans"/>
-              </a:defRPr>
-            </a:pPr>
-            <a:r>
-              <a:rPr sz="2800" b="1" lang="ja-JP" altLang="en-US">
-                <a:solidFill>
-                  <a:srgbClr val="303437"/>
-                </a:solidFill>
-                <a:latin typeface="Noto Sans"/>
-                <a:ea typeface="Noto Sans CJK JP"/>
-                <a:cs typeface="Noto Sans"/>
-              </a:rPr>
-              <a:t>設定の存在と、公開runの存在</a:t>
-            </a:r>
-          </a:p>
-        </p:txBody>
-      </p:sp>
-      <p:sp>
-        <p:nvSpPr>
-          <p:cNvPr id="3" name="Title 2"/>
-          <p:cNvSpPr>
-            <a:spLocks noGrp="1"/>
-          </p:cNvSpPr>
-          <p:nvPr>
-            <p:ph type="title" idx="2"/>
-          </p:nvPr>
-        </p:nvSpPr>
-        <p:spPr>
-          <a:xfrm>
-            <a:off x="75895" y="0"/>
-            <a:ext cx="8115300" cy="480060"/>
-          </a:xfrm>
-        </p:spPr>
-        <p:txBody>
-          <a:bodyPr wrap="square" lIns="0" rIns="0" tIns="0" bIns="0" anchor="ctr">
-            <a:noAutofit/>
-          </a:bodyPr>
-          <a:lstStyle/>
-          <a:p>
-            <a:pPr algn="l">
-              <a:lnSpc>
-                <a:spcPct val="110000"/>
-              </a:lnSpc>
-              <a:buNone/>
-              <a:defRPr sz="1400" b="0">
-                <a:solidFill>
-                  <a:srgbClr val="303437"/>
-                </a:solidFill>
-                <a:latin typeface="Noto Sans"/>
-              </a:defRPr>
-            </a:pPr>
-            <a:r>
-              <a:rPr sz="1400" b="1" lang="ja-JP" altLang="en-US">
-                <a:solidFill>
-                  <a:srgbClr val="FFFEF8"/>
-                </a:solidFill>
-                <a:latin typeface="Noto Sans"/>
-                <a:ea typeface="Noto Sans CJK JP"/>
-                <a:cs typeface="Noto Sans"/>
-              </a:rPr>
-              <a:t>4. CLUEとCLEVAでの利用</a:t>
-            </a:r>
-          </a:p>
-        </p:txBody>
-      </p:sp>
-      <p:graphicFrame>
-        <p:nvGraphicFramePr>
-          <p:cNvPr id="4" name="Table 3"/>
-          <p:cNvGraphicFramePr>
-            <a:graphicFrameLocks noGrp="1"/>
-          </p:cNvGraphicFramePr>
-          <p:nvPr/>
-        </p:nvGraphicFramePr>
-        <p:xfrm>
-          <a:off x="548640" y="1508760"/>
-          <a:ext cx="8046720" cy="1812925"/>
-        </p:xfrm>
-        <a:graphic>
-          <a:graphicData uri="http://schemas.openxmlformats.org/drawingml/2006/table">
-            <a:tbl>
-              <a:tblPr firstRow="0" bandRow="0"/>
-              <a:tblGrid>
-                <a:gridCol w="2651760"/>
-                <a:gridCol w="5394960"/>
-              </a:tblGrid>
-              <a:tr h="362585">
-                <a:tc>
-                  <a:txBody>
-                    <a:bodyPr wrap="square">
-                      <a:noAutofit/>
-                    </a:bodyPr>
-                    <a:lstStyle/>
-                    <a:p>
-                      <a:pPr algn="l">
-                        <a:lnSpc>
-                          <a:spcPts val="1954"/>
-                        </a:lnSpc>
-                        <a:buNone/>
-                        <a:defRPr sz="1700" b="0">
-                          <a:solidFill>
-                            <a:srgbClr val="303437"/>
-                          </a:solidFill>
-                          <a:latin typeface="Noto Sans"/>
-                        </a:defRPr>
-                      </a:pPr>
-                      <a:r>
-                        <a:rPr sz="1700" b="0" lang="ja-JP" altLang="en-US">
-                          <a:solidFill>
-                            <a:srgbClr val="303437"/>
-                          </a:solidFill>
-                          <a:latin typeface="Noto Sans"/>
-                          <a:ea typeface="Noto Sans CJK JP"/>
-                          <a:cs typeface="Noto Sans"/>
-                        </a:rPr>
-                        <a:t>確認対象</a:t>
-                      </a:r>
-                    </a:p>
-                  </a:txBody>
-                  <a:tcPr marL="63500" marR="63500" marT="38100" marB="38100" anchor="ctr">
-                    <a:lnL w="7620">
-                      <a:noFill/>
-                    </a:lnL>
-                    <a:lnR w="7620">
-                      <a:noFill/>
-                    </a:lnR>
-                    <a:lnT w="15240">
-                      <a:solidFill>
-                        <a:srgbClr val="626669"/>
-                      </a:solidFill>
-                      <a:prstDash val="solid"/>
-                    </a:lnT>
-                    <a:lnB w="7620">
-                      <a:solidFill>
-                        <a:srgbClr val="626669"/>
-                      </a:solidFill>
-                      <a:prstDash val="solid"/>
-                    </a:lnB>
-                    <a:solidFill>
-                      <a:srgbClr val="FFFEF8"/>
-                    </a:solidFill>
-                  </a:tcPr>
-                </a:tc>
-                <a:tc>
-                  <a:txBody>
-                    <a:bodyPr wrap="square">
-                      <a:noAutofit/>
-                    </a:bodyPr>
-                    <a:lstStyle/>
-                    <a:p>
-                      <a:pPr algn="l">
-                        <a:lnSpc>
-                          <a:spcPts val="1954"/>
-                        </a:lnSpc>
-                        <a:buNone/>
-                        <a:defRPr sz="1700" b="0">
-                          <a:solidFill>
-                            <a:srgbClr val="303437"/>
-                          </a:solidFill>
-                          <a:latin typeface="Noto Sans"/>
-                        </a:defRPr>
-                      </a:pPr>
-                      <a:r>
-                        <a:rPr sz="1700" b="0" lang="ja-JP" altLang="en-US">
-                          <a:solidFill>
-                            <a:srgbClr val="303437"/>
-                          </a:solidFill>
-                          <a:latin typeface="Noto Sans"/>
-                          <a:ea typeface="Noto Sans CJK JP"/>
-                          <a:cs typeface="Noto Sans"/>
-                        </a:rPr>
-                        <a:t>確認できること</a:t>
-                      </a:r>
-                    </a:p>
-                  </a:txBody>
-                  <a:tcPr marL="63500" marR="63500" marT="38100" marB="38100" anchor="ctr">
-                    <a:lnL w="7620">
-                      <a:noFill/>
-                    </a:lnL>
-                    <a:lnR w="7620">
-                      <a:noFill/>
-                    </a:lnR>
-                    <a:lnT w="15240">
-                      <a:solidFill>
-                        <a:srgbClr val="626669"/>
-                      </a:solidFill>
-                      <a:prstDash val="solid"/>
-                    </a:lnT>
-                    <a:lnB w="7620">
-                      <a:solidFill>
-                        <a:srgbClr val="626669"/>
-                      </a:solidFill>
-                      <a:prstDash val="solid"/>
-                    </a:lnB>
-                    <a:solidFill>
-                      <a:srgbClr val="FFFEF8"/>
-                    </a:solidFill>
-                  </a:tcPr>
-                </a:tc>
-              </a:tr>
-              <a:tr h="362585">
-                <a:tc>
-                  <a:txBody>
-                    <a:bodyPr wrap="square">
-                      <a:noAutofit/>
-                    </a:bodyPr>
-                    <a:lstStyle/>
-                    <a:p>
-                      <a:pPr algn="l">
-                        <a:lnSpc>
-                          <a:spcPts val="1954"/>
-                        </a:lnSpc>
-                        <a:buNone/>
-                        <a:defRPr sz="1700" b="0">
-                          <a:solidFill>
-                            <a:srgbClr val="303437"/>
-                          </a:solidFill>
-                          <a:latin typeface="Noto Sans"/>
-                        </a:defRPr>
-                      </a:pPr>
-                      <a:r>
-                        <a:rPr sz="1700" b="0" lang="ja-JP" altLang="en-US">
-                          <a:solidFill>
-                            <a:srgbClr val="303437"/>
-                          </a:solidFill>
-                          <a:latin typeface="Noto Sans"/>
-                          <a:ea typeface="Noto Sans CJK JP"/>
-                          <a:cs typeface="Noto Sans"/>
-                        </a:rPr>
-                        <a:t>CLEVA v1設定</a:t>
-                      </a:r>
-                    </a:p>
-                  </a:txBody>
-                  <a:tcPr marL="63500" marR="63500" marT="38100" marB="38100" anchor="ctr">
-                    <a:lnL w="7620">
-                      <a:noFill/>
-                    </a:lnL>
-                    <a:lnR w="7620">
-                      <a:noFill/>
-                    </a:lnR>
-                    <a:lnT w="7620">
-                      <a:solidFill>
-                        <a:srgbClr val="626669"/>
-                      </a:solidFill>
-                      <a:prstDash val="solid"/>
-                    </a:lnT>
-                    <a:lnB w="7620">
-                      <a:noFill/>
-                    </a:lnB>
-                    <a:solidFill>
-                      <a:srgbClr val="FFFEF8"/>
-                    </a:solidFill>
-                  </a:tcPr>
-                </a:tc>
-                <a:tc>
-                  <a:txBody>
-                    <a:bodyPr wrap="square">
-                      <a:noAutofit/>
-                    </a:bodyPr>
-                    <a:lstStyle/>
-                    <a:p>
-                      <a:pPr algn="l">
-                        <a:lnSpc>
-                          <a:spcPts val="1954"/>
-                        </a:lnSpc>
-                        <a:buNone/>
-                        <a:defRPr sz="1700" b="0">
-                          <a:solidFill>
-                            <a:srgbClr val="303437"/>
-                          </a:solidFill>
-                          <a:latin typeface="Noto Sans"/>
-                        </a:defRPr>
-                      </a:pPr>
-                      <a:r>
-                        <a:rPr sz="1700" b="0" lang="ja-JP" altLang="en-US">
-                          <a:solidFill>
-                            <a:srgbClr val="303437"/>
-                          </a:solidFill>
-                          <a:latin typeface="Noto Sans"/>
-                          <a:ea typeface="Noto Sans CJK JP"/>
-                          <a:cs typeface="Noto Sans"/>
-                        </a:rPr>
-                        <a:t>coreference_resolutionのprompt_id 0〜5</a:t>
-                      </a:r>
-                    </a:p>
-                  </a:txBody>
-                  <a:tcPr marL="63500" marR="63500" marT="38100" marB="38100" anchor="ctr">
-                    <a:lnL w="7620">
-                      <a:noFill/>
-                    </a:lnL>
-                    <a:lnR w="7620">
-                      <a:noFill/>
-                    </a:lnR>
-                    <a:lnT w="7620">
-                      <a:solidFill>
-                        <a:srgbClr val="626669"/>
-                      </a:solidFill>
-                      <a:prstDash val="solid"/>
-                    </a:lnT>
-                    <a:lnB w="7620">
-                      <a:noFill/>
-                    </a:lnB>
-                    <a:solidFill>
-                      <a:srgbClr val="FFFEF8"/>
-                    </a:solidFill>
-                  </a:tcPr>
-                </a:tc>
-              </a:tr>
-              <a:tr h="362585">
-                <a:tc>
-                  <a:txBody>
-                    <a:bodyPr wrap="square">
-                      <a:noAutofit/>
-                    </a:bodyPr>
-                    <a:lstStyle/>
-                    <a:p>
-                      <a:pPr algn="l">
-                        <a:lnSpc>
-                          <a:spcPts val="1954"/>
-                        </a:lnSpc>
-                        <a:buNone/>
-                        <a:defRPr sz="1700" b="0">
-                          <a:solidFill>
-                            <a:srgbClr val="303437"/>
-                          </a:solidFill>
-                          <a:latin typeface="Noto Sans"/>
-                        </a:defRPr>
-                      </a:pPr>
-                      <a:r>
-                        <a:rPr sz="1700" b="0" lang="ja-JP" altLang="en-US">
-                          <a:solidFill>
-                            <a:srgbClr val="303437"/>
-                          </a:solidFill>
-                          <a:latin typeface="Noto Sans"/>
-                          <a:ea typeface="Noto Sans CJK JP"/>
-                          <a:cs typeface="Noto Sans"/>
-                        </a:rPr>
-                        <a:t>HELM v0.4.0実装</a:t>
-                      </a:r>
-                    </a:p>
-                  </a:txBody>
-                  <a:tcPr marL="63500" marR="63500" marT="38100" marB="38100" anchor="ctr">
-                    <a:lnL w="7620">
-                      <a:noFill/>
-                    </a:lnL>
-                    <a:lnR w="7620">
-                      <a:noFill/>
-                    </a:lnR>
-                    <a:lnT w="7620">
-                      <a:noFill/>
-                    </a:lnT>
-                    <a:lnB w="7620">
-                      <a:noFill/>
-                    </a:lnB>
-                    <a:solidFill>
-                      <a:srgbClr val="FFFEF8"/>
-                    </a:solidFill>
-                  </a:tcPr>
-                </a:tc>
-                <a:tc>
-                  <a:txBody>
-                    <a:bodyPr wrap="square">
-                      <a:noAutofit/>
-                    </a:bodyPr>
-                    <a:lstStyle/>
-                    <a:p>
-                      <a:pPr algn="l">
-                        <a:lnSpc>
-                          <a:spcPts val="1954"/>
-                        </a:lnSpc>
-                        <a:buNone/>
-                        <a:defRPr sz="1700" b="0">
-                          <a:solidFill>
-                            <a:srgbClr val="303437"/>
-                          </a:solidFill>
-                          <a:latin typeface="Noto Sans"/>
-                        </a:defRPr>
-                      </a:pPr>
-                      <a:r>
-                        <a:rPr sz="1700" b="0" lang="ja-JP" altLang="en-US">
-                          <a:solidFill>
-                            <a:srgbClr val="303437"/>
-                          </a:solidFill>
-                          <a:latin typeface="Noto Sans"/>
-                          <a:ea typeface="Noto Sans CJK JP"/>
-                          <a:cs typeface="Noto Sans"/>
-                        </a:rPr>
-                        <a:t>テンプレートを読み、入力と参照を構成</a:t>
-                      </a:r>
-                    </a:p>
-                  </a:txBody>
-                  <a:tcPr marL="63500" marR="63500" marT="38100" marB="38100" anchor="ctr">
-                    <a:lnL w="7620">
-                      <a:noFill/>
-                    </a:lnL>
-                    <a:lnR w="7620">
-                      <a:noFill/>
-                    </a:lnR>
-                    <a:lnT w="7620">
-                      <a:noFill/>
-                    </a:lnT>
-                    <a:lnB w="7620">
-                      <a:noFill/>
-                    </a:lnB>
-                    <a:solidFill>
-                      <a:srgbClr val="FFFEF8"/>
-                    </a:solidFill>
-                  </a:tcPr>
-                </a:tc>
-              </a:tr>
-              <a:tr h="362585">
-                <a:tc>
-                  <a:txBody>
-                    <a:bodyPr wrap="square">
-                      <a:noAutofit/>
-                    </a:bodyPr>
-                    <a:lstStyle/>
-                    <a:p>
-                      <a:pPr algn="l">
-                        <a:lnSpc>
-                          <a:spcPts val="1954"/>
-                        </a:lnSpc>
-                        <a:buNone/>
-                        <a:defRPr sz="1700" b="0">
-                          <a:solidFill>
-                            <a:srgbClr val="303437"/>
-                          </a:solidFill>
-                          <a:latin typeface="Noto Sans"/>
-                        </a:defRPr>
-                      </a:pPr>
-                      <a:r>
-                        <a:rPr sz="1700" b="0" lang="ja-JP" altLang="en-US">
-                          <a:solidFill>
-                            <a:srgbClr val="303437"/>
-                          </a:solidFill>
-                          <a:latin typeface="Noto Sans"/>
-                          <a:ea typeface="Noto Sans CJK JP"/>
-                          <a:cs typeface="Noto Sans"/>
-                        </a:rPr>
-                        <a:t>Classic公開索引</a:t>
-                      </a:r>
-                    </a:p>
-                  </a:txBody>
-                  <a:tcPr marL="63500" marR="63500" marT="38100" marB="38100" anchor="ctr">
-                    <a:lnL w="7620">
-                      <a:noFill/>
-                    </a:lnL>
-                    <a:lnR w="7620">
-                      <a:noFill/>
-                    </a:lnR>
-                    <a:lnT w="7620">
-                      <a:noFill/>
-                    </a:lnT>
-                    <a:lnB w="7620">
-                      <a:noFill/>
-                    </a:lnB>
-                    <a:solidFill>
-                      <a:srgbClr val="FFFEF8"/>
-                    </a:solidFill>
-                  </a:tcPr>
-                </a:tc>
-                <a:tc>
-                  <a:txBody>
-                    <a:bodyPr wrap="square">
-                      <a:noAutofit/>
-                    </a:bodyPr>
-                    <a:lstStyle/>
-                    <a:p>
-                      <a:pPr algn="l">
-                        <a:lnSpc>
-                          <a:spcPts val="1954"/>
-                        </a:lnSpc>
-                        <a:buNone/>
-                        <a:defRPr sz="1700" b="0">
-                          <a:solidFill>
-                            <a:srgbClr val="303437"/>
-                          </a:solidFill>
-                          <a:latin typeface="Noto Sans"/>
-                        </a:defRPr>
-                      </a:pPr>
-                      <a:r>
-                        <a:rPr sz="1700" b="0" lang="ja-JP" altLang="en-US">
-                          <a:solidFill>
-                            <a:srgbClr val="303437"/>
-                          </a:solidFill>
-                          <a:latin typeface="Noto Sans"/>
-                          <a:ea typeface="Noto Sans CJK JP"/>
-                          <a:cs typeface="Noto Sans"/>
-                        </a:rPr>
-                        <a:t>8,526 spec中、CLEVA名の項目は0件</a:t>
-                      </a:r>
-                    </a:p>
-                  </a:txBody>
-                  <a:tcPr marL="63500" marR="63500" marT="38100" marB="38100" anchor="ctr">
-                    <a:lnL w="7620">
-                      <a:noFill/>
-                    </a:lnL>
-                    <a:lnR w="7620">
-                      <a:noFill/>
-                    </a:lnR>
-                    <a:lnT w="7620">
-                      <a:noFill/>
-                    </a:lnT>
-                    <a:lnB w="7620">
-                      <a:noFill/>
-                    </a:lnB>
-                    <a:solidFill>
-                      <a:srgbClr val="FFFEF8"/>
-                    </a:solidFill>
-                  </a:tcPr>
-                </a:tc>
-              </a:tr>
-              <a:tr h="362585">
-                <a:tc>
-                  <a:txBody>
-                    <a:bodyPr wrap="square">
-                      <a:noAutofit/>
-                    </a:bodyPr>
-                    <a:lstStyle/>
-                    <a:p>
-                      <a:pPr algn="l">
-                        <a:lnSpc>
-                          <a:spcPts val="1954"/>
-                        </a:lnSpc>
-                        <a:buNone/>
-                        <a:defRPr sz="1700" b="0">
-                          <a:solidFill>
-                            <a:srgbClr val="303437"/>
-                          </a:solidFill>
-                          <a:latin typeface="Noto Sans"/>
-                        </a:defRPr>
-                      </a:pPr>
-                      <a:r>
-                        <a:rPr sz="1700" b="0" lang="ja-JP" altLang="en-US">
-                          <a:solidFill>
-                            <a:srgbClr val="303437"/>
-                          </a:solidFill>
-                          <a:latin typeface="Noto Sans"/>
-                          <a:ea typeface="Noto Sans CJK JP"/>
-                          <a:cs typeface="Noto Sans"/>
-                        </a:rPr>
-                        <a:t>未取得の実体</a:t>
-                      </a:r>
-                    </a:p>
-                  </a:txBody>
-                  <a:tcPr marL="63500" marR="63500" marT="38100" marB="38100" anchor="ctr">
-                    <a:lnL w="7620">
-                      <a:noFill/>
-                    </a:lnL>
-                    <a:lnR w="7620">
-                      <a:noFill/>
-                    </a:lnR>
-                    <a:lnT w="7620">
-                      <a:noFill/>
-                    </a:lnT>
-                    <a:lnB w="15240">
-                      <a:solidFill>
-                        <a:srgbClr val="626669"/>
-                      </a:solidFill>
-                      <a:prstDash val="solid"/>
-                    </a:lnB>
-                    <a:solidFill>
-                      <a:srgbClr val="FFFEF8"/>
-                    </a:solidFill>
-                  </a:tcPr>
-                </a:tc>
-                <a:tc>
-                  <a:txBody>
-                    <a:bodyPr wrap="square">
-                      <a:noAutofit/>
-                    </a:bodyPr>
-                    <a:lstStyle/>
-                    <a:p>
-                      <a:pPr algn="l">
-                        <a:lnSpc>
-                          <a:spcPts val="1954"/>
-                        </a:lnSpc>
-                        <a:buNone/>
-                        <a:defRPr sz="1700" b="0">
-                          <a:solidFill>
-                            <a:srgbClr val="303437"/>
-                          </a:solidFill>
-                          <a:latin typeface="Noto Sans"/>
-                        </a:defRPr>
-                      </a:pPr>
-                      <a:r>
-                        <a:rPr sz="1700" b="0" lang="ja-JP" altLang="en-US">
-                          <a:solidFill>
-                            <a:srgbClr val="303437"/>
-                          </a:solidFill>
-                          <a:latin typeface="Noto Sans"/>
-                          <a:ea typeface="Noto Sans CJK JP"/>
-                          <a:cs typeface="Noto Sans"/>
-                        </a:rPr>
-                        <a:t>選定問題全体、テンプレート、推論パラメータ</a:t>
-                      </a:r>
-                    </a:p>
-                  </a:txBody>
-                  <a:tcPr marL="63500" marR="63500" marT="38100" marB="38100" anchor="ctr">
-                    <a:lnL w="7620">
-                      <a:noFill/>
-                    </a:lnL>
-                    <a:lnR w="7620">
-                      <a:noFill/>
-                    </a:lnR>
-                    <a:lnT w="7620">
-                      <a:noFill/>
-                    </a:lnT>
-                    <a:lnB w="15240">
-                      <a:solidFill>
-                        <a:srgbClr val="626669"/>
-                      </a:solidFill>
-                      <a:prstDash val="solid"/>
-                    </a:lnB>
-                    <a:solidFill>
-                      <a:srgbClr val="FFFEF8"/>
-                    </a:solidFill>
-                  </a:tcPr>
-                </a:tc>
-              </a:tr>
-            </a:tbl>
-          </a:graphicData>
-        </a:graphic>
-      </p:graphicFrame>
-      <p:sp>
-        <p:nvSpPr>
-          <p:cNvPr id="5" name="TextBox 4"/>
-          <p:cNvSpPr txBox="1"/>
-          <p:nvPr/>
-        </p:nvSpPr>
-        <p:spPr>
-          <a:xfrm>
-            <a:off x="594360" y="3413125"/>
-            <a:ext cx="7955279" cy="658368"/>
-          </a:xfrm>
-          <a:prstGeom prst="rect">
-            <a:avLst/>
-          </a:prstGeom>
-          <a:noFill/>
-        </p:spPr>
-        <p:txBody>
-          <a:bodyPr wrap="square" lIns="0" rIns="0" tIns="0" bIns="0">
-            <a:noAutofit/>
-          </a:bodyPr>
-          <a:lstStyle/>
-          <a:p>
-            <a:pPr algn="l">
-              <a:lnSpc>
-                <a:spcPts val="1568"/>
-              </a:lnSpc>
-              <a:spcBef>
-                <a:spcPts val="0"/>
-              </a:spcBef>
-              <a:spcAft>
-                <a:spcPts val="0"/>
-              </a:spcAft>
-              <a:buNone/>
-              <a:defRPr sz="1400" b="0">
-                <a:solidFill>
-                  <a:srgbClr val="303437"/>
-                </a:solidFill>
-                <a:latin typeface="Noto Sans"/>
-              </a:defRPr>
-            </a:pPr>
-            <a:r>
-              <a:rPr sz="1400" b="0" lang="ja-JP" altLang="en-US">
-                <a:solidFill>
-                  <a:srgbClr val="303437"/>
-                </a:solidFill>
-                <a:latin typeface="Noto Sans"/>
-                <a:ea typeface="Noto Sans CJK JP"/>
-                <a:cs typeface="Noto Sans"/>
-              </a:rPr>
-              <a:t>6個のprompt_idを、6モデル・6回試行・6件の公開runと読み替えない。</a:t>
-            </a:r>
-          </a:p>
-        </p:txBody>
-      </p:sp>
-      <p:sp>
-        <p:nvSpPr>
-          <p:cNvPr id="6" name="sources"/>
-          <p:cNvSpPr txBox="1"/>
-          <p:nvPr/>
-        </p:nvSpPr>
-        <p:spPr>
-          <a:xfrm>
-            <a:off x="502920" y="4517136"/>
-            <a:ext cx="8183879" cy="530352"/>
-          </a:xfrm>
-          <a:prstGeom prst="rect">
-            <a:avLst/>
-          </a:prstGeom>
-          <a:noFill/>
-        </p:spPr>
-        <p:txBody>
-          <a:bodyPr wrap="square" lIns="0" rIns="0" tIns="0" bIns="0">
-            <a:noAutofit/>
-          </a:bodyPr>
-          <a:lstStyle/>
-          <a:p>
-            <a:pPr algn="l">
-              <a:lnSpc>
-                <a:spcPts val="940"/>
-              </a:lnSpc>
-              <a:spcBef>
-                <a:spcPts val="0"/>
-              </a:spcBef>
-              <a:spcAft>
-                <a:spcPts val="300"/>
-              </a:spcAft>
-              <a:buNone/>
-              <a:defRPr sz="810" b="0">
-                <a:solidFill>
-                  <a:srgbClr val="303437"/>
-                </a:solidFill>
-                <a:latin typeface="Noto Sans"/>
-              </a:defRPr>
-            </a:pPr>
-            <a:r>
-              <a:rPr sz="810" b="0" lang="ja-JP" altLang="en-US">
-                <a:solidFill>
-                  <a:srgbClr val="626669"/>
-                </a:solidFill>
-                <a:latin typeface="Noto Sans"/>
-                <a:ea typeface="Noto Sans CJK JP"/>
-                <a:cs typeface="Noto Sans"/>
-              </a:rPr>
-              <a:t>[1] Stanford CRFM. CLEVA v1 run configuration. HELM v0.4.0.</a:t>
-            </a:r>
-          </a:p>
-          <a:p>
-            <a:pPr>
-              <a:lnSpc>
-                <a:spcPts val="940"/>
-              </a:lnSpc>
-              <a:spcAft>
-                <a:spcPts val="300"/>
-              </a:spcAft>
-              <a:buNone/>
-              <a:defRPr sz="810" b="0">
-                <a:solidFill>
-                  <a:srgbClr val="303437"/>
-                </a:solidFill>
-                <a:latin typeface="Noto Sans"/>
-              </a:defRPr>
-            </a:pPr>
-            <a:r>
-              <a:rPr sz="810" b="0" lang="ja-JP" altLang="en-US">
-                <a:solidFill>
-                  <a:srgbClr val="626669"/>
-                </a:solidFill>
-                <a:latin typeface="Noto Sans"/>
-                <a:ea typeface="Noto Sans CJK JP"/>
-                <a:cs typeface="Noto Sans"/>
-                <a:hlinkClick r:id="rId2"/>
-              </a:rPr>
-              <a:t>https://github.com/stanford-crfm/helm/blob/v0.4.0/src/helm/benchmark/presentation/run_specs_cleva_v1.conf</a:t>
-            </a:r>
-          </a:p>
-          <a:p>
-            <a:pPr>
-              <a:lnSpc>
-                <a:spcPts val="940"/>
-              </a:lnSpc>
-              <a:spcAft>
-                <a:spcPts val="300"/>
-              </a:spcAft>
-              <a:buNone/>
-              <a:defRPr sz="810" b="0">
-                <a:solidFill>
-                  <a:srgbClr val="303437"/>
-                </a:solidFill>
-                <a:latin typeface="Noto Sans"/>
-              </a:defRPr>
-            </a:pPr>
-            <a:r>
-              <a:rPr sz="810" b="0" lang="ja-JP" altLang="en-US">
-                <a:solidFill>
-                  <a:srgbClr val="626669"/>
-                </a:solidFill>
-                <a:latin typeface="Noto Sans"/>
-                <a:ea typeface="Noto Sans CJK JP"/>
-                <a:cs typeface="Noto Sans"/>
-              </a:rPr>
-              <a:t>[2] Stanford CRFM. HELM Classic v0.4.0 public release / run index.</a:t>
-            </a:r>
-            <a:r>
-              <a:rPr sz="810" b="0" lang="ja-JP" altLang="en-US">
-                <a:solidFill>
-                  <a:srgbClr val="626669"/>
-                </a:solidFill>
-                <a:latin typeface="Noto Sans"/>
-                <a:ea typeface="Noto Sans CJK JP"/>
-                <a:cs typeface="Noto Sans"/>
-              </a:rPr>
-              <a:t>  </a:t>
-            </a:r>
-            <a:r>
-              <a:rPr sz="810" b="0" lang="ja-JP" altLang="en-US">
-                <a:solidFill>
-                  <a:srgbClr val="626669"/>
-                </a:solidFill>
-                <a:latin typeface="Noto Sans"/>
-                <a:ea typeface="Noto Sans CJK JP"/>
-                <a:cs typeface="Noto Sans"/>
-                <a:hlinkClick r:id="rId3"/>
-              </a:rPr>
-              <a:t>https://crfm.stanford.edu/helm/classic/v0.4.0/</a:t>
             </a:r>
           </a:p>
         </p:txBody>
@@ -16008,7 +14238,7 @@
                 <a:ea typeface="Noto Sans CJK JP"/>
                 <a:cs typeface="Noto Sans"/>
               </a:rPr>
-              <a:t>公開ZIPは読めるが、権利条件は別に確認する</a:t>
+              <a:t>公開データの入手先と、文章の利用条件</a:t>
             </a:r>
           </a:p>
         </p:txBody>
@@ -16061,7 +14291,7 @@
                 <a:ea typeface="Noto Sans CJK JP"/>
                 <a:cs typeface="Noto Sans"/>
               </a:rPr>
-              <a:t>公式リポジトリから、公開ZIPへ到達できる。提供文の全文と指定箇所を読み出せるが、テストには正解ラベルが含まれない。</a:t>
+              <a:t>公式リポジトリから公開ZIPをダウンロードできる。学習・開発データは正解付きで、テストデータの正解は非公開。</a:t>
             </a:r>
           </a:p>
           <a:p>
@@ -16091,37 +14321,7 @@
                 <a:ea typeface="Noto Sans CJK JP"/>
                 <a:cs typeface="Noto Sans"/>
               </a:rPr>
-              <a:t>固定した課題リポジトリにはREADMEのみがあり、データ専用の利用許諾は見当たらない。関連するコードのライセンスを、文学作品の文章へ拡張しない。</a:t>
-            </a:r>
-          </a:p>
-          <a:p>
-            <a:pPr marL="457200" indent="-355600">
-              <a:lnSpc>
-                <a:spcPts val="2320"/>
-              </a:lnSpc>
-              <a:spcAft>
-                <a:spcPts val="0"/>
-              </a:spcAft>
-              <a:buSzPct val="68205"/>
-              <a:buFont typeface="Noto Sans CJK JP"/>
-              <a:buChar char="●"/>
-              <a:defRPr sz="1950" b="0">
-                <a:solidFill>
-                  <a:srgbClr val="303437"/>
-                </a:solidFill>
-                <a:latin typeface="Noto Sans"/>
-              </a:defRPr>
-            </a:pPr>
-            <a:r>
-              <a:rPr sz="1950" b="0" lang="ja-JP" altLang="en-US">
-                <a:solidFill>
-                  <a:srgbClr val="303437"/>
-                </a:solidFill>
-                <a:latin typeface="Noto Sans"/>
-                <a:ea typeface="Noto Sans CJK JP"/>
-                <a:cs typeface="Noto Sans"/>
-              </a:rPr>
-              <a:t>ここでは識別可能な13件の短い提供文を示す。配布データ全体や元の文学作品を、無条件に再配布できるとは述べない。</a:t>
+              <a:t>課題リポジトリには、データ専用の利用許諾が明記されていない。文章は文学作品に由来するため、再利用や再配布の際には、データ提供者の条件と元の文章の権利を確認する必要がある。</a:t>
             </a:r>
           </a:p>
         </p:txBody>
@@ -16223,7 +14423,7 @@
                 <a:ea typeface="Noto Sans CJK JP"/>
                 <a:cs typeface="Noto Sans"/>
               </a:rPr>
-              <a:t>[1] CLUE team. CLUEWSC2020: data format and task description.</a:t>
+              <a:t>[1] CLUE team. CLUEWSC2020: WSC Winograd模式挑战中文版，中文指代消解任务.</a:t>
             </a:r>
           </a:p>
           <a:p>
@@ -16280,7 +14480,7 @@
                 <a:ea typeface="Noto Sans CJK JP"/>
                 <a:cs typeface="Noto Sans"/>
               </a:rPr>
-              <a:t>[2] CLUEbenchmark. cluewsc2020_public.zip; README dated 2021-08-29.</a:t>
+              <a:t>[2] CLUEbenchmark. CLUEWSC2020 public data; test update 2021-08-29.</a:t>
             </a:r>
             <a:r>
               <a:rPr sz="810" b="0" lang="ja-JP" altLang="en-US">
@@ -16369,7 +14569,7 @@
                 <a:ea typeface="Noto Sans CJK JP"/>
                 <a:cs typeface="Noto Sans"/>
               </a:rPr>
-              <a:t>小さな対象組から、文章全体の役割を読む</a:t>
+              <a:t>文学作品の文脈で、代名詞の指示対象を判定</a:t>
             </a:r>
           </a:p>
         </p:txBody>
@@ -16422,7 +14622,7 @@
                 <a:ea typeface="Noto Sans CJK JP"/>
                 <a:cs typeface="Noto Sans"/>
               </a:rPr>
-              <a:t>入力は文章と二つの指定箇所。true/falseは、その二つが同じ対象を指すかを表す。語の距離や性・数だけでは決まらない問題も含む。</a:t>
+              <a:t>CLUEWSC2020は、中国語の自然な文章で、指定された名詞句と代名詞が同じ対象を指すかを問うデータセット。</a:t>
             </a:r>
           </a:p>
           <a:p>
@@ -16452,7 +14652,7 @@
                 <a:ea typeface="Noto Sans CJK JP"/>
                 <a:cs typeface="Noto Sans"/>
               </a:rPr>
-              <a:t>2020年の構築時評価、後のテスト更新、CLEVAへの採用を分けることで、件数と正答率の意味がはっきりする。</a:t>
+              <a:t>文学作品に現れる人物や物の関係を読み、性・数だけでなく、動作や談話の流れも手掛かりにする。</a:t>
             </a:r>
           </a:p>
           <a:p>
@@ -16482,7 +14682,7 @@
                 <a:ea typeface="Noto Sans CJK JP"/>
                 <a:cs typeface="Noto Sans"/>
               </a:rPr>
-              <a:t>原データの位置と指示語の位置を保てば、どの文章のどの対象組を解いた結果なのかを追跡できる。</a:t>
+              <a:t>構築時のテストでは最良モデルの正答率が81.38％、100問の人手評価は多数決で98％だった。中国語理解の課題として、CLUEからCLEVAへと利用が広がった。</a:t>
             </a:r>
           </a:p>
         </p:txBody>
@@ -17127,7 +15327,7 @@
                 <a:ea typeface="Noto Sans CJK JP"/>
                 <a:cs typeface="Noto Sans"/>
               </a:rPr>
-              <a:t>版・原位置・実装</a:t>
+              <a:t>データの読み方と評価値</a:t>
             </a:r>
           </a:p>
           <a:p>
@@ -17487,7 +15687,7 @@
                 <a:ea typeface="Noto Sans CJK JP"/>
                 <a:cs typeface="Noto Sans"/>
               </a:rPr>
-              <a:t>dev.json / 行3 / idx 3　　緑：候補の名詞句　青：指定された代名詞</a:t>
+              <a:t>緑：候補の名詞句／青：指定された代名詞</a:t>
             </a:r>
           </a:p>
         </p:txBody>
@@ -17541,7 +15741,7 @@
                 <a:ea typeface="Noto Sans CJK JP"/>
                 <a:cs typeface="Noto Sans"/>
               </a:rPr>
-              <a:t>中国語：配布text全文と指定span</a:t>
+              <a:t>中国語：文章全文と指定された語句</a:t>
             </a:r>
           </a:p>
         </p:txBody>
@@ -18081,7 +16281,7 @@
                 <a:ea typeface="Noto Sans CJK JP"/>
                 <a:cs typeface="Noto Sans"/>
               </a:rPr>
-              <a:t>[1] CLUEbenchmark. CLUEWSC2020 / dev.json / line 3 / idx 3.</a:t>
+              <a:t>[1] CLUEbenchmark. CLUEWSC2020 public data.</a:t>
             </a:r>
             <a:r>
               <a:rPr sz="810" b="0" lang="ja-JP" altLang="en-US">
@@ -18272,7 +16472,7 @@
                 <a:ea typeface="Noto Sans CJK JP"/>
                 <a:cs typeface="Noto Sans"/>
               </a:rPr>
-              <a:t>dev.json / 行14 / idx 14　　緑：候補の名詞句　青：指定された代名詞</a:t>
+              <a:t>緑：候補の名詞句／青：指定された代名詞</a:t>
             </a:r>
           </a:p>
         </p:txBody>
@@ -18326,7 +16526,7 @@
                 <a:ea typeface="Noto Sans CJK JP"/>
                 <a:cs typeface="Noto Sans"/>
               </a:rPr>
-              <a:t>中国語：配布text全文と指定span</a:t>
+              <a:t>中国語：文章全文と指定された語句</a:t>
             </a:r>
           </a:p>
         </p:txBody>
@@ -18866,7 +17066,7 @@
                 <a:ea typeface="Noto Sans CJK JP"/>
                 <a:cs typeface="Noto Sans"/>
               </a:rPr>
-              <a:t>[1] CLUEbenchmark. CLUEWSC2020 / dev.json / line 14 / idx 14.</a:t>
+              <a:t>[1] CLUEbenchmark. CLUEWSC2020 public data.</a:t>
             </a:r>
             <a:r>
               <a:rPr sz="810" b="0" lang="ja-JP" altLang="en-US">
@@ -19057,7 +17257,7 @@
                 <a:ea typeface="Noto Sans CJK JP"/>
                 <a:cs typeface="Noto Sans"/>
               </a:rPr>
-              <a:t>dev.json / 行16 / idx 16　　緑：候補の名詞句　青：指定された代名詞</a:t>
+              <a:t>緑：候補の名詞句／青：指定された代名詞</a:t>
             </a:r>
           </a:p>
         </p:txBody>
@@ -19111,7 +17311,7 @@
                 <a:ea typeface="Noto Sans CJK JP"/>
                 <a:cs typeface="Noto Sans"/>
               </a:rPr>
-              <a:t>中国語：配布text全文と指定span</a:t>
+              <a:t>中国語：文章全文と指定された語句</a:t>
             </a:r>
           </a:p>
         </p:txBody>
@@ -19651,7 +17851,7 @@
                 <a:ea typeface="Noto Sans CJK JP"/>
                 <a:cs typeface="Noto Sans"/>
               </a:rPr>
-              <a:t>[1] CLUEbenchmark. CLUEWSC2020 / dev.json / line 16 / idx 16.</a:t>
+              <a:t>[1] CLUEbenchmark. CLUEWSC2020 public data.</a:t>
             </a:r>
             <a:r>
               <a:rPr sz="810" b="0" lang="ja-JP" altLang="en-US">
@@ -19740,7 +17940,7 @@
                 <a:ea typeface="Noto Sans CJK JP"/>
                 <a:cs typeface="Noto Sans"/>
               </a:rPr>
-              <a:t>実例7：父親と同僚を区別する</a:t>
+              <a:t>実例7：発見の経緯を話している父親</a:t>
             </a:r>
           </a:p>
         </p:txBody>
@@ -19842,7 +18042,7 @@
                 <a:ea typeface="Noto Sans CJK JP"/>
                 <a:cs typeface="Noto Sans"/>
               </a:rPr>
-              <a:t>train.json / 行37 / idx 294　　緑：候補の名詞句　青：指定された代名詞</a:t>
+              <a:t>緑：候補の名詞句／青：指定された代名詞</a:t>
             </a:r>
           </a:p>
         </p:txBody>
@@ -19896,7 +18096,7 @@
                 <a:ea typeface="Noto Sans CJK JP"/>
                 <a:cs typeface="Noto Sans"/>
               </a:rPr>
-              <a:t>中国語：配布text全文と指定span</a:t>
+              <a:t>中国語：文章全文と指定された語句</a:t>
             </a:r>
           </a:p>
         </p:txBody>
@@ -20224,7 +18424,7 @@
                 <a:ea typeface="Noto Sans CJK JP"/>
                 <a:cs typeface="Noto Sans"/>
               </a:rPr>
-              <a:t>父の楊金彪と、転轍係の同僚の郝強生が外の部屋に座っていた。そのとき父はまだ21歳で、彼は顔の汗を拭きながら、私を見つけた経緯を詳しく話した。</a:t>
+              <a:t>父の楊金彪と、転轍係の同僚の郝強生が外側の部屋に座っていた。そのとき父はまだ21歳で、彼は顔の汗を拭きながら、私を見つけた経緯を詳しく話した。</a:t>
             </a:r>
           </a:p>
           <a:p>
@@ -20425,7 +18625,7 @@
                 <a:ea typeface="Noto Sans CJK JP"/>
                 <a:cs typeface="Noto Sans"/>
               </a:rPr>
-              <a:t>[1] CLUEbenchmark. CLUEWSC2020 / train.json / line 37 / idx 294.</a:t>
+              <a:t>[1] CLUEbenchmark. CLUEWSC2020 public data.</a:t>
             </a:r>
             <a:r>
               <a:rPr sz="810" b="0" lang="ja-JP" altLang="en-US">
@@ -20514,7 +18714,7 @@
                 <a:ea typeface="Noto Sans CJK JP"/>
                 <a:cs typeface="Noto Sans"/>
               </a:rPr>
-              <a:t>実例8：薬と小麦粉の袋を区別する</a:t>
+              <a:t>実例8：縛り付けたのは、小麦粉の袋</a:t>
             </a:r>
           </a:p>
         </p:txBody>
@@ -20616,7 +18816,7 @@
                 <a:ea typeface="Noto Sans CJK JP"/>
                 <a:cs typeface="Noto Sans"/>
               </a:rPr>
-              <a:t>dev.json / 行37 / idx 37　　緑：候補の名詞句　青：指定された代名詞</a:t>
+              <a:t>緑：候補の名詞句／青：指定された代名詞</a:t>
             </a:r>
           </a:p>
         </p:txBody>
@@ -20670,7 +18870,7 @@
                 <a:ea typeface="Noto Sans CJK JP"/>
                 <a:cs typeface="Noto Sans"/>
               </a:rPr>
-              <a:t>中国語：配布text全文と指定span</a:t>
+              <a:t>中国語：文章全文と指定された語句</a:t>
             </a:r>
           </a:p>
         </p:txBody>
@@ -21210,7 +19410,7 @@
                 <a:ea typeface="Noto Sans CJK JP"/>
                 <a:cs typeface="Noto Sans"/>
               </a:rPr>
-              <a:t>[1] CLUEbenchmark. CLUEWSC2020 / dev.json / line 37 / idx 37.</a:t>
+              <a:t>[1] CLUEbenchmark. CLUEWSC2020 public data.</a:t>
             </a:r>
             <a:r>
               <a:rPr sz="810" b="0" lang="ja-JP" altLang="en-US">
@@ -21401,7 +19601,7 @@
                 <a:ea typeface="Noto Sans CJK JP"/>
                 <a:cs typeface="Noto Sans"/>
               </a:rPr>
-              <a:t>dev.json / 行40 / idx 40　　緑：候補の名詞句　青：指定された代名詞</a:t>
+              <a:t>緑：候補の名詞句／青：指定された代名詞</a:t>
             </a:r>
           </a:p>
         </p:txBody>
@@ -21455,7 +19655,7 @@
                 <a:ea typeface="Noto Sans CJK JP"/>
                 <a:cs typeface="Noto Sans"/>
               </a:rPr>
-              <a:t>中国語：配布text全文と指定span</a:t>
+              <a:t>中国語：文章全文と指定された語句</a:t>
             </a:r>
           </a:p>
         </p:txBody>
@@ -21995,7 +20195,7 @@
                 <a:ea typeface="Noto Sans CJK JP"/>
                 <a:cs typeface="Noto Sans"/>
               </a:rPr>
-              <a:t>[1] CLUEbenchmark. CLUEWSC2020 / dev.json / line 40 / idx 40.</a:t>
+              <a:t>[1] CLUEbenchmark. CLUEWSC2020 public data.</a:t>
             </a:r>
             <a:r>
               <a:rPr sz="810" b="0" lang="ja-JP" altLang="en-US">
@@ -22186,7 +20386,7 @@
                 <a:ea typeface="Noto Sans CJK JP"/>
                 <a:cs typeface="Noto Sans"/>
               </a:rPr>
-              <a:t>dev.json / 行44 / idx 44　　緑：候補の名詞句　青：指定された代名詞</a:t>
+              <a:t>緑：候補の名詞句／青：指定された代名詞</a:t>
             </a:r>
           </a:p>
         </p:txBody>
@@ -22240,7 +20440,7 @@
                 <a:ea typeface="Noto Sans CJK JP"/>
                 <a:cs typeface="Noto Sans"/>
               </a:rPr>
-              <a:t>中国語：配布text全文と指定span</a:t>
+              <a:t>中国語：文章全文と指定された語句</a:t>
             </a:r>
           </a:p>
         </p:txBody>
@@ -22579,7 +20779,7 @@
                 <a:ea typeface="Noto Sans CJK JP"/>
                 <a:cs typeface="Noto Sans"/>
               </a:rPr>
-              <a:t>私が戻ったら二人で働いて、少平と蘭香の勉学を必ず支え切ろう。二人に力があって、どこの学校に受かろうと、私たちは彼らをそこへ通わせよう。</a:t>
+              <a:t>私が戻ったら二人で働いて、少平と蘭香が学業を終えるまで、必ず支えよう。二人に力があって、どこの学校に受かろうと、私たちは彼らをそこへ通わせよう。</a:t>
             </a:r>
           </a:p>
           <a:p>
@@ -22780,7 +20980,7 @@
                 <a:ea typeface="Noto Sans CJK JP"/>
                 <a:cs typeface="Noto Sans"/>
               </a:rPr>
-              <a:t>[1] CLUEbenchmark. CLUEWSC2020 / dev.json / line 44 / idx 44.</a:t>
+              <a:t>[1] CLUEbenchmark. CLUEWSC2020 public data.</a:t>
             </a:r>
             <a:r>
               <a:rPr sz="810" b="0" lang="ja-JP" altLang="en-US">
@@ -22971,7 +21171,7 @@
                 <a:ea typeface="Noto Sans CJK JP"/>
                 <a:cs typeface="Noto Sans"/>
               </a:rPr>
-              <a:t>dev.json / 行61 / idx 166　　緑：候補の名詞句　青：指定された代名詞</a:t>
+              <a:t>緑：候補の名詞句／青：指定された代名詞</a:t>
             </a:r>
           </a:p>
         </p:txBody>
@@ -23025,7 +21225,7 @@
                 <a:ea typeface="Noto Sans CJK JP"/>
                 <a:cs typeface="Noto Sans"/>
               </a:rPr>
-              <a:t>中国語：配布text全文と指定span</a:t>
+              <a:t>中国語：文章全文と指定された語句</a:t>
             </a:r>
           </a:p>
         </p:txBody>
@@ -23565,7 +21765,7 @@
                 <a:ea typeface="Noto Sans CJK JP"/>
                 <a:cs typeface="Noto Sans"/>
               </a:rPr>
-              <a:t>[1] CLUEbenchmark. CLUEWSC2020 / dev.json / line 61 / idx 166.</a:t>
+              <a:t>[1] CLUEbenchmark. CLUEWSC2020 public data.</a:t>
             </a:r>
             <a:r>
               <a:rPr sz="810" b="0" lang="ja-JP" altLang="en-US">
@@ -23870,7 +22070,7 @@
                 <a:ea typeface="Noto Sans CJK JP"/>
                 <a:cs typeface="Noto Sans"/>
               </a:rPr>
-              <a:t>dev.json / 行81 / idx 186　　緑：候補の名詞句　青：指定された代名詞</a:t>
+              <a:t>緑：候補の名詞句／青：指定された代名詞</a:t>
             </a:r>
           </a:p>
         </p:txBody>
@@ -23924,7 +22124,7 @@
                 <a:ea typeface="Noto Sans CJK JP"/>
                 <a:cs typeface="Noto Sans"/>
               </a:rPr>
-              <a:t>中国語：配布text全文と指定span</a:t>
+              <a:t>中国語：文章全文と指定された語句</a:t>
             </a:r>
           </a:p>
         </p:txBody>
@@ -24453,7 +22653,7 @@
                 <a:ea typeface="Noto Sans CJK JP"/>
                 <a:cs typeface="Noto Sans"/>
               </a:rPr>
-              <a:t>[1] CLUEbenchmark. CLUEWSC2020 / dev.json / line 81 / idx 186.</a:t>
+              <a:t>[1] CLUEbenchmark. CLUEWSC2020 public data.</a:t>
             </a:r>
             <a:r>
               <a:rPr sz="810" b="0" lang="ja-JP" altLang="en-US">
@@ -24644,7 +22844,7 @@
                 <a:ea typeface="Noto Sans CJK JP"/>
                 <a:cs typeface="Noto Sans"/>
               </a:rPr>
-              <a:t>train.json / 行698 / idx 42　　緑：候補の名詞句　青：指定された代名詞</a:t>
+              <a:t>緑：候補の名詞句／青：指定された代名詞</a:t>
             </a:r>
           </a:p>
         </p:txBody>
@@ -24698,7 +22898,7 @@
                 <a:ea typeface="Noto Sans CJK JP"/>
                 <a:cs typeface="Noto Sans"/>
               </a:rPr>
-              <a:t>中国語：配布text全文と指定span</a:t>
+              <a:t>中国語：文章全文と指定された語句</a:t>
             </a:r>
           </a:p>
         </p:txBody>
@@ -25238,7 +23438,7 @@
                 <a:ea typeface="Noto Sans CJK JP"/>
                 <a:cs typeface="Noto Sans"/>
               </a:rPr>
-              <a:t>[1] CLUEbenchmark. CLUEWSC2020 / train.json / line 698 / idx 42.</a:t>
+              <a:t>[1] CLUEbenchmark. CLUEWSC2020 public data.</a:t>
             </a:r>
             <a:r>
               <a:rPr sz="810" b="0" lang="ja-JP" altLang="en-US">
@@ -25701,7 +23901,7 @@
                           <a:ea typeface="Noto Sans CJK JP"/>
                           <a:cs typeface="Noto Sans"/>
                         </a:rPr>
-                        <a:t>自宅に招いたのは同業者で、招かれたのはドイツへ行った副教授。二人の役割を区別する。</a:t>
+                        <a:t>自宅に招いたのは同業者で、招かれたのはドイツへ行った准教授。「他」は准教授を指す。</a:t>
                       </a:r>
                     </a:p>
                   </a:txBody>
@@ -25908,7 +24108,7 @@
                           <a:ea typeface="Noto Sans CJK JP"/>
                           <a:cs typeface="Noto Sans"/>
                         </a:rPr>
-                        <a:t>田舎くさい性質が残る対象は服。人を表す代名詞と、物を表す代名詞を区別する。</a:t>
+                        <a:t>田舎くさい性質が残る対象は服。「它」は物を表す代名詞。</a:t>
                       </a:r>
                     </a:p>
                   </a:txBody>
@@ -25987,7 +24187,7 @@
                 <a:ea typeface="Noto Sans CJK JP"/>
                 <a:cs typeface="Noto Sans"/>
               </a:rPr>
-              <a:t>説明は本資料による。原文は各実例頁に省略せず示す。</a:t>
+              <a:t/>
             </a:r>
           </a:p>
         </p:txBody>
@@ -26041,7 +24241,7 @@
                 <a:ea typeface="Noto Sans CJK JP"/>
                 <a:cs typeface="Noto Sans"/>
               </a:rPr>
-              <a:t>[1] CLUEbenchmark. cluewsc2020_public.zip; README dated 2021-08-29.</a:t>
+              <a:t>[1] CLUEbenchmark. CLUEWSC2020 public data; test update 2021-08-29.</a:t>
             </a:r>
             <a:r>
               <a:rPr sz="810" b="0" lang="ja-JP" altLang="en-US">
@@ -26606,7 +24806,7 @@
                           <a:ea typeface="Noto Sans CJK JP"/>
                           <a:cs typeface="Noto Sans"/>
                         </a:rPr>
-                        <a:t>年齢の説明の後、父親が発見の経緯を話す。近くの男性名だけで判定しない。</a:t>
+                        <a:t>年齢の説明の後、父親が発見の経緯を話す。「他」は父親を指す。</a:t>
                       </a:r>
                     </a:p>
                   </a:txBody>
@@ -26790,7 +24990,7 @@
                 <a:ea typeface="Noto Sans CJK JP"/>
                 <a:cs typeface="Noto Sans"/>
               </a:rPr>
-              <a:t>説明は本資料による。原文は各実例頁に省略せず示す。</a:t>
+              <a:t/>
             </a:r>
           </a:p>
         </p:txBody>
@@ -26844,7 +25044,7 @@
                 <a:ea typeface="Noto Sans CJK JP"/>
                 <a:cs typeface="Noto Sans"/>
               </a:rPr>
-              <a:t>[1] CLUEbenchmark. cluewsc2020_public.zip; README dated 2021-08-29.</a:t>
+              <a:t>[1] CLUEbenchmark. CLUEWSC2020 public data; test update 2021-08-29.</a:t>
             </a:r>
             <a:r>
               <a:rPr sz="810" b="0" lang="ja-JP" altLang="en-US">
@@ -27695,7 +25895,7 @@
                 <a:ea typeface="Noto Sans CJK JP"/>
                 <a:cs typeface="Noto Sans"/>
               </a:rPr>
-              <a:t>説明は本資料による。原文は各実例頁に省略せず示す。</a:t>
+              <a:t/>
             </a:r>
           </a:p>
         </p:txBody>
@@ -27749,7 +25949,7 @@
                 <a:ea typeface="Noto Sans CJK JP"/>
                 <a:cs typeface="Noto Sans"/>
               </a:rPr>
-              <a:t>[1] CLUEbenchmark. cluewsc2020_public.zip; README dated 2021-08-29.</a:t>
+              <a:t>[1] CLUEbenchmark. CLUEWSC2020 public data; test update 2021-08-29.</a:t>
             </a:r>
             <a:r>
               <a:rPr sz="810" b="0" lang="ja-JP" altLang="en-US">
@@ -27838,7 +26038,7 @@
                 <a:ea typeface="Noto Sans CJK JP"/>
                 <a:cs typeface="Noto Sans"/>
               </a:rPr>
-              <a:t>版・原位置・実装</a:t>
+              <a:t>データの読み方と評価値</a:t>
             </a:r>
           </a:p>
         </p:txBody>
@@ -27886,3675 +26086,7 @@
                 <a:ea typeface="Noto Sans CJK JP"/>
                 <a:cs typeface="Noto Sans"/>
               </a:rPr>
-              <a:t>Appendix: 2. 版・原位置・実装</a:t>
-            </a:r>
-          </a:p>
-        </p:txBody>
-      </p:sp>
-    </p:spTree>
-  </p:cSld>
-  <p:clrMapOvr>
-    <a:masterClrMapping/>
-  </p:clrMapOvr>
-</p:sld>
-</file>
-
-<file path=ppt/slides/slide46.xml><?xml version="1.0" encoding="utf-8"?>
-<p:sld xmlns:a="http://schemas.openxmlformats.org/drawingml/2006/main" xmlns:p="http://schemas.openxmlformats.org/presentationml/2006/main" xmlns:r="http://schemas.openxmlformats.org/officeDocument/2006/relationships">
-  <p:cSld>
-    <p:spTree>
-      <p:nvGrpSpPr>
-        <p:cNvPr id="1" name=""/>
-        <p:cNvGrpSpPr/>
-        <p:nvPr/>
-      </p:nvGrpSpPr>
-      <p:grpSpPr/>
-      <p:sp>
-        <p:nvSpPr>
-          <p:cNvPr id="2" name="Title 1"/>
-          <p:cNvSpPr>
-            <a:spLocks noGrp="1"/>
-          </p:cNvSpPr>
-          <p:nvPr>
-            <p:ph type="title"/>
-          </p:nvPr>
-        </p:nvSpPr>
-        <p:spPr>
-          <a:xfrm>
-            <a:off x="468172" y="650138"/>
-            <a:ext cx="8206740" cy="616305"/>
-          </a:xfrm>
-        </p:spPr>
-        <p:txBody>
-          <a:bodyPr wrap="square" lIns="0" rIns="0" tIns="0" bIns="0">
-            <a:noAutofit/>
-          </a:bodyPr>
-          <a:lstStyle/>
-          <a:p>
-            <a:pPr algn="l">
-              <a:lnSpc>
-                <a:spcPct val="110000"/>
-              </a:lnSpc>
-              <a:buNone/>
-              <a:defRPr sz="2800" b="0">
-                <a:solidFill>
-                  <a:srgbClr val="303437"/>
-                </a:solidFill>
-                <a:latin typeface="Noto Sans"/>
-              </a:defRPr>
-            </a:pPr>
-            <a:r>
-              <a:rPr sz="2800" b="1" lang="ja-JP" altLang="en-US">
-                <a:solidFill>
-                  <a:srgbClr val="303437"/>
-                </a:solidFill>
-                <a:latin typeface="Noto Sans"/>
-                <a:ea typeface="Noto Sans CJK JP"/>
-                <a:cs typeface="Noto Sans"/>
-              </a:rPr>
-              <a:t>13件の公開位置と、指定された対象</a:t>
-            </a:r>
-          </a:p>
-        </p:txBody>
-      </p:sp>
-      <p:sp>
-        <p:nvSpPr>
-          <p:cNvPr id="3" name="Title 2"/>
-          <p:cNvSpPr>
-            <a:spLocks noGrp="1"/>
-          </p:cNvSpPr>
-          <p:nvPr>
-            <p:ph type="title" idx="2"/>
-          </p:nvPr>
-        </p:nvSpPr>
-        <p:spPr>
-          <a:xfrm>
-            <a:off x="75895" y="0"/>
-            <a:ext cx="8115300" cy="480060"/>
-          </a:xfrm>
-        </p:spPr>
-        <p:txBody>
-          <a:bodyPr wrap="square" lIns="0" rIns="0" tIns="0" bIns="0" anchor="ctr">
-            <a:noAutofit/>
-          </a:bodyPr>
-          <a:lstStyle/>
-          <a:p>
-            <a:pPr algn="l">
-              <a:lnSpc>
-                <a:spcPct val="110000"/>
-              </a:lnSpc>
-              <a:buNone/>
-              <a:defRPr sz="1400" b="0">
-                <a:solidFill>
-                  <a:srgbClr val="303437"/>
-                </a:solidFill>
-                <a:latin typeface="Noto Sans"/>
-              </a:defRPr>
-            </a:pPr>
-            <a:r>
-              <a:rPr sz="1400" b="1" lang="ja-JP" altLang="en-US">
-                <a:solidFill>
-                  <a:srgbClr val="FFFEF8"/>
-                </a:solidFill>
-                <a:latin typeface="Noto Sans"/>
-                <a:ea typeface="Noto Sans CJK JP"/>
-                <a:cs typeface="Noto Sans"/>
-              </a:rPr>
-              <a:t>Appendix: 2. 版・原位置・実装</a:t>
-            </a:r>
-          </a:p>
-        </p:txBody>
-      </p:sp>
-      <p:graphicFrame>
-        <p:nvGraphicFramePr>
-          <p:cNvPr id="4" name="Table 3"/>
-          <p:cNvGraphicFramePr>
-            <a:graphicFrameLocks noGrp="1"/>
-          </p:cNvGraphicFramePr>
-          <p:nvPr/>
-        </p:nvGraphicFramePr>
-        <p:xfrm>
-          <a:off x="548640" y="1508760"/>
-          <a:ext cx="8046720" cy="2608576"/>
-        </p:xfrm>
-        <a:graphic>
-          <a:graphicData uri="http://schemas.openxmlformats.org/drawingml/2006/table">
-            <a:tbl>
-              <a:tblPr firstRow="0" bandRow="0"/>
-              <a:tblGrid>
-                <a:gridCol w="731520"/>
-                <a:gridCol w="2468880"/>
-                <a:gridCol w="3657600"/>
-                <a:gridCol w="1188720"/>
-              </a:tblGrid>
-              <a:tr h="326072">
-                <a:tc>
-                  <a:txBody>
-                    <a:bodyPr wrap="square">
-                      <a:noAutofit/>
-                    </a:bodyPr>
-                    <a:lstStyle/>
-                    <a:p>
-                      <a:pPr algn="l">
-                        <a:lnSpc>
-                          <a:spcPts val="1667"/>
-                        </a:lnSpc>
-                        <a:buNone/>
-                        <a:defRPr sz="1450" b="0">
-                          <a:solidFill>
-                            <a:srgbClr val="303437"/>
-                          </a:solidFill>
-                          <a:latin typeface="Noto Sans"/>
-                        </a:defRPr>
-                      </a:pPr>
-                      <a:r>
-                        <a:rPr sz="1450" b="0" lang="ja-JP" altLang="en-US">
-                          <a:solidFill>
-                            <a:srgbClr val="303437"/>
-                          </a:solidFill>
-                          <a:latin typeface="Noto Sans"/>
-                          <a:ea typeface="Noto Sans CJK JP"/>
-                          <a:cs typeface="Noto Sans"/>
-                        </a:rPr>
-                        <a:t>実例</a:t>
-                      </a:r>
-                    </a:p>
-                  </a:txBody>
-                  <a:tcPr marL="63500" marR="63500" marT="38100" marB="38100" anchor="ctr">
-                    <a:lnL w="7620">
-                      <a:noFill/>
-                    </a:lnL>
-                    <a:lnR w="7620">
-                      <a:noFill/>
-                    </a:lnR>
-                    <a:lnT w="15240">
-                      <a:solidFill>
-                        <a:srgbClr val="626669"/>
-                      </a:solidFill>
-                      <a:prstDash val="solid"/>
-                    </a:lnT>
-                    <a:lnB w="7620">
-                      <a:solidFill>
-                        <a:srgbClr val="626669"/>
-                      </a:solidFill>
-                      <a:prstDash val="solid"/>
-                    </a:lnB>
-                    <a:solidFill>
-                      <a:srgbClr val="FFFEF8"/>
-                    </a:solidFill>
-                  </a:tcPr>
-                </a:tc>
-                <a:tc>
-                  <a:txBody>
-                    <a:bodyPr wrap="square">
-                      <a:noAutofit/>
-                    </a:bodyPr>
-                    <a:lstStyle/>
-                    <a:p>
-                      <a:pPr algn="l">
-                        <a:lnSpc>
-                          <a:spcPts val="1667"/>
-                        </a:lnSpc>
-                        <a:buNone/>
-                        <a:defRPr sz="1450" b="0">
-                          <a:solidFill>
-                            <a:srgbClr val="303437"/>
-                          </a:solidFill>
-                          <a:latin typeface="Noto Sans"/>
-                        </a:defRPr>
-                      </a:pPr>
-                      <a:r>
-                        <a:rPr sz="1450" b="0" lang="ja-JP" altLang="en-US">
-                          <a:solidFill>
-                            <a:srgbClr val="303437"/>
-                          </a:solidFill>
-                          <a:latin typeface="Noto Sans"/>
-                          <a:ea typeface="Noto Sans CJK JP"/>
-                          <a:cs typeface="Noto Sans"/>
-                        </a:rPr>
-                        <a:t>ファイル / 行</a:t>
-                      </a:r>
-                    </a:p>
-                  </a:txBody>
-                  <a:tcPr marL="63500" marR="63500" marT="38100" marB="38100" anchor="ctr">
-                    <a:lnL w="7620">
-                      <a:noFill/>
-                    </a:lnL>
-                    <a:lnR w="7620">
-                      <a:noFill/>
-                    </a:lnR>
-                    <a:lnT w="15240">
-                      <a:solidFill>
-                        <a:srgbClr val="626669"/>
-                      </a:solidFill>
-                      <a:prstDash val="solid"/>
-                    </a:lnT>
-                    <a:lnB w="7620">
-                      <a:solidFill>
-                        <a:srgbClr val="626669"/>
-                      </a:solidFill>
-                      <a:prstDash val="solid"/>
-                    </a:lnB>
-                    <a:solidFill>
-                      <a:srgbClr val="FFFEF8"/>
-                    </a:solidFill>
-                  </a:tcPr>
-                </a:tc>
-                <a:tc>
-                  <a:txBody>
-                    <a:bodyPr wrap="square">
-                      <a:noAutofit/>
-                    </a:bodyPr>
-                    <a:lstStyle/>
-                    <a:p>
-                      <a:pPr algn="l">
-                        <a:lnSpc>
-                          <a:spcPts val="1667"/>
-                        </a:lnSpc>
-                        <a:buNone/>
-                        <a:defRPr sz="1450" b="0">
-                          <a:solidFill>
-                            <a:srgbClr val="303437"/>
-                          </a:solidFill>
-                          <a:latin typeface="Noto Sans"/>
-                        </a:defRPr>
-                      </a:pPr>
-                      <a:r>
-                        <a:rPr sz="1450" b="0" lang="ja-JP" altLang="en-US">
-                          <a:solidFill>
-                            <a:srgbClr val="303437"/>
-                          </a:solidFill>
-                          <a:latin typeface="Noto Sans"/>
-                          <a:ea typeface="Noto Sans CJK JP"/>
-                          <a:cs typeface="Noto Sans"/>
-                        </a:rPr>
-                        <a:t>span1 → span2</a:t>
-                      </a:r>
-                    </a:p>
-                  </a:txBody>
-                  <a:tcPr marL="63500" marR="63500" marT="38100" marB="38100" anchor="ctr">
-                    <a:lnL w="7620">
-                      <a:noFill/>
-                    </a:lnL>
-                    <a:lnR w="7620">
-                      <a:noFill/>
-                    </a:lnR>
-                    <a:lnT w="15240">
-                      <a:solidFill>
-                        <a:srgbClr val="626669"/>
-                      </a:solidFill>
-                      <a:prstDash val="solid"/>
-                    </a:lnT>
-                    <a:lnB w="7620">
-                      <a:solidFill>
-                        <a:srgbClr val="626669"/>
-                      </a:solidFill>
-                      <a:prstDash val="solid"/>
-                    </a:lnB>
-                    <a:solidFill>
-                      <a:srgbClr val="FFFEF8"/>
-                    </a:solidFill>
-                  </a:tcPr>
-                </a:tc>
-                <a:tc>
-                  <a:txBody>
-                    <a:bodyPr wrap="square">
-                      <a:noAutofit/>
-                    </a:bodyPr>
-                    <a:lstStyle/>
-                    <a:p>
-                      <a:pPr algn="l">
-                        <a:lnSpc>
-                          <a:spcPts val="1667"/>
-                        </a:lnSpc>
-                        <a:buNone/>
-                        <a:defRPr sz="1450" b="0">
-                          <a:solidFill>
-                            <a:srgbClr val="303437"/>
-                          </a:solidFill>
-                          <a:latin typeface="Noto Sans"/>
-                        </a:defRPr>
-                      </a:pPr>
-                      <a:r>
-                        <a:rPr sz="1450" b="0" lang="ja-JP" altLang="en-US">
-                          <a:solidFill>
-                            <a:srgbClr val="303437"/>
-                          </a:solidFill>
-                          <a:latin typeface="Noto Sans"/>
-                          <a:ea typeface="Noto Sans CJK JP"/>
-                          <a:cs typeface="Noto Sans"/>
-                        </a:rPr>
-                        <a:t>正解</a:t>
-                      </a:r>
-                    </a:p>
-                  </a:txBody>
-                  <a:tcPr marL="63500" marR="63500" marT="38100" marB="38100" anchor="ctr">
-                    <a:lnL w="7620">
-                      <a:noFill/>
-                    </a:lnL>
-                    <a:lnR w="7620">
-                      <a:noFill/>
-                    </a:lnR>
-                    <a:lnT w="15240">
-                      <a:solidFill>
-                        <a:srgbClr val="626669"/>
-                      </a:solidFill>
-                      <a:prstDash val="solid"/>
-                    </a:lnT>
-                    <a:lnB w="7620">
-                      <a:solidFill>
-                        <a:srgbClr val="626669"/>
-                      </a:solidFill>
-                      <a:prstDash val="solid"/>
-                    </a:lnB>
-                    <a:solidFill>
-                      <a:srgbClr val="FFFEF8"/>
-                    </a:solidFill>
-                  </a:tcPr>
-                </a:tc>
-              </a:tr>
-              <a:tr h="326072">
-                <a:tc>
-                  <a:txBody>
-                    <a:bodyPr wrap="square">
-                      <a:noAutofit/>
-                    </a:bodyPr>
-                    <a:lstStyle/>
-                    <a:p>
-                      <a:pPr algn="l">
-                        <a:lnSpc>
-                          <a:spcPts val="1667"/>
-                        </a:lnSpc>
-                        <a:buNone/>
-                        <a:defRPr sz="1450" b="0">
-                          <a:solidFill>
-                            <a:srgbClr val="303437"/>
-                          </a:solidFill>
-                          <a:latin typeface="Noto Sans"/>
-                        </a:defRPr>
-                      </a:pPr>
-                      <a:r>
-                        <a:rPr sz="1450" b="0" lang="ja-JP" altLang="en-US">
-                          <a:solidFill>
-                            <a:srgbClr val="303437"/>
-                          </a:solidFill>
-                          <a:latin typeface="Noto Sans"/>
-                          <a:ea typeface="Noto Sans CJK JP"/>
-                          <a:cs typeface="Noto Sans"/>
-                        </a:rPr>
-                        <a:t>1</a:t>
-                      </a:r>
-                    </a:p>
-                  </a:txBody>
-                  <a:tcPr marL="63500" marR="63500" marT="38100" marB="38100" anchor="ctr">
-                    <a:lnL w="7620">
-                      <a:noFill/>
-                    </a:lnL>
-                    <a:lnR w="7620">
-                      <a:noFill/>
-                    </a:lnR>
-                    <a:lnT w="7620">
-                      <a:solidFill>
-                        <a:srgbClr val="626669"/>
-                      </a:solidFill>
-                      <a:prstDash val="solid"/>
-                    </a:lnT>
-                    <a:lnB w="7620">
-                      <a:noFill/>
-                    </a:lnB>
-                    <a:solidFill>
-                      <a:srgbClr val="FFFEF8"/>
-                    </a:solidFill>
-                  </a:tcPr>
-                </a:tc>
-                <a:tc>
-                  <a:txBody>
-                    <a:bodyPr wrap="square">
-                      <a:noAutofit/>
-                    </a:bodyPr>
-                    <a:lstStyle/>
-                    <a:p>
-                      <a:pPr algn="l">
-                        <a:lnSpc>
-                          <a:spcPts val="1667"/>
-                        </a:lnSpc>
-                        <a:buNone/>
-                        <a:defRPr sz="1450" b="0">
-                          <a:solidFill>
-                            <a:srgbClr val="303437"/>
-                          </a:solidFill>
-                          <a:latin typeface="Noto Sans"/>
-                        </a:defRPr>
-                      </a:pPr>
-                      <a:r>
-                        <a:rPr sz="1450" b="0" lang="ja-JP" altLang="en-US">
-                          <a:solidFill>
-                            <a:srgbClr val="303437"/>
-                          </a:solidFill>
-                          <a:latin typeface="Noto Sans"/>
-                          <a:ea typeface="Noto Sans CJK JP"/>
-                          <a:cs typeface="Noto Sans"/>
-                        </a:rPr>
-                        <a:t>train.json / 681</a:t>
-                      </a:r>
-                    </a:p>
-                  </a:txBody>
-                  <a:tcPr marL="63500" marR="63500" marT="38100" marB="38100" anchor="ctr">
-                    <a:lnL w="7620">
-                      <a:noFill/>
-                    </a:lnL>
-                    <a:lnR w="7620">
-                      <a:noFill/>
-                    </a:lnR>
-                    <a:lnT w="7620">
-                      <a:solidFill>
-                        <a:srgbClr val="626669"/>
-                      </a:solidFill>
-                      <a:prstDash val="solid"/>
-                    </a:lnT>
-                    <a:lnB w="7620">
-                      <a:noFill/>
-                    </a:lnB>
-                    <a:solidFill>
-                      <a:srgbClr val="FFFEF8"/>
-                    </a:solidFill>
-                  </a:tcPr>
-                </a:tc>
-                <a:tc>
-                  <a:txBody>
-                    <a:bodyPr wrap="square">
-                      <a:noAutofit/>
-                    </a:bodyPr>
-                    <a:lstStyle/>
-                    <a:p>
-                      <a:pPr algn="l">
-                        <a:lnSpc>
-                          <a:spcPts val="1667"/>
-                        </a:lnSpc>
-                        <a:buNone/>
-                        <a:defRPr sz="1450" b="0">
-                          <a:solidFill>
-                            <a:srgbClr val="303437"/>
-                          </a:solidFill>
-                          <a:latin typeface="Noto Sans"/>
-                        </a:defRPr>
-                      </a:pPr>
-                      <a:r>
-                        <a:rPr sz="1450" b="0" lang="ja-JP" altLang="en-US">
-                          <a:solidFill>
-                            <a:srgbClr val="303437"/>
-                          </a:solidFill>
-                          <a:latin typeface="Noto Sans"/>
-                          <a:ea typeface="Noto Sans CJK JP"/>
-                          <a:cs typeface="Noto Sans"/>
-                        </a:rPr>
-                        <a:t>块状物 → 它们</a:t>
-                      </a:r>
-                    </a:p>
-                  </a:txBody>
-                  <a:tcPr marL="63500" marR="63500" marT="38100" marB="38100" anchor="ctr">
-                    <a:lnL w="7620">
-                      <a:noFill/>
-                    </a:lnL>
-                    <a:lnR w="7620">
-                      <a:noFill/>
-                    </a:lnR>
-                    <a:lnT w="7620">
-                      <a:solidFill>
-                        <a:srgbClr val="626669"/>
-                      </a:solidFill>
-                      <a:prstDash val="solid"/>
-                    </a:lnT>
-                    <a:lnB w="7620">
-                      <a:noFill/>
-                    </a:lnB>
-                    <a:solidFill>
-                      <a:srgbClr val="FFFEF8"/>
-                    </a:solidFill>
-                  </a:tcPr>
-                </a:tc>
-                <a:tc>
-                  <a:txBody>
-                    <a:bodyPr wrap="square">
-                      <a:noAutofit/>
-                    </a:bodyPr>
-                    <a:lstStyle/>
-                    <a:p>
-                      <a:pPr algn="l">
-                        <a:lnSpc>
-                          <a:spcPts val="1667"/>
-                        </a:lnSpc>
-                        <a:buNone/>
-                        <a:defRPr sz="1450" b="0">
-                          <a:solidFill>
-                            <a:srgbClr val="303437"/>
-                          </a:solidFill>
-                          <a:latin typeface="Noto Sans"/>
-                        </a:defRPr>
-                      </a:pPr>
-                      <a:r>
-                        <a:rPr sz="1450" b="0" lang="ja-JP" altLang="en-US">
-                          <a:solidFill>
-                            <a:srgbClr val="303437"/>
-                          </a:solidFill>
-                          <a:latin typeface="Noto Sans"/>
-                          <a:ea typeface="Noto Sans CJK JP"/>
-                          <a:cs typeface="Noto Sans"/>
-                        </a:rPr>
-                        <a:t>true</a:t>
-                      </a:r>
-                    </a:p>
-                  </a:txBody>
-                  <a:tcPr marL="63500" marR="63500" marT="38100" marB="38100" anchor="ctr">
-                    <a:lnL w="7620">
-                      <a:noFill/>
-                    </a:lnL>
-                    <a:lnR w="7620">
-                      <a:noFill/>
-                    </a:lnR>
-                    <a:lnT w="7620">
-                      <a:solidFill>
-                        <a:srgbClr val="626669"/>
-                      </a:solidFill>
-                      <a:prstDash val="solid"/>
-                    </a:lnT>
-                    <a:lnB w="7620">
-                      <a:noFill/>
-                    </a:lnB>
-                    <a:solidFill>
-                      <a:srgbClr val="FFFEF8"/>
-                    </a:solidFill>
-                  </a:tcPr>
-                </a:tc>
-              </a:tr>
-              <a:tr h="326072">
-                <a:tc>
-                  <a:txBody>
-                    <a:bodyPr wrap="square">
-                      <a:noAutofit/>
-                    </a:bodyPr>
-                    <a:lstStyle/>
-                    <a:p>
-                      <a:pPr algn="l">
-                        <a:lnSpc>
-                          <a:spcPts val="1667"/>
-                        </a:lnSpc>
-                        <a:buNone/>
-                        <a:defRPr sz="1450" b="0">
-                          <a:solidFill>
-                            <a:srgbClr val="303437"/>
-                          </a:solidFill>
-                          <a:latin typeface="Noto Sans"/>
-                        </a:defRPr>
-                      </a:pPr>
-                      <a:r>
-                        <a:rPr sz="1450" b="0" lang="ja-JP" altLang="en-US">
-                          <a:solidFill>
-                            <a:srgbClr val="303437"/>
-                          </a:solidFill>
-                          <a:latin typeface="Noto Sans"/>
-                          <a:ea typeface="Noto Sans CJK JP"/>
-                          <a:cs typeface="Noto Sans"/>
-                        </a:rPr>
-                        <a:t>2</a:t>
-                      </a:r>
-                    </a:p>
-                  </a:txBody>
-                  <a:tcPr marL="63500" marR="63500" marT="38100" marB="38100" anchor="ctr">
-                    <a:lnL w="7620">
-                      <a:noFill/>
-                    </a:lnL>
-                    <a:lnR w="7620">
-                      <a:noFill/>
-                    </a:lnR>
-                    <a:lnT w="7620">
-                      <a:noFill/>
-                    </a:lnT>
-                    <a:lnB w="7620">
-                      <a:noFill/>
-                    </a:lnB>
-                    <a:solidFill>
-                      <a:srgbClr val="FFFEF8"/>
-                    </a:solidFill>
-                  </a:tcPr>
-                </a:tc>
-                <a:tc>
-                  <a:txBody>
-                    <a:bodyPr wrap="square">
-                      <a:noAutofit/>
-                    </a:bodyPr>
-                    <a:lstStyle/>
-                    <a:p>
-                      <a:pPr algn="l">
-                        <a:lnSpc>
-                          <a:spcPts val="1667"/>
-                        </a:lnSpc>
-                        <a:buNone/>
-                        <a:defRPr sz="1450" b="0">
-                          <a:solidFill>
-                            <a:srgbClr val="303437"/>
-                          </a:solidFill>
-                          <a:latin typeface="Noto Sans"/>
-                        </a:defRPr>
-                      </a:pPr>
-                      <a:r>
-                        <a:rPr sz="1450" b="0" lang="ja-JP" altLang="en-US">
-                          <a:solidFill>
-                            <a:srgbClr val="303437"/>
-                          </a:solidFill>
-                          <a:latin typeface="Noto Sans"/>
-                          <a:ea typeface="Noto Sans CJK JP"/>
-                          <a:cs typeface="Noto Sans"/>
-                        </a:rPr>
-                        <a:t>train.json / 346</a:t>
-                      </a:r>
-                    </a:p>
-                  </a:txBody>
-                  <a:tcPr marL="63500" marR="63500" marT="38100" marB="38100" anchor="ctr">
-                    <a:lnL w="7620">
-                      <a:noFill/>
-                    </a:lnL>
-                    <a:lnR w="7620">
-                      <a:noFill/>
-                    </a:lnR>
-                    <a:lnT w="7620">
-                      <a:noFill/>
-                    </a:lnT>
-                    <a:lnB w="7620">
-                      <a:noFill/>
-                    </a:lnB>
-                    <a:solidFill>
-                      <a:srgbClr val="FFFEF8"/>
-                    </a:solidFill>
-                  </a:tcPr>
-                </a:tc>
-                <a:tc>
-                  <a:txBody>
-                    <a:bodyPr wrap="square">
-                      <a:noAutofit/>
-                    </a:bodyPr>
-                    <a:lstStyle/>
-                    <a:p>
-                      <a:pPr algn="l">
-                        <a:lnSpc>
-                          <a:spcPts val="1667"/>
-                        </a:lnSpc>
-                        <a:buNone/>
-                        <a:defRPr sz="1450" b="0">
-                          <a:solidFill>
-                            <a:srgbClr val="303437"/>
-                          </a:solidFill>
-                          <a:latin typeface="Noto Sans"/>
-                        </a:defRPr>
-                      </a:pPr>
-                      <a:r>
-                        <a:rPr sz="1450" b="0" lang="ja-JP" altLang="en-US">
-                          <a:solidFill>
-                            <a:srgbClr val="303437"/>
-                          </a:solidFill>
-                          <a:latin typeface="Noto Sans"/>
-                          <a:ea typeface="Noto Sans CJK JP"/>
-                          <a:cs typeface="Noto Sans"/>
-                        </a:rPr>
-                        <a:t>同行 → 他</a:t>
-                      </a:r>
-                    </a:p>
-                  </a:txBody>
-                  <a:tcPr marL="63500" marR="63500" marT="38100" marB="38100" anchor="ctr">
-                    <a:lnL w="7620">
-                      <a:noFill/>
-                    </a:lnL>
-                    <a:lnR w="7620">
-                      <a:noFill/>
-                    </a:lnR>
-                    <a:lnT w="7620">
-                      <a:noFill/>
-                    </a:lnT>
-                    <a:lnB w="7620">
-                      <a:noFill/>
-                    </a:lnB>
-                    <a:solidFill>
-                      <a:srgbClr val="FFFEF8"/>
-                    </a:solidFill>
-                  </a:tcPr>
-                </a:tc>
-                <a:tc>
-                  <a:txBody>
-                    <a:bodyPr wrap="square">
-                      <a:noAutofit/>
-                    </a:bodyPr>
-                    <a:lstStyle/>
-                    <a:p>
-                      <a:pPr algn="l">
-                        <a:lnSpc>
-                          <a:spcPts val="1667"/>
-                        </a:lnSpc>
-                        <a:buNone/>
-                        <a:defRPr sz="1450" b="0">
-                          <a:solidFill>
-                            <a:srgbClr val="303437"/>
-                          </a:solidFill>
-                          <a:latin typeface="Noto Sans"/>
-                        </a:defRPr>
-                      </a:pPr>
-                      <a:r>
-                        <a:rPr sz="1450" b="0" lang="ja-JP" altLang="en-US">
-                          <a:solidFill>
-                            <a:srgbClr val="303437"/>
-                          </a:solidFill>
-                          <a:latin typeface="Noto Sans"/>
-                          <a:ea typeface="Noto Sans CJK JP"/>
-                          <a:cs typeface="Noto Sans"/>
-                        </a:rPr>
-                        <a:t>false</a:t>
-                      </a:r>
-                    </a:p>
-                  </a:txBody>
-                  <a:tcPr marL="63500" marR="63500" marT="38100" marB="38100" anchor="ctr">
-                    <a:lnL w="7620">
-                      <a:noFill/>
-                    </a:lnL>
-                    <a:lnR w="7620">
-                      <a:noFill/>
-                    </a:lnR>
-                    <a:lnT w="7620">
-                      <a:noFill/>
-                    </a:lnT>
-                    <a:lnB w="7620">
-                      <a:noFill/>
-                    </a:lnB>
-                    <a:solidFill>
-                      <a:srgbClr val="FFFEF8"/>
-                    </a:solidFill>
-                  </a:tcPr>
-                </a:tc>
-              </a:tr>
-              <a:tr h="326072">
-                <a:tc>
-                  <a:txBody>
-                    <a:bodyPr wrap="square">
-                      <a:noAutofit/>
-                    </a:bodyPr>
-                    <a:lstStyle/>
-                    <a:p>
-                      <a:pPr algn="l">
-                        <a:lnSpc>
-                          <a:spcPts val="1667"/>
-                        </a:lnSpc>
-                        <a:buNone/>
-                        <a:defRPr sz="1450" b="0">
-                          <a:solidFill>
-                            <a:srgbClr val="303437"/>
-                          </a:solidFill>
-                          <a:latin typeface="Noto Sans"/>
-                        </a:defRPr>
-                      </a:pPr>
-                      <a:r>
-                        <a:rPr sz="1450" b="0" lang="ja-JP" altLang="en-US">
-                          <a:solidFill>
-                            <a:srgbClr val="303437"/>
-                          </a:solidFill>
-                          <a:latin typeface="Noto Sans"/>
-                          <a:ea typeface="Noto Sans CJK JP"/>
-                          <a:cs typeface="Noto Sans"/>
-                        </a:rPr>
-                        <a:t>3</a:t>
-                      </a:r>
-                    </a:p>
-                  </a:txBody>
-                  <a:tcPr marL="63500" marR="63500" marT="38100" marB="38100" anchor="ctr">
-                    <a:lnL w="7620">
-                      <a:noFill/>
-                    </a:lnL>
-                    <a:lnR w="7620">
-                      <a:noFill/>
-                    </a:lnR>
-                    <a:lnT w="7620">
-                      <a:noFill/>
-                    </a:lnT>
-                    <a:lnB w="7620">
-                      <a:noFill/>
-                    </a:lnB>
-                    <a:solidFill>
-                      <a:srgbClr val="FFFEF8"/>
-                    </a:solidFill>
-                  </a:tcPr>
-                </a:tc>
-                <a:tc>
-                  <a:txBody>
-                    <a:bodyPr wrap="square">
-                      <a:noAutofit/>
-                    </a:bodyPr>
-                    <a:lstStyle/>
-                    <a:p>
-                      <a:pPr algn="l">
-                        <a:lnSpc>
-                          <a:spcPts val="1667"/>
-                        </a:lnSpc>
-                        <a:buNone/>
-                        <a:defRPr sz="1450" b="0">
-                          <a:solidFill>
-                            <a:srgbClr val="303437"/>
-                          </a:solidFill>
-                          <a:latin typeface="Noto Sans"/>
-                        </a:defRPr>
-                      </a:pPr>
-                      <a:r>
-                        <a:rPr sz="1450" b="0" lang="ja-JP" altLang="en-US">
-                          <a:solidFill>
-                            <a:srgbClr val="303437"/>
-                          </a:solidFill>
-                          <a:latin typeface="Noto Sans"/>
-                          <a:ea typeface="Noto Sans CJK JP"/>
-                          <a:cs typeface="Noto Sans"/>
-                        </a:rPr>
-                        <a:t>train.json / 4</a:t>
-                      </a:r>
-                    </a:p>
-                  </a:txBody>
-                  <a:tcPr marL="63500" marR="63500" marT="38100" marB="38100" anchor="ctr">
-                    <a:lnL w="7620">
-                      <a:noFill/>
-                    </a:lnL>
-                    <a:lnR w="7620">
-                      <a:noFill/>
-                    </a:lnR>
-                    <a:lnT w="7620">
-                      <a:noFill/>
-                    </a:lnT>
-                    <a:lnB w="7620">
-                      <a:noFill/>
-                    </a:lnB>
-                    <a:solidFill>
-                      <a:srgbClr val="FFFEF8"/>
-                    </a:solidFill>
-                  </a:tcPr>
-                </a:tc>
-                <a:tc>
-                  <a:txBody>
-                    <a:bodyPr wrap="square">
-                      <a:noAutofit/>
-                    </a:bodyPr>
-                    <a:lstStyle/>
-                    <a:p>
-                      <a:pPr algn="l">
-                        <a:lnSpc>
-                          <a:spcPts val="1667"/>
-                        </a:lnSpc>
-                        <a:buNone/>
-                        <a:defRPr sz="1450" b="0">
-                          <a:solidFill>
-                            <a:srgbClr val="303437"/>
-                          </a:solidFill>
-                          <a:latin typeface="Noto Sans"/>
-                        </a:defRPr>
-                      </a:pPr>
-                      <a:r>
-                        <a:rPr sz="1450" b="0" lang="ja-JP" altLang="en-US">
-                          <a:solidFill>
-                            <a:srgbClr val="303437"/>
-                          </a:solidFill>
-                          <a:latin typeface="Noto Sans"/>
-                          <a:ea typeface="Noto Sans CJK JP"/>
-                          <a:cs typeface="Noto Sans"/>
-                        </a:rPr>
-                        <a:t>床 → 它</a:t>
-                      </a:r>
-                    </a:p>
-                  </a:txBody>
-                  <a:tcPr marL="63500" marR="63500" marT="38100" marB="38100" anchor="ctr">
-                    <a:lnL w="7620">
-                      <a:noFill/>
-                    </a:lnL>
-                    <a:lnR w="7620">
-                      <a:noFill/>
-                    </a:lnR>
-                    <a:lnT w="7620">
-                      <a:noFill/>
-                    </a:lnT>
-                    <a:lnB w="7620">
-                      <a:noFill/>
-                    </a:lnB>
-                    <a:solidFill>
-                      <a:srgbClr val="FFFEF8"/>
-                    </a:solidFill>
-                  </a:tcPr>
-                </a:tc>
-                <a:tc>
-                  <a:txBody>
-                    <a:bodyPr wrap="square">
-                      <a:noAutofit/>
-                    </a:bodyPr>
-                    <a:lstStyle/>
-                    <a:p>
-                      <a:pPr algn="l">
-                        <a:lnSpc>
-                          <a:spcPts val="1667"/>
-                        </a:lnSpc>
-                        <a:buNone/>
-                        <a:defRPr sz="1450" b="0">
-                          <a:solidFill>
-                            <a:srgbClr val="303437"/>
-                          </a:solidFill>
-                          <a:latin typeface="Noto Sans"/>
-                        </a:defRPr>
-                      </a:pPr>
-                      <a:r>
-                        <a:rPr sz="1450" b="0" lang="ja-JP" altLang="en-US">
-                          <a:solidFill>
-                            <a:srgbClr val="303437"/>
-                          </a:solidFill>
-                          <a:latin typeface="Noto Sans"/>
-                          <a:ea typeface="Noto Sans CJK JP"/>
-                          <a:cs typeface="Noto Sans"/>
-                        </a:rPr>
-                        <a:t>false</a:t>
-                      </a:r>
-                    </a:p>
-                  </a:txBody>
-                  <a:tcPr marL="63500" marR="63500" marT="38100" marB="38100" anchor="ctr">
-                    <a:lnL w="7620">
-                      <a:noFill/>
-                    </a:lnL>
-                    <a:lnR w="7620">
-                      <a:noFill/>
-                    </a:lnR>
-                    <a:lnT w="7620">
-                      <a:noFill/>
-                    </a:lnT>
-                    <a:lnB w="7620">
-                      <a:noFill/>
-                    </a:lnB>
-                    <a:solidFill>
-                      <a:srgbClr val="FFFEF8"/>
-                    </a:solidFill>
-                  </a:tcPr>
-                </a:tc>
-              </a:tr>
-              <a:tr h="326072">
-                <a:tc>
-                  <a:txBody>
-                    <a:bodyPr wrap="square">
-                      <a:noAutofit/>
-                    </a:bodyPr>
-                    <a:lstStyle/>
-                    <a:p>
-                      <a:pPr algn="l">
-                        <a:lnSpc>
-                          <a:spcPts val="1667"/>
-                        </a:lnSpc>
-                        <a:buNone/>
-                        <a:defRPr sz="1450" b="0">
-                          <a:solidFill>
-                            <a:srgbClr val="303437"/>
-                          </a:solidFill>
-                          <a:latin typeface="Noto Sans"/>
-                        </a:defRPr>
-                      </a:pPr>
-                      <a:r>
-                        <a:rPr sz="1450" b="0" lang="ja-JP" altLang="en-US">
-                          <a:solidFill>
-                            <a:srgbClr val="303437"/>
-                          </a:solidFill>
-                          <a:latin typeface="Noto Sans"/>
-                          <a:ea typeface="Noto Sans CJK JP"/>
-                          <a:cs typeface="Noto Sans"/>
-                        </a:rPr>
-                        <a:t>4</a:t>
-                      </a:r>
-                    </a:p>
-                  </a:txBody>
-                  <a:tcPr marL="63500" marR="63500" marT="38100" marB="38100" anchor="ctr">
-                    <a:lnL w="7620">
-                      <a:noFill/>
-                    </a:lnL>
-                    <a:lnR w="7620">
-                      <a:noFill/>
-                    </a:lnR>
-                    <a:lnT w="7620">
-                      <a:noFill/>
-                    </a:lnT>
-                    <a:lnB w="7620">
-                      <a:noFill/>
-                    </a:lnB>
-                    <a:solidFill>
-                      <a:srgbClr val="FFFEF8"/>
-                    </a:solidFill>
-                  </a:tcPr>
-                </a:tc>
-                <a:tc>
-                  <a:txBody>
-                    <a:bodyPr wrap="square">
-                      <a:noAutofit/>
-                    </a:bodyPr>
-                    <a:lstStyle/>
-                    <a:p>
-                      <a:pPr algn="l">
-                        <a:lnSpc>
-                          <a:spcPts val="1667"/>
-                        </a:lnSpc>
-                        <a:buNone/>
-                        <a:defRPr sz="1450" b="0">
-                          <a:solidFill>
-                            <a:srgbClr val="303437"/>
-                          </a:solidFill>
-                          <a:latin typeface="Noto Sans"/>
-                        </a:defRPr>
-                      </a:pPr>
-                      <a:r>
-                        <a:rPr sz="1450" b="0" lang="ja-JP" altLang="en-US">
-                          <a:solidFill>
-                            <a:srgbClr val="303437"/>
-                          </a:solidFill>
-                          <a:latin typeface="Noto Sans"/>
-                          <a:ea typeface="Noto Sans CJK JP"/>
-                          <a:cs typeface="Noto Sans"/>
-                        </a:rPr>
-                        <a:t>dev.json / 3</a:t>
-                      </a:r>
-                    </a:p>
-                  </a:txBody>
-                  <a:tcPr marL="63500" marR="63500" marT="38100" marB="38100" anchor="ctr">
-                    <a:lnL w="7620">
-                      <a:noFill/>
-                    </a:lnL>
-                    <a:lnR w="7620">
-                      <a:noFill/>
-                    </a:lnR>
-                    <a:lnT w="7620">
-                      <a:noFill/>
-                    </a:lnT>
-                    <a:lnB w="7620">
-                      <a:noFill/>
-                    </a:lnB>
-                    <a:solidFill>
-                      <a:srgbClr val="FFFEF8"/>
-                    </a:solidFill>
-                  </a:tcPr>
-                </a:tc>
-                <a:tc>
-                  <a:txBody>
-                    <a:bodyPr wrap="square">
-                      <a:noAutofit/>
-                    </a:bodyPr>
-                    <a:lstStyle/>
-                    <a:p>
-                      <a:pPr algn="l">
-                        <a:lnSpc>
-                          <a:spcPts val="1667"/>
-                        </a:lnSpc>
-                        <a:buNone/>
-                        <a:defRPr sz="1450" b="0">
-                          <a:solidFill>
-                            <a:srgbClr val="303437"/>
-                          </a:solidFill>
-                          <a:latin typeface="Noto Sans"/>
-                        </a:defRPr>
-                      </a:pPr>
-                      <a:r>
-                        <a:rPr sz="1450" b="0" lang="ja-JP" altLang="en-US">
-                          <a:solidFill>
-                            <a:srgbClr val="303437"/>
-                          </a:solidFill>
-                          <a:latin typeface="Noto Sans"/>
-                          <a:ea typeface="Noto Sans CJK JP"/>
-                          <a:cs typeface="Noto Sans"/>
-                        </a:rPr>
-                        <a:t>衣服 → 它</a:t>
-                      </a:r>
-                    </a:p>
-                  </a:txBody>
-                  <a:tcPr marL="63500" marR="63500" marT="38100" marB="38100" anchor="ctr">
-                    <a:lnL w="7620">
-                      <a:noFill/>
-                    </a:lnL>
-                    <a:lnR w="7620">
-                      <a:noFill/>
-                    </a:lnR>
-                    <a:lnT w="7620">
-                      <a:noFill/>
-                    </a:lnT>
-                    <a:lnB w="7620">
-                      <a:noFill/>
-                    </a:lnB>
-                    <a:solidFill>
-                      <a:srgbClr val="FFFEF8"/>
-                    </a:solidFill>
-                  </a:tcPr>
-                </a:tc>
-                <a:tc>
-                  <a:txBody>
-                    <a:bodyPr wrap="square">
-                      <a:noAutofit/>
-                    </a:bodyPr>
-                    <a:lstStyle/>
-                    <a:p>
-                      <a:pPr algn="l">
-                        <a:lnSpc>
-                          <a:spcPts val="1667"/>
-                        </a:lnSpc>
-                        <a:buNone/>
-                        <a:defRPr sz="1450" b="0">
-                          <a:solidFill>
-                            <a:srgbClr val="303437"/>
-                          </a:solidFill>
-                          <a:latin typeface="Noto Sans"/>
-                        </a:defRPr>
-                      </a:pPr>
-                      <a:r>
-                        <a:rPr sz="1450" b="0" lang="ja-JP" altLang="en-US">
-                          <a:solidFill>
-                            <a:srgbClr val="303437"/>
-                          </a:solidFill>
-                          <a:latin typeface="Noto Sans"/>
-                          <a:ea typeface="Noto Sans CJK JP"/>
-                          <a:cs typeface="Noto Sans"/>
-                        </a:rPr>
-                        <a:t>true</a:t>
-                      </a:r>
-                    </a:p>
-                  </a:txBody>
-                  <a:tcPr marL="63500" marR="63500" marT="38100" marB="38100" anchor="ctr">
-                    <a:lnL w="7620">
-                      <a:noFill/>
-                    </a:lnL>
-                    <a:lnR w="7620">
-                      <a:noFill/>
-                    </a:lnR>
-                    <a:lnT w="7620">
-                      <a:noFill/>
-                    </a:lnT>
-                    <a:lnB w="7620">
-                      <a:noFill/>
-                    </a:lnB>
-                    <a:solidFill>
-                      <a:srgbClr val="FFFEF8"/>
-                    </a:solidFill>
-                  </a:tcPr>
-                </a:tc>
-              </a:tr>
-              <a:tr h="326072">
-                <a:tc>
-                  <a:txBody>
-                    <a:bodyPr wrap="square">
-                      <a:noAutofit/>
-                    </a:bodyPr>
-                    <a:lstStyle/>
-                    <a:p>
-                      <a:pPr algn="l">
-                        <a:lnSpc>
-                          <a:spcPts val="1667"/>
-                        </a:lnSpc>
-                        <a:buNone/>
-                        <a:defRPr sz="1450" b="0">
-                          <a:solidFill>
-                            <a:srgbClr val="303437"/>
-                          </a:solidFill>
-                          <a:latin typeface="Noto Sans"/>
-                        </a:defRPr>
-                      </a:pPr>
-                      <a:r>
-                        <a:rPr sz="1450" b="0" lang="ja-JP" altLang="en-US">
-                          <a:solidFill>
-                            <a:srgbClr val="303437"/>
-                          </a:solidFill>
-                          <a:latin typeface="Noto Sans"/>
-                          <a:ea typeface="Noto Sans CJK JP"/>
-                          <a:cs typeface="Noto Sans"/>
-                        </a:rPr>
-                        <a:t>5</a:t>
-                      </a:r>
-                    </a:p>
-                  </a:txBody>
-                  <a:tcPr marL="63500" marR="63500" marT="38100" marB="38100" anchor="ctr">
-                    <a:lnL w="7620">
-                      <a:noFill/>
-                    </a:lnL>
-                    <a:lnR w="7620">
-                      <a:noFill/>
-                    </a:lnR>
-                    <a:lnT w="7620">
-                      <a:noFill/>
-                    </a:lnT>
-                    <a:lnB w="7620">
-                      <a:noFill/>
-                    </a:lnB>
-                    <a:solidFill>
-                      <a:srgbClr val="FFFEF8"/>
-                    </a:solidFill>
-                  </a:tcPr>
-                </a:tc>
-                <a:tc>
-                  <a:txBody>
-                    <a:bodyPr wrap="square">
-                      <a:noAutofit/>
-                    </a:bodyPr>
-                    <a:lstStyle/>
-                    <a:p>
-                      <a:pPr algn="l">
-                        <a:lnSpc>
-                          <a:spcPts val="1667"/>
-                        </a:lnSpc>
-                        <a:buNone/>
-                        <a:defRPr sz="1450" b="0">
-                          <a:solidFill>
-                            <a:srgbClr val="303437"/>
-                          </a:solidFill>
-                          <a:latin typeface="Noto Sans"/>
-                        </a:defRPr>
-                      </a:pPr>
-                      <a:r>
-                        <a:rPr sz="1450" b="0" lang="ja-JP" altLang="en-US">
-                          <a:solidFill>
-                            <a:srgbClr val="303437"/>
-                          </a:solidFill>
-                          <a:latin typeface="Noto Sans"/>
-                          <a:ea typeface="Noto Sans CJK JP"/>
-                          <a:cs typeface="Noto Sans"/>
-                        </a:rPr>
-                        <a:t>dev.json / 14</a:t>
-                      </a:r>
-                    </a:p>
-                  </a:txBody>
-                  <a:tcPr marL="63500" marR="63500" marT="38100" marB="38100" anchor="ctr">
-                    <a:lnL w="7620">
-                      <a:noFill/>
-                    </a:lnL>
-                    <a:lnR w="7620">
-                      <a:noFill/>
-                    </a:lnR>
-                    <a:lnT w="7620">
-                      <a:noFill/>
-                    </a:lnT>
-                    <a:lnB w="7620">
-                      <a:noFill/>
-                    </a:lnB>
-                    <a:solidFill>
-                      <a:srgbClr val="FFFEF8"/>
-                    </a:solidFill>
-                  </a:tcPr>
-                </a:tc>
-                <a:tc>
-                  <a:txBody>
-                    <a:bodyPr wrap="square">
-                      <a:noAutofit/>
-                    </a:bodyPr>
-                    <a:lstStyle/>
-                    <a:p>
-                      <a:pPr algn="l">
-                        <a:lnSpc>
-                          <a:spcPts val="1667"/>
-                        </a:lnSpc>
-                        <a:buNone/>
-                        <a:defRPr sz="1450" b="0">
-                          <a:solidFill>
-                            <a:srgbClr val="303437"/>
-                          </a:solidFill>
-                          <a:latin typeface="Noto Sans"/>
-                        </a:defRPr>
-                      </a:pPr>
-                      <a:r>
-                        <a:rPr sz="1450" b="0" lang="ja-JP" altLang="en-US">
-                          <a:solidFill>
-                            <a:srgbClr val="303437"/>
-                          </a:solidFill>
-                          <a:latin typeface="Noto Sans"/>
-                          <a:ea typeface="Noto Sans CJK JP"/>
-                          <a:cs typeface="Noto Sans"/>
-                        </a:rPr>
-                        <a:t>小桥 → 它</a:t>
-                      </a:r>
-                    </a:p>
-                  </a:txBody>
-                  <a:tcPr marL="63500" marR="63500" marT="38100" marB="38100" anchor="ctr">
-                    <a:lnL w="7620">
-                      <a:noFill/>
-                    </a:lnL>
-                    <a:lnR w="7620">
-                      <a:noFill/>
-                    </a:lnR>
-                    <a:lnT w="7620">
-                      <a:noFill/>
-                    </a:lnT>
-                    <a:lnB w="7620">
-                      <a:noFill/>
-                    </a:lnB>
-                    <a:solidFill>
-                      <a:srgbClr val="FFFEF8"/>
-                    </a:solidFill>
-                  </a:tcPr>
-                </a:tc>
-                <a:tc>
-                  <a:txBody>
-                    <a:bodyPr wrap="square">
-                      <a:noAutofit/>
-                    </a:bodyPr>
-                    <a:lstStyle/>
-                    <a:p>
-                      <a:pPr algn="l">
-                        <a:lnSpc>
-                          <a:spcPts val="1667"/>
-                        </a:lnSpc>
-                        <a:buNone/>
-                        <a:defRPr sz="1450" b="0">
-                          <a:solidFill>
-                            <a:srgbClr val="303437"/>
-                          </a:solidFill>
-                          <a:latin typeface="Noto Sans"/>
-                        </a:defRPr>
-                      </a:pPr>
-                      <a:r>
-                        <a:rPr sz="1450" b="0" lang="ja-JP" altLang="en-US">
-                          <a:solidFill>
-                            <a:srgbClr val="303437"/>
-                          </a:solidFill>
-                          <a:latin typeface="Noto Sans"/>
-                          <a:ea typeface="Noto Sans CJK JP"/>
-                          <a:cs typeface="Noto Sans"/>
-                        </a:rPr>
-                        <a:t>true</a:t>
-                      </a:r>
-                    </a:p>
-                  </a:txBody>
-                  <a:tcPr marL="63500" marR="63500" marT="38100" marB="38100" anchor="ctr">
-                    <a:lnL w="7620">
-                      <a:noFill/>
-                    </a:lnL>
-                    <a:lnR w="7620">
-                      <a:noFill/>
-                    </a:lnR>
-                    <a:lnT w="7620">
-                      <a:noFill/>
-                    </a:lnT>
-                    <a:lnB w="7620">
-                      <a:noFill/>
-                    </a:lnB>
-                    <a:solidFill>
-                      <a:srgbClr val="FFFEF8"/>
-                    </a:solidFill>
-                  </a:tcPr>
-                </a:tc>
-              </a:tr>
-              <a:tr h="326072">
-                <a:tc>
-                  <a:txBody>
-                    <a:bodyPr wrap="square">
-                      <a:noAutofit/>
-                    </a:bodyPr>
-                    <a:lstStyle/>
-                    <a:p>
-                      <a:pPr algn="l">
-                        <a:lnSpc>
-                          <a:spcPts val="1667"/>
-                        </a:lnSpc>
-                        <a:buNone/>
-                        <a:defRPr sz="1450" b="0">
-                          <a:solidFill>
-                            <a:srgbClr val="303437"/>
-                          </a:solidFill>
-                          <a:latin typeface="Noto Sans"/>
-                        </a:defRPr>
-                      </a:pPr>
-                      <a:r>
-                        <a:rPr sz="1450" b="0" lang="ja-JP" altLang="en-US">
-                          <a:solidFill>
-                            <a:srgbClr val="303437"/>
-                          </a:solidFill>
-                          <a:latin typeface="Noto Sans"/>
-                          <a:ea typeface="Noto Sans CJK JP"/>
-                          <a:cs typeface="Noto Sans"/>
-                        </a:rPr>
-                        <a:t>6</a:t>
-                      </a:r>
-                    </a:p>
-                  </a:txBody>
-                  <a:tcPr marL="63500" marR="63500" marT="38100" marB="38100" anchor="ctr">
-                    <a:lnL w="7620">
-                      <a:noFill/>
-                    </a:lnL>
-                    <a:lnR w="7620">
-                      <a:noFill/>
-                    </a:lnR>
-                    <a:lnT w="7620">
-                      <a:noFill/>
-                    </a:lnT>
-                    <a:lnB w="7620">
-                      <a:noFill/>
-                    </a:lnB>
-                    <a:solidFill>
-                      <a:srgbClr val="FFFEF8"/>
-                    </a:solidFill>
-                  </a:tcPr>
-                </a:tc>
-                <a:tc>
-                  <a:txBody>
-                    <a:bodyPr wrap="square">
-                      <a:noAutofit/>
-                    </a:bodyPr>
-                    <a:lstStyle/>
-                    <a:p>
-                      <a:pPr algn="l">
-                        <a:lnSpc>
-                          <a:spcPts val="1667"/>
-                        </a:lnSpc>
-                        <a:buNone/>
-                        <a:defRPr sz="1450" b="0">
-                          <a:solidFill>
-                            <a:srgbClr val="303437"/>
-                          </a:solidFill>
-                          <a:latin typeface="Noto Sans"/>
-                        </a:defRPr>
-                      </a:pPr>
-                      <a:r>
-                        <a:rPr sz="1450" b="0" lang="ja-JP" altLang="en-US">
-                          <a:solidFill>
-                            <a:srgbClr val="303437"/>
-                          </a:solidFill>
-                          <a:latin typeface="Noto Sans"/>
-                          <a:ea typeface="Noto Sans CJK JP"/>
-                          <a:cs typeface="Noto Sans"/>
-                        </a:rPr>
-                        <a:t>dev.json / 16</a:t>
-                      </a:r>
-                    </a:p>
-                  </a:txBody>
-                  <a:tcPr marL="63500" marR="63500" marT="38100" marB="38100" anchor="ctr">
-                    <a:lnL w="7620">
-                      <a:noFill/>
-                    </a:lnL>
-                    <a:lnR w="7620">
-                      <a:noFill/>
-                    </a:lnR>
-                    <a:lnT w="7620">
-                      <a:noFill/>
-                    </a:lnT>
-                    <a:lnB w="7620">
-                      <a:noFill/>
-                    </a:lnB>
-                    <a:solidFill>
-                      <a:srgbClr val="FFFEF8"/>
-                    </a:solidFill>
-                  </a:tcPr>
-                </a:tc>
-                <a:tc>
-                  <a:txBody>
-                    <a:bodyPr wrap="square">
-                      <a:noAutofit/>
-                    </a:bodyPr>
-                    <a:lstStyle/>
-                    <a:p>
-                      <a:pPr algn="l">
-                        <a:lnSpc>
-                          <a:spcPts val="1667"/>
-                        </a:lnSpc>
-                        <a:buNone/>
-                        <a:defRPr sz="1450" b="0">
-                          <a:solidFill>
-                            <a:srgbClr val="303437"/>
-                          </a:solidFill>
-                          <a:latin typeface="Noto Sans"/>
-                        </a:defRPr>
-                      </a:pPr>
-                      <a:r>
-                        <a:rPr sz="1450" b="0" lang="ja-JP" altLang="en-US">
-                          <a:solidFill>
-                            <a:srgbClr val="303437"/>
-                          </a:solidFill>
-                          <a:latin typeface="Noto Sans"/>
-                          <a:ea typeface="Noto Sans CJK JP"/>
-                          <a:cs typeface="Noto Sans"/>
-                        </a:rPr>
-                        <a:t>孙少平 → 她</a:t>
-                      </a:r>
-                    </a:p>
-                  </a:txBody>
-                  <a:tcPr marL="63500" marR="63500" marT="38100" marB="38100" anchor="ctr">
-                    <a:lnL w="7620">
-                      <a:noFill/>
-                    </a:lnL>
-                    <a:lnR w="7620">
-                      <a:noFill/>
-                    </a:lnR>
-                    <a:lnT w="7620">
-                      <a:noFill/>
-                    </a:lnT>
-                    <a:lnB w="7620">
-                      <a:noFill/>
-                    </a:lnB>
-                    <a:solidFill>
-                      <a:srgbClr val="FFFEF8"/>
-                    </a:solidFill>
-                  </a:tcPr>
-                </a:tc>
-                <a:tc>
-                  <a:txBody>
-                    <a:bodyPr wrap="square">
-                      <a:noAutofit/>
-                    </a:bodyPr>
-                    <a:lstStyle/>
-                    <a:p>
-                      <a:pPr algn="l">
-                        <a:lnSpc>
-                          <a:spcPts val="1667"/>
-                        </a:lnSpc>
-                        <a:buNone/>
-                        <a:defRPr sz="1450" b="0">
-                          <a:solidFill>
-                            <a:srgbClr val="303437"/>
-                          </a:solidFill>
-                          <a:latin typeface="Noto Sans"/>
-                        </a:defRPr>
-                      </a:pPr>
-                      <a:r>
-                        <a:rPr sz="1450" b="0" lang="ja-JP" altLang="en-US">
-                          <a:solidFill>
-                            <a:srgbClr val="303437"/>
-                          </a:solidFill>
-                          <a:latin typeface="Noto Sans"/>
-                          <a:ea typeface="Noto Sans CJK JP"/>
-                          <a:cs typeface="Noto Sans"/>
-                        </a:rPr>
-                        <a:t>false</a:t>
-                      </a:r>
-                    </a:p>
-                  </a:txBody>
-                  <a:tcPr marL="63500" marR="63500" marT="38100" marB="38100" anchor="ctr">
-                    <a:lnL w="7620">
-                      <a:noFill/>
-                    </a:lnL>
-                    <a:lnR w="7620">
-                      <a:noFill/>
-                    </a:lnR>
-                    <a:lnT w="7620">
-                      <a:noFill/>
-                    </a:lnT>
-                    <a:lnB w="7620">
-                      <a:noFill/>
-                    </a:lnB>
-                    <a:solidFill>
-                      <a:srgbClr val="FFFEF8"/>
-                    </a:solidFill>
-                  </a:tcPr>
-                </a:tc>
-              </a:tr>
-              <a:tr h="326072">
-                <a:tc>
-                  <a:txBody>
-                    <a:bodyPr wrap="square">
-                      <a:noAutofit/>
-                    </a:bodyPr>
-                    <a:lstStyle/>
-                    <a:p>
-                      <a:pPr algn="l">
-                        <a:lnSpc>
-                          <a:spcPts val="1667"/>
-                        </a:lnSpc>
-                        <a:buNone/>
-                        <a:defRPr sz="1450" b="0">
-                          <a:solidFill>
-                            <a:srgbClr val="303437"/>
-                          </a:solidFill>
-                          <a:latin typeface="Noto Sans"/>
-                        </a:defRPr>
-                      </a:pPr>
-                      <a:r>
-                        <a:rPr sz="1450" b="0" lang="ja-JP" altLang="en-US">
-                          <a:solidFill>
-                            <a:srgbClr val="303437"/>
-                          </a:solidFill>
-                          <a:latin typeface="Noto Sans"/>
-                          <a:ea typeface="Noto Sans CJK JP"/>
-                          <a:cs typeface="Noto Sans"/>
-                        </a:rPr>
-                        <a:t>7</a:t>
-                      </a:r>
-                    </a:p>
-                  </a:txBody>
-                  <a:tcPr marL="63500" marR="63500" marT="38100" marB="38100" anchor="ctr">
-                    <a:lnL w="7620">
-                      <a:noFill/>
-                    </a:lnL>
-                    <a:lnR w="7620">
-                      <a:noFill/>
-                    </a:lnR>
-                    <a:lnT w="7620">
-                      <a:noFill/>
-                    </a:lnT>
-                    <a:lnB w="15240">
-                      <a:solidFill>
-                        <a:srgbClr val="626669"/>
-                      </a:solidFill>
-                      <a:prstDash val="solid"/>
-                    </a:lnB>
-                    <a:solidFill>
-                      <a:srgbClr val="FFFEF8"/>
-                    </a:solidFill>
-                  </a:tcPr>
-                </a:tc>
-                <a:tc>
-                  <a:txBody>
-                    <a:bodyPr wrap="square">
-                      <a:noAutofit/>
-                    </a:bodyPr>
-                    <a:lstStyle/>
-                    <a:p>
-                      <a:pPr algn="l">
-                        <a:lnSpc>
-                          <a:spcPts val="1667"/>
-                        </a:lnSpc>
-                        <a:buNone/>
-                        <a:defRPr sz="1450" b="0">
-                          <a:solidFill>
-                            <a:srgbClr val="303437"/>
-                          </a:solidFill>
-                          <a:latin typeface="Noto Sans"/>
-                        </a:defRPr>
-                      </a:pPr>
-                      <a:r>
-                        <a:rPr sz="1450" b="0" lang="ja-JP" altLang="en-US">
-                          <a:solidFill>
-                            <a:srgbClr val="303437"/>
-                          </a:solidFill>
-                          <a:latin typeface="Noto Sans"/>
-                          <a:ea typeface="Noto Sans CJK JP"/>
-                          <a:cs typeface="Noto Sans"/>
-                        </a:rPr>
-                        <a:t>train.json / 37</a:t>
-                      </a:r>
-                    </a:p>
-                  </a:txBody>
-                  <a:tcPr marL="63500" marR="63500" marT="38100" marB="38100" anchor="ctr">
-                    <a:lnL w="7620">
-                      <a:noFill/>
-                    </a:lnL>
-                    <a:lnR w="7620">
-                      <a:noFill/>
-                    </a:lnR>
-                    <a:lnT w="7620">
-                      <a:noFill/>
-                    </a:lnT>
-                    <a:lnB w="15240">
-                      <a:solidFill>
-                        <a:srgbClr val="626669"/>
-                      </a:solidFill>
-                      <a:prstDash val="solid"/>
-                    </a:lnB>
-                    <a:solidFill>
-                      <a:srgbClr val="FFFEF8"/>
-                    </a:solidFill>
-                  </a:tcPr>
-                </a:tc>
-                <a:tc>
-                  <a:txBody>
-                    <a:bodyPr wrap="square">
-                      <a:noAutofit/>
-                    </a:bodyPr>
-                    <a:lstStyle/>
-                    <a:p>
-                      <a:pPr algn="l">
-                        <a:lnSpc>
-                          <a:spcPts val="1667"/>
-                        </a:lnSpc>
-                        <a:buNone/>
-                        <a:defRPr sz="1450" b="0">
-                          <a:solidFill>
-                            <a:srgbClr val="303437"/>
-                          </a:solidFill>
-                          <a:latin typeface="Noto Sans"/>
-                        </a:defRPr>
-                      </a:pPr>
-                      <a:r>
-                        <a:rPr sz="1450" b="0" lang="ja-JP" altLang="en-US">
-                          <a:solidFill>
-                            <a:srgbClr val="303437"/>
-                          </a:solidFill>
-                          <a:latin typeface="Noto Sans"/>
-                          <a:ea typeface="Noto Sans CJK JP"/>
-                          <a:cs typeface="Noto Sans"/>
-                        </a:rPr>
-                        <a:t>我父亲 → 他</a:t>
-                      </a:r>
-                    </a:p>
-                  </a:txBody>
-                  <a:tcPr marL="63500" marR="63500" marT="38100" marB="38100" anchor="ctr">
-                    <a:lnL w="7620">
-                      <a:noFill/>
-                    </a:lnL>
-                    <a:lnR w="7620">
-                      <a:noFill/>
-                    </a:lnR>
-                    <a:lnT w="7620">
-                      <a:noFill/>
-                    </a:lnT>
-                    <a:lnB w="15240">
-                      <a:solidFill>
-                        <a:srgbClr val="626669"/>
-                      </a:solidFill>
-                      <a:prstDash val="solid"/>
-                    </a:lnB>
-                    <a:solidFill>
-                      <a:srgbClr val="FFFEF8"/>
-                    </a:solidFill>
-                  </a:tcPr>
-                </a:tc>
-                <a:tc>
-                  <a:txBody>
-                    <a:bodyPr wrap="square">
-                      <a:noAutofit/>
-                    </a:bodyPr>
-                    <a:lstStyle/>
-                    <a:p>
-                      <a:pPr algn="l">
-                        <a:lnSpc>
-                          <a:spcPts val="1667"/>
-                        </a:lnSpc>
-                        <a:buNone/>
-                        <a:defRPr sz="1450" b="0">
-                          <a:solidFill>
-                            <a:srgbClr val="303437"/>
-                          </a:solidFill>
-                          <a:latin typeface="Noto Sans"/>
-                        </a:defRPr>
-                      </a:pPr>
-                      <a:r>
-                        <a:rPr sz="1450" b="0" lang="ja-JP" altLang="en-US">
-                          <a:solidFill>
-                            <a:srgbClr val="303437"/>
-                          </a:solidFill>
-                          <a:latin typeface="Noto Sans"/>
-                          <a:ea typeface="Noto Sans CJK JP"/>
-                          <a:cs typeface="Noto Sans"/>
-                        </a:rPr>
-                        <a:t>true</a:t>
-                      </a:r>
-                    </a:p>
-                  </a:txBody>
-                  <a:tcPr marL="63500" marR="63500" marT="38100" marB="38100" anchor="ctr">
-                    <a:lnL w="7620">
-                      <a:noFill/>
-                    </a:lnL>
-                    <a:lnR w="7620">
-                      <a:noFill/>
-                    </a:lnR>
-                    <a:lnT w="7620">
-                      <a:noFill/>
-                    </a:lnT>
-                    <a:lnB w="15240">
-                      <a:solidFill>
-                        <a:srgbClr val="626669"/>
-                      </a:solidFill>
-                      <a:prstDash val="solid"/>
-                    </a:lnB>
-                    <a:solidFill>
-                      <a:srgbClr val="FFFEF8"/>
-                    </a:solidFill>
-                  </a:tcPr>
-                </a:tc>
-              </a:tr>
-            </a:tbl>
-          </a:graphicData>
-        </a:graphic>
-      </p:graphicFrame>
-      <p:sp>
-        <p:nvSpPr>
-          <p:cNvPr id="5" name="TextBox 4"/>
-          <p:cNvSpPr txBox="1"/>
-          <p:nvPr/>
-        </p:nvSpPr>
-        <p:spPr>
-          <a:xfrm>
-            <a:off x="594360" y="4208779"/>
-            <a:ext cx="7955279" cy="658368"/>
-          </a:xfrm>
-          <a:prstGeom prst="rect">
-            <a:avLst/>
-          </a:prstGeom>
-          <a:noFill/>
-        </p:spPr>
-        <p:txBody>
-          <a:bodyPr wrap="square" lIns="0" rIns="0" tIns="0" bIns="0">
-            <a:noAutofit/>
-          </a:bodyPr>
-          <a:lstStyle/>
-          <a:p>
-            <a:pPr algn="l">
-              <a:lnSpc>
-                <a:spcPts val="1568"/>
-              </a:lnSpc>
-              <a:spcBef>
-                <a:spcPts val="0"/>
-              </a:spcBef>
-              <a:spcAft>
-                <a:spcPts val="0"/>
-              </a:spcAft>
-              <a:buNone/>
-              <a:defRPr sz="1400" b="0">
-                <a:solidFill>
-                  <a:srgbClr val="303437"/>
-                </a:solidFill>
-                <a:latin typeface="Noto Sans"/>
-              </a:defRPr>
-            </a:pPr>
-            <a:r>
-              <a:rPr sz="1400" b="0" lang="ja-JP" altLang="en-US">
-                <a:solidFill>
-                  <a:srgbClr val="303437"/>
-                </a:solidFill>
-                <a:latin typeface="Noto Sans"/>
-                <a:ea typeface="Noto Sans CJK JP"/>
-                <a:cs typeface="Noto Sans"/>
-              </a:rPr>
-              <a:t>行番号は1起算。学習のidxは一意ではない。各行のSHA256と元レコードを付属記録に保存。</a:t>
-            </a:r>
-          </a:p>
-        </p:txBody>
-      </p:sp>
-      <p:sp>
-        <p:nvSpPr>
-          <p:cNvPr id="6" name="sources"/>
-          <p:cNvSpPr txBox="1"/>
-          <p:nvPr/>
-        </p:nvSpPr>
-        <p:spPr>
-          <a:xfrm>
-            <a:off x="502920" y="4700016"/>
-            <a:ext cx="8183879" cy="530352"/>
-          </a:xfrm>
-          <a:prstGeom prst="rect">
-            <a:avLst/>
-          </a:prstGeom>
-          <a:noFill/>
-        </p:spPr>
-        <p:txBody>
-          <a:bodyPr wrap="square" lIns="0" rIns="0" tIns="0" bIns="0">
-            <a:noAutofit/>
-          </a:bodyPr>
-          <a:lstStyle/>
-          <a:p>
-            <a:pPr algn="l">
-              <a:lnSpc>
-                <a:spcPts val="940"/>
-              </a:lnSpc>
-              <a:spcBef>
-                <a:spcPts val="0"/>
-              </a:spcBef>
-              <a:spcAft>
-                <a:spcPts val="300"/>
-              </a:spcAft>
-              <a:buNone/>
-              <a:defRPr sz="810" b="0">
-                <a:solidFill>
-                  <a:srgbClr val="303437"/>
-                </a:solidFill>
-                <a:latin typeface="Noto Sans"/>
-              </a:defRPr>
-            </a:pPr>
-            <a:r>
-              <a:rPr sz="810" b="0" lang="ja-JP" altLang="en-US">
-                <a:solidFill>
-                  <a:srgbClr val="626669"/>
-                </a:solidFill>
-                <a:latin typeface="Noto Sans"/>
-                <a:ea typeface="Noto Sans CJK JP"/>
-                <a:cs typeface="Noto Sans"/>
-              </a:rPr>
-              <a:t>[1] CLUEbenchmark. cluewsc2020_public.zip; README dated 2021-08-29.</a:t>
-            </a:r>
-            <a:r>
-              <a:rPr sz="810" b="0" lang="ja-JP" altLang="en-US">
-                <a:solidFill>
-                  <a:srgbClr val="626669"/>
-                </a:solidFill>
-                <a:latin typeface="Noto Sans"/>
-                <a:ea typeface="Noto Sans CJK JP"/>
-                <a:cs typeface="Noto Sans"/>
-              </a:rPr>
-              <a:t>  </a:t>
-            </a:r>
-            <a:r>
-              <a:rPr sz="810" b="0" lang="ja-JP" altLang="en-US">
-                <a:solidFill>
-                  <a:srgbClr val="626669"/>
-                </a:solidFill>
-                <a:latin typeface="Noto Sans"/>
-                <a:ea typeface="Noto Sans CJK JP"/>
-                <a:cs typeface="Noto Sans"/>
-                <a:hlinkClick r:id="rId2"/>
-              </a:rPr>
-              <a:t>https://storage.googleapis.com/cluebenchmark/tasks/cluewsc2020_public.zip</a:t>
-            </a:r>
-          </a:p>
-        </p:txBody>
-      </p:sp>
-    </p:spTree>
-  </p:cSld>
-  <p:clrMapOvr>
-    <a:masterClrMapping/>
-  </p:clrMapOvr>
-</p:sld>
-</file>
-
-<file path=ppt/slides/slide47.xml><?xml version="1.0" encoding="utf-8"?>
-<p:sld xmlns:a="http://schemas.openxmlformats.org/drawingml/2006/main" xmlns:p="http://schemas.openxmlformats.org/presentationml/2006/main" xmlns:r="http://schemas.openxmlformats.org/officeDocument/2006/relationships">
-  <p:cSld>
-    <p:spTree>
-      <p:nvGrpSpPr>
-        <p:cNvPr id="1" name=""/>
-        <p:cNvGrpSpPr/>
-        <p:nvPr/>
-      </p:nvGrpSpPr>
-      <p:grpSpPr/>
-      <p:sp>
-        <p:nvSpPr>
-          <p:cNvPr id="2" name="Title 1"/>
-          <p:cNvSpPr>
-            <a:spLocks noGrp="1"/>
-          </p:cNvSpPr>
-          <p:nvPr>
-            <p:ph type="title"/>
-          </p:nvPr>
-        </p:nvSpPr>
-        <p:spPr>
-          <a:xfrm>
-            <a:off x="468172" y="650138"/>
-            <a:ext cx="8206740" cy="616305"/>
-          </a:xfrm>
-        </p:spPr>
-        <p:txBody>
-          <a:bodyPr wrap="square" lIns="0" rIns="0" tIns="0" bIns="0">
-            <a:noAutofit/>
-          </a:bodyPr>
-          <a:lstStyle/>
-          <a:p>
-            <a:pPr algn="l">
-              <a:lnSpc>
-                <a:spcPct val="110000"/>
-              </a:lnSpc>
-              <a:buNone/>
-              <a:defRPr sz="2800" b="0">
-                <a:solidFill>
-                  <a:srgbClr val="303437"/>
-                </a:solidFill>
-                <a:latin typeface="Noto Sans"/>
-              </a:defRPr>
-            </a:pPr>
-            <a:r>
-              <a:rPr sz="2800" b="1" lang="ja-JP" altLang="en-US">
-                <a:solidFill>
-                  <a:srgbClr val="303437"/>
-                </a:solidFill>
-                <a:latin typeface="Noto Sans"/>
-                <a:ea typeface="Noto Sans CJK JP"/>
-                <a:cs typeface="Noto Sans"/>
-              </a:rPr>
-              <a:t>13件の公開位置と、指定された対象</a:t>
-            </a:r>
-          </a:p>
-        </p:txBody>
-      </p:sp>
-      <p:sp>
-        <p:nvSpPr>
-          <p:cNvPr id="3" name="Title 2"/>
-          <p:cNvSpPr>
-            <a:spLocks noGrp="1"/>
-          </p:cNvSpPr>
-          <p:nvPr>
-            <p:ph type="title" idx="2"/>
-          </p:nvPr>
-        </p:nvSpPr>
-        <p:spPr>
-          <a:xfrm>
-            <a:off x="75895" y="0"/>
-            <a:ext cx="8115300" cy="480060"/>
-          </a:xfrm>
-        </p:spPr>
-        <p:txBody>
-          <a:bodyPr wrap="square" lIns="0" rIns="0" tIns="0" bIns="0" anchor="ctr">
-            <a:noAutofit/>
-          </a:bodyPr>
-          <a:lstStyle/>
-          <a:p>
-            <a:pPr algn="l">
-              <a:lnSpc>
-                <a:spcPct val="110000"/>
-              </a:lnSpc>
-              <a:buNone/>
-              <a:defRPr sz="1400" b="0">
-                <a:solidFill>
-                  <a:srgbClr val="303437"/>
-                </a:solidFill>
-                <a:latin typeface="Noto Sans"/>
-              </a:defRPr>
-            </a:pPr>
-            <a:r>
-              <a:rPr sz="1400" b="1" lang="ja-JP" altLang="en-US">
-                <a:solidFill>
-                  <a:srgbClr val="FFFEF8"/>
-                </a:solidFill>
-                <a:latin typeface="Noto Sans"/>
-                <a:ea typeface="Noto Sans CJK JP"/>
-                <a:cs typeface="Noto Sans"/>
-              </a:rPr>
-              <a:t>Appendix: 2. 版・原位置・実装</a:t>
-            </a:r>
-          </a:p>
-        </p:txBody>
-      </p:sp>
-      <p:graphicFrame>
-        <p:nvGraphicFramePr>
-          <p:cNvPr id="4" name="Table 3"/>
-          <p:cNvGraphicFramePr>
-            <a:graphicFrameLocks noGrp="1"/>
-          </p:cNvGraphicFramePr>
-          <p:nvPr/>
-        </p:nvGraphicFramePr>
-        <p:xfrm>
-          <a:off x="548640" y="1508760"/>
-          <a:ext cx="8046720" cy="2282504"/>
-        </p:xfrm>
-        <a:graphic>
-          <a:graphicData uri="http://schemas.openxmlformats.org/drawingml/2006/table">
-            <a:tbl>
-              <a:tblPr firstRow="0" bandRow="0"/>
-              <a:tblGrid>
-                <a:gridCol w="731520"/>
-                <a:gridCol w="2468880"/>
-                <a:gridCol w="3657600"/>
-                <a:gridCol w="1188720"/>
-              </a:tblGrid>
-              <a:tr h="326072">
-                <a:tc>
-                  <a:txBody>
-                    <a:bodyPr wrap="square">
-                      <a:noAutofit/>
-                    </a:bodyPr>
-                    <a:lstStyle/>
-                    <a:p>
-                      <a:pPr algn="l">
-                        <a:lnSpc>
-                          <a:spcPts val="1667"/>
-                        </a:lnSpc>
-                        <a:buNone/>
-                        <a:defRPr sz="1450" b="0">
-                          <a:solidFill>
-                            <a:srgbClr val="303437"/>
-                          </a:solidFill>
-                          <a:latin typeface="Noto Sans"/>
-                        </a:defRPr>
-                      </a:pPr>
-                      <a:r>
-                        <a:rPr sz="1450" b="0" lang="ja-JP" altLang="en-US">
-                          <a:solidFill>
-                            <a:srgbClr val="303437"/>
-                          </a:solidFill>
-                          <a:latin typeface="Noto Sans"/>
-                          <a:ea typeface="Noto Sans CJK JP"/>
-                          <a:cs typeface="Noto Sans"/>
-                        </a:rPr>
-                        <a:t>実例</a:t>
-                      </a:r>
-                    </a:p>
-                  </a:txBody>
-                  <a:tcPr marL="63500" marR="63500" marT="38100" marB="38100" anchor="ctr">
-                    <a:lnL w="7620">
-                      <a:noFill/>
-                    </a:lnL>
-                    <a:lnR w="7620">
-                      <a:noFill/>
-                    </a:lnR>
-                    <a:lnT w="15240">
-                      <a:solidFill>
-                        <a:srgbClr val="626669"/>
-                      </a:solidFill>
-                      <a:prstDash val="solid"/>
-                    </a:lnT>
-                    <a:lnB w="7620">
-                      <a:solidFill>
-                        <a:srgbClr val="626669"/>
-                      </a:solidFill>
-                      <a:prstDash val="solid"/>
-                    </a:lnB>
-                    <a:solidFill>
-                      <a:srgbClr val="FFFEF8"/>
-                    </a:solidFill>
-                  </a:tcPr>
-                </a:tc>
-                <a:tc>
-                  <a:txBody>
-                    <a:bodyPr wrap="square">
-                      <a:noAutofit/>
-                    </a:bodyPr>
-                    <a:lstStyle/>
-                    <a:p>
-                      <a:pPr algn="l">
-                        <a:lnSpc>
-                          <a:spcPts val="1667"/>
-                        </a:lnSpc>
-                        <a:buNone/>
-                        <a:defRPr sz="1450" b="0">
-                          <a:solidFill>
-                            <a:srgbClr val="303437"/>
-                          </a:solidFill>
-                          <a:latin typeface="Noto Sans"/>
-                        </a:defRPr>
-                      </a:pPr>
-                      <a:r>
-                        <a:rPr sz="1450" b="0" lang="ja-JP" altLang="en-US">
-                          <a:solidFill>
-                            <a:srgbClr val="303437"/>
-                          </a:solidFill>
-                          <a:latin typeface="Noto Sans"/>
-                          <a:ea typeface="Noto Sans CJK JP"/>
-                          <a:cs typeface="Noto Sans"/>
-                        </a:rPr>
-                        <a:t>ファイル / 行</a:t>
-                      </a:r>
-                    </a:p>
-                  </a:txBody>
-                  <a:tcPr marL="63500" marR="63500" marT="38100" marB="38100" anchor="ctr">
-                    <a:lnL w="7620">
-                      <a:noFill/>
-                    </a:lnL>
-                    <a:lnR w="7620">
-                      <a:noFill/>
-                    </a:lnR>
-                    <a:lnT w="15240">
-                      <a:solidFill>
-                        <a:srgbClr val="626669"/>
-                      </a:solidFill>
-                      <a:prstDash val="solid"/>
-                    </a:lnT>
-                    <a:lnB w="7620">
-                      <a:solidFill>
-                        <a:srgbClr val="626669"/>
-                      </a:solidFill>
-                      <a:prstDash val="solid"/>
-                    </a:lnB>
-                    <a:solidFill>
-                      <a:srgbClr val="FFFEF8"/>
-                    </a:solidFill>
-                  </a:tcPr>
-                </a:tc>
-                <a:tc>
-                  <a:txBody>
-                    <a:bodyPr wrap="square">
-                      <a:noAutofit/>
-                    </a:bodyPr>
-                    <a:lstStyle/>
-                    <a:p>
-                      <a:pPr algn="l">
-                        <a:lnSpc>
-                          <a:spcPts val="1667"/>
-                        </a:lnSpc>
-                        <a:buNone/>
-                        <a:defRPr sz="1450" b="0">
-                          <a:solidFill>
-                            <a:srgbClr val="303437"/>
-                          </a:solidFill>
-                          <a:latin typeface="Noto Sans"/>
-                        </a:defRPr>
-                      </a:pPr>
-                      <a:r>
-                        <a:rPr sz="1450" b="0" lang="ja-JP" altLang="en-US">
-                          <a:solidFill>
-                            <a:srgbClr val="303437"/>
-                          </a:solidFill>
-                          <a:latin typeface="Noto Sans"/>
-                          <a:ea typeface="Noto Sans CJK JP"/>
-                          <a:cs typeface="Noto Sans"/>
-                        </a:rPr>
-                        <a:t>span1 → span2</a:t>
-                      </a:r>
-                    </a:p>
-                  </a:txBody>
-                  <a:tcPr marL="63500" marR="63500" marT="38100" marB="38100" anchor="ctr">
-                    <a:lnL w="7620">
-                      <a:noFill/>
-                    </a:lnL>
-                    <a:lnR w="7620">
-                      <a:noFill/>
-                    </a:lnR>
-                    <a:lnT w="15240">
-                      <a:solidFill>
-                        <a:srgbClr val="626669"/>
-                      </a:solidFill>
-                      <a:prstDash val="solid"/>
-                    </a:lnT>
-                    <a:lnB w="7620">
-                      <a:solidFill>
-                        <a:srgbClr val="626669"/>
-                      </a:solidFill>
-                      <a:prstDash val="solid"/>
-                    </a:lnB>
-                    <a:solidFill>
-                      <a:srgbClr val="FFFEF8"/>
-                    </a:solidFill>
-                  </a:tcPr>
-                </a:tc>
-                <a:tc>
-                  <a:txBody>
-                    <a:bodyPr wrap="square">
-                      <a:noAutofit/>
-                    </a:bodyPr>
-                    <a:lstStyle/>
-                    <a:p>
-                      <a:pPr algn="l">
-                        <a:lnSpc>
-                          <a:spcPts val="1667"/>
-                        </a:lnSpc>
-                        <a:buNone/>
-                        <a:defRPr sz="1450" b="0">
-                          <a:solidFill>
-                            <a:srgbClr val="303437"/>
-                          </a:solidFill>
-                          <a:latin typeface="Noto Sans"/>
-                        </a:defRPr>
-                      </a:pPr>
-                      <a:r>
-                        <a:rPr sz="1450" b="0" lang="ja-JP" altLang="en-US">
-                          <a:solidFill>
-                            <a:srgbClr val="303437"/>
-                          </a:solidFill>
-                          <a:latin typeface="Noto Sans"/>
-                          <a:ea typeface="Noto Sans CJK JP"/>
-                          <a:cs typeface="Noto Sans"/>
-                        </a:rPr>
-                        <a:t>正解</a:t>
-                      </a:r>
-                    </a:p>
-                  </a:txBody>
-                  <a:tcPr marL="63500" marR="63500" marT="38100" marB="38100" anchor="ctr">
-                    <a:lnL w="7620">
-                      <a:noFill/>
-                    </a:lnL>
-                    <a:lnR w="7620">
-                      <a:noFill/>
-                    </a:lnR>
-                    <a:lnT w="15240">
-                      <a:solidFill>
-                        <a:srgbClr val="626669"/>
-                      </a:solidFill>
-                      <a:prstDash val="solid"/>
-                    </a:lnT>
-                    <a:lnB w="7620">
-                      <a:solidFill>
-                        <a:srgbClr val="626669"/>
-                      </a:solidFill>
-                      <a:prstDash val="solid"/>
-                    </a:lnB>
-                    <a:solidFill>
-                      <a:srgbClr val="FFFEF8"/>
-                    </a:solidFill>
-                  </a:tcPr>
-                </a:tc>
-              </a:tr>
-              <a:tr h="326072">
-                <a:tc>
-                  <a:txBody>
-                    <a:bodyPr wrap="square">
-                      <a:noAutofit/>
-                    </a:bodyPr>
-                    <a:lstStyle/>
-                    <a:p>
-                      <a:pPr algn="l">
-                        <a:lnSpc>
-                          <a:spcPts val="1667"/>
-                        </a:lnSpc>
-                        <a:buNone/>
-                        <a:defRPr sz="1450" b="0">
-                          <a:solidFill>
-                            <a:srgbClr val="303437"/>
-                          </a:solidFill>
-                          <a:latin typeface="Noto Sans"/>
-                        </a:defRPr>
-                      </a:pPr>
-                      <a:r>
-                        <a:rPr sz="1450" b="0" lang="ja-JP" altLang="en-US">
-                          <a:solidFill>
-                            <a:srgbClr val="303437"/>
-                          </a:solidFill>
-                          <a:latin typeface="Noto Sans"/>
-                          <a:ea typeface="Noto Sans CJK JP"/>
-                          <a:cs typeface="Noto Sans"/>
-                        </a:rPr>
-                        <a:t>8</a:t>
-                      </a:r>
-                    </a:p>
-                  </a:txBody>
-                  <a:tcPr marL="63500" marR="63500" marT="38100" marB="38100" anchor="ctr">
-                    <a:lnL w="7620">
-                      <a:noFill/>
-                    </a:lnL>
-                    <a:lnR w="7620">
-                      <a:noFill/>
-                    </a:lnR>
-                    <a:lnT w="7620">
-                      <a:solidFill>
-                        <a:srgbClr val="626669"/>
-                      </a:solidFill>
-                      <a:prstDash val="solid"/>
-                    </a:lnT>
-                    <a:lnB w="7620">
-                      <a:noFill/>
-                    </a:lnB>
-                    <a:solidFill>
-                      <a:srgbClr val="FFFEF8"/>
-                    </a:solidFill>
-                  </a:tcPr>
-                </a:tc>
-                <a:tc>
-                  <a:txBody>
-                    <a:bodyPr wrap="square">
-                      <a:noAutofit/>
-                    </a:bodyPr>
-                    <a:lstStyle/>
-                    <a:p>
-                      <a:pPr algn="l">
-                        <a:lnSpc>
-                          <a:spcPts val="1667"/>
-                        </a:lnSpc>
-                        <a:buNone/>
-                        <a:defRPr sz="1450" b="0">
-                          <a:solidFill>
-                            <a:srgbClr val="303437"/>
-                          </a:solidFill>
-                          <a:latin typeface="Noto Sans"/>
-                        </a:defRPr>
-                      </a:pPr>
-                      <a:r>
-                        <a:rPr sz="1450" b="0" lang="ja-JP" altLang="en-US">
-                          <a:solidFill>
-                            <a:srgbClr val="303437"/>
-                          </a:solidFill>
-                          <a:latin typeface="Noto Sans"/>
-                          <a:ea typeface="Noto Sans CJK JP"/>
-                          <a:cs typeface="Noto Sans"/>
-                        </a:rPr>
-                        <a:t>dev.json / 37</a:t>
-                      </a:r>
-                    </a:p>
-                  </a:txBody>
-                  <a:tcPr marL="63500" marR="63500" marT="38100" marB="38100" anchor="ctr">
-                    <a:lnL w="7620">
-                      <a:noFill/>
-                    </a:lnL>
-                    <a:lnR w="7620">
-                      <a:noFill/>
-                    </a:lnR>
-                    <a:lnT w="7620">
-                      <a:solidFill>
-                        <a:srgbClr val="626669"/>
-                      </a:solidFill>
-                      <a:prstDash val="solid"/>
-                    </a:lnT>
-                    <a:lnB w="7620">
-                      <a:noFill/>
-                    </a:lnB>
-                    <a:solidFill>
-                      <a:srgbClr val="FFFEF8"/>
-                    </a:solidFill>
-                  </a:tcPr>
-                </a:tc>
-                <a:tc>
-                  <a:txBody>
-                    <a:bodyPr wrap="square">
-                      <a:noAutofit/>
-                    </a:bodyPr>
-                    <a:lstStyle/>
-                    <a:p>
-                      <a:pPr algn="l">
-                        <a:lnSpc>
-                          <a:spcPts val="1667"/>
-                        </a:lnSpc>
-                        <a:buNone/>
-                        <a:defRPr sz="1450" b="0">
-                          <a:solidFill>
-                            <a:srgbClr val="303437"/>
-                          </a:solidFill>
-                          <a:latin typeface="Noto Sans"/>
-                        </a:defRPr>
-                      </a:pPr>
-                      <a:r>
-                        <a:rPr sz="1450" b="0" lang="ja-JP" altLang="en-US">
-                          <a:solidFill>
-                            <a:srgbClr val="303437"/>
-                          </a:solidFill>
-                          <a:latin typeface="Noto Sans"/>
-                          <a:ea typeface="Noto Sans CJK JP"/>
-                          <a:cs typeface="Noto Sans"/>
-                        </a:rPr>
-                        <a:t>药 → 它</a:t>
-                      </a:r>
-                    </a:p>
-                  </a:txBody>
-                  <a:tcPr marL="63500" marR="63500" marT="38100" marB="38100" anchor="ctr">
-                    <a:lnL w="7620">
-                      <a:noFill/>
-                    </a:lnL>
-                    <a:lnR w="7620">
-                      <a:noFill/>
-                    </a:lnR>
-                    <a:lnT w="7620">
-                      <a:solidFill>
-                        <a:srgbClr val="626669"/>
-                      </a:solidFill>
-                      <a:prstDash val="solid"/>
-                    </a:lnT>
-                    <a:lnB w="7620">
-                      <a:noFill/>
-                    </a:lnB>
-                    <a:solidFill>
-                      <a:srgbClr val="FFFEF8"/>
-                    </a:solidFill>
-                  </a:tcPr>
-                </a:tc>
-                <a:tc>
-                  <a:txBody>
-                    <a:bodyPr wrap="square">
-                      <a:noAutofit/>
-                    </a:bodyPr>
-                    <a:lstStyle/>
-                    <a:p>
-                      <a:pPr algn="l">
-                        <a:lnSpc>
-                          <a:spcPts val="1667"/>
-                        </a:lnSpc>
-                        <a:buNone/>
-                        <a:defRPr sz="1450" b="0">
-                          <a:solidFill>
-                            <a:srgbClr val="303437"/>
-                          </a:solidFill>
-                          <a:latin typeface="Noto Sans"/>
-                        </a:defRPr>
-                      </a:pPr>
-                      <a:r>
-                        <a:rPr sz="1450" b="0" lang="ja-JP" altLang="en-US">
-                          <a:solidFill>
-                            <a:srgbClr val="303437"/>
-                          </a:solidFill>
-                          <a:latin typeface="Noto Sans"/>
-                          <a:ea typeface="Noto Sans CJK JP"/>
-                          <a:cs typeface="Noto Sans"/>
-                        </a:rPr>
-                        <a:t>false</a:t>
-                      </a:r>
-                    </a:p>
-                  </a:txBody>
-                  <a:tcPr marL="63500" marR="63500" marT="38100" marB="38100" anchor="ctr">
-                    <a:lnL w="7620">
-                      <a:noFill/>
-                    </a:lnL>
-                    <a:lnR w="7620">
-                      <a:noFill/>
-                    </a:lnR>
-                    <a:lnT w="7620">
-                      <a:solidFill>
-                        <a:srgbClr val="626669"/>
-                      </a:solidFill>
-                      <a:prstDash val="solid"/>
-                    </a:lnT>
-                    <a:lnB w="7620">
-                      <a:noFill/>
-                    </a:lnB>
-                    <a:solidFill>
-                      <a:srgbClr val="FFFEF8"/>
-                    </a:solidFill>
-                  </a:tcPr>
-                </a:tc>
-              </a:tr>
-              <a:tr h="326072">
-                <a:tc>
-                  <a:txBody>
-                    <a:bodyPr wrap="square">
-                      <a:noAutofit/>
-                    </a:bodyPr>
-                    <a:lstStyle/>
-                    <a:p>
-                      <a:pPr algn="l">
-                        <a:lnSpc>
-                          <a:spcPts val="1667"/>
-                        </a:lnSpc>
-                        <a:buNone/>
-                        <a:defRPr sz="1450" b="0">
-                          <a:solidFill>
-                            <a:srgbClr val="303437"/>
-                          </a:solidFill>
-                          <a:latin typeface="Noto Sans"/>
-                        </a:defRPr>
-                      </a:pPr>
-                      <a:r>
-                        <a:rPr sz="1450" b="0" lang="ja-JP" altLang="en-US">
-                          <a:solidFill>
-                            <a:srgbClr val="303437"/>
-                          </a:solidFill>
-                          <a:latin typeface="Noto Sans"/>
-                          <a:ea typeface="Noto Sans CJK JP"/>
-                          <a:cs typeface="Noto Sans"/>
-                        </a:rPr>
-                        <a:t>9</a:t>
-                      </a:r>
-                    </a:p>
-                  </a:txBody>
-                  <a:tcPr marL="63500" marR="63500" marT="38100" marB="38100" anchor="ctr">
-                    <a:lnL w="7620">
-                      <a:noFill/>
-                    </a:lnL>
-                    <a:lnR w="7620">
-                      <a:noFill/>
-                    </a:lnR>
-                    <a:lnT w="7620">
-                      <a:noFill/>
-                    </a:lnT>
-                    <a:lnB w="7620">
-                      <a:noFill/>
-                    </a:lnB>
-                    <a:solidFill>
-                      <a:srgbClr val="FFFEF8"/>
-                    </a:solidFill>
-                  </a:tcPr>
-                </a:tc>
-                <a:tc>
-                  <a:txBody>
-                    <a:bodyPr wrap="square">
-                      <a:noAutofit/>
-                    </a:bodyPr>
-                    <a:lstStyle/>
-                    <a:p>
-                      <a:pPr algn="l">
-                        <a:lnSpc>
-                          <a:spcPts val="1667"/>
-                        </a:lnSpc>
-                        <a:buNone/>
-                        <a:defRPr sz="1450" b="0">
-                          <a:solidFill>
-                            <a:srgbClr val="303437"/>
-                          </a:solidFill>
-                          <a:latin typeface="Noto Sans"/>
-                        </a:defRPr>
-                      </a:pPr>
-                      <a:r>
-                        <a:rPr sz="1450" b="0" lang="ja-JP" altLang="en-US">
-                          <a:solidFill>
-                            <a:srgbClr val="303437"/>
-                          </a:solidFill>
-                          <a:latin typeface="Noto Sans"/>
-                          <a:ea typeface="Noto Sans CJK JP"/>
-                          <a:cs typeface="Noto Sans"/>
-                        </a:rPr>
-                        <a:t>dev.json / 40</a:t>
-                      </a:r>
-                    </a:p>
-                  </a:txBody>
-                  <a:tcPr marL="63500" marR="63500" marT="38100" marB="38100" anchor="ctr">
-                    <a:lnL w="7620">
-                      <a:noFill/>
-                    </a:lnL>
-                    <a:lnR w="7620">
-                      <a:noFill/>
-                    </a:lnR>
-                    <a:lnT w="7620">
-                      <a:noFill/>
-                    </a:lnT>
-                    <a:lnB w="7620">
-                      <a:noFill/>
-                    </a:lnB>
-                    <a:solidFill>
-                      <a:srgbClr val="FFFEF8"/>
-                    </a:solidFill>
-                  </a:tcPr>
-                </a:tc>
-                <a:tc>
-                  <a:txBody>
-                    <a:bodyPr wrap="square">
-                      <a:noAutofit/>
-                    </a:bodyPr>
-                    <a:lstStyle/>
-                    <a:p>
-                      <a:pPr algn="l">
-                        <a:lnSpc>
-                          <a:spcPts val="1667"/>
-                        </a:lnSpc>
-                        <a:buNone/>
-                        <a:defRPr sz="1450" b="0">
-                          <a:solidFill>
-                            <a:srgbClr val="303437"/>
-                          </a:solidFill>
-                          <a:latin typeface="Noto Sans"/>
-                        </a:defRPr>
-                      </a:pPr>
-                      <a:r>
-                        <a:rPr sz="1450" b="0" lang="ja-JP" altLang="en-US">
-                          <a:solidFill>
-                            <a:srgbClr val="303437"/>
-                          </a:solidFill>
-                          <a:latin typeface="Noto Sans"/>
-                          <a:ea typeface="Noto Sans CJK JP"/>
-                          <a:cs typeface="Noto Sans"/>
-                        </a:rPr>
-                        <a:t>贺凤英 → 她们</a:t>
-                      </a:r>
-                    </a:p>
-                  </a:txBody>
-                  <a:tcPr marL="63500" marR="63500" marT="38100" marB="38100" anchor="ctr">
-                    <a:lnL w="7620">
-                      <a:noFill/>
-                    </a:lnL>
-                    <a:lnR w="7620">
-                      <a:noFill/>
-                    </a:lnR>
-                    <a:lnT w="7620">
-                      <a:noFill/>
-                    </a:lnT>
-                    <a:lnB w="7620">
-                      <a:noFill/>
-                    </a:lnB>
-                    <a:solidFill>
-                      <a:srgbClr val="FFFEF8"/>
-                    </a:solidFill>
-                  </a:tcPr>
-                </a:tc>
-                <a:tc>
-                  <a:txBody>
-                    <a:bodyPr wrap="square">
-                      <a:noAutofit/>
-                    </a:bodyPr>
-                    <a:lstStyle/>
-                    <a:p>
-                      <a:pPr algn="l">
-                        <a:lnSpc>
-                          <a:spcPts val="1667"/>
-                        </a:lnSpc>
-                        <a:buNone/>
-                        <a:defRPr sz="1450" b="0">
-                          <a:solidFill>
-                            <a:srgbClr val="303437"/>
-                          </a:solidFill>
-                          <a:latin typeface="Noto Sans"/>
-                        </a:defRPr>
-                      </a:pPr>
-                      <a:r>
-                        <a:rPr sz="1450" b="0" lang="ja-JP" altLang="en-US">
-                          <a:solidFill>
-                            <a:srgbClr val="303437"/>
-                          </a:solidFill>
-                          <a:latin typeface="Noto Sans"/>
-                          <a:ea typeface="Noto Sans CJK JP"/>
-                          <a:cs typeface="Noto Sans"/>
-                        </a:rPr>
-                        <a:t>false</a:t>
-                      </a:r>
-                    </a:p>
-                  </a:txBody>
-                  <a:tcPr marL="63500" marR="63500" marT="38100" marB="38100" anchor="ctr">
-                    <a:lnL w="7620">
-                      <a:noFill/>
-                    </a:lnL>
-                    <a:lnR w="7620">
-                      <a:noFill/>
-                    </a:lnR>
-                    <a:lnT w="7620">
-                      <a:noFill/>
-                    </a:lnT>
-                    <a:lnB w="7620">
-                      <a:noFill/>
-                    </a:lnB>
-                    <a:solidFill>
-                      <a:srgbClr val="FFFEF8"/>
-                    </a:solidFill>
-                  </a:tcPr>
-                </a:tc>
-              </a:tr>
-              <a:tr h="326072">
-                <a:tc>
-                  <a:txBody>
-                    <a:bodyPr wrap="square">
-                      <a:noAutofit/>
-                    </a:bodyPr>
-                    <a:lstStyle/>
-                    <a:p>
-                      <a:pPr algn="l">
-                        <a:lnSpc>
-                          <a:spcPts val="1667"/>
-                        </a:lnSpc>
-                        <a:buNone/>
-                        <a:defRPr sz="1450" b="0">
-                          <a:solidFill>
-                            <a:srgbClr val="303437"/>
-                          </a:solidFill>
-                          <a:latin typeface="Noto Sans"/>
-                        </a:defRPr>
-                      </a:pPr>
-                      <a:r>
-                        <a:rPr sz="1450" b="0" lang="ja-JP" altLang="en-US">
-                          <a:solidFill>
-                            <a:srgbClr val="303437"/>
-                          </a:solidFill>
-                          <a:latin typeface="Noto Sans"/>
-                          <a:ea typeface="Noto Sans CJK JP"/>
-                          <a:cs typeface="Noto Sans"/>
-                        </a:rPr>
-                        <a:t>10</a:t>
-                      </a:r>
-                    </a:p>
-                  </a:txBody>
-                  <a:tcPr marL="63500" marR="63500" marT="38100" marB="38100" anchor="ctr">
-                    <a:lnL w="7620">
-                      <a:noFill/>
-                    </a:lnL>
-                    <a:lnR w="7620">
-                      <a:noFill/>
-                    </a:lnR>
-                    <a:lnT w="7620">
-                      <a:noFill/>
-                    </a:lnT>
-                    <a:lnB w="7620">
-                      <a:noFill/>
-                    </a:lnB>
-                    <a:solidFill>
-                      <a:srgbClr val="FFFEF8"/>
-                    </a:solidFill>
-                  </a:tcPr>
-                </a:tc>
-                <a:tc>
-                  <a:txBody>
-                    <a:bodyPr wrap="square">
-                      <a:noAutofit/>
-                    </a:bodyPr>
-                    <a:lstStyle/>
-                    <a:p>
-                      <a:pPr algn="l">
-                        <a:lnSpc>
-                          <a:spcPts val="1667"/>
-                        </a:lnSpc>
-                        <a:buNone/>
-                        <a:defRPr sz="1450" b="0">
-                          <a:solidFill>
-                            <a:srgbClr val="303437"/>
-                          </a:solidFill>
-                          <a:latin typeface="Noto Sans"/>
-                        </a:defRPr>
-                      </a:pPr>
-                      <a:r>
-                        <a:rPr sz="1450" b="0" lang="ja-JP" altLang="en-US">
-                          <a:solidFill>
-                            <a:srgbClr val="303437"/>
-                          </a:solidFill>
-                          <a:latin typeface="Noto Sans"/>
-                          <a:ea typeface="Noto Sans CJK JP"/>
-                          <a:cs typeface="Noto Sans"/>
-                        </a:rPr>
-                        <a:t>dev.json / 44</a:t>
-                      </a:r>
-                    </a:p>
-                  </a:txBody>
-                  <a:tcPr marL="63500" marR="63500" marT="38100" marB="38100" anchor="ctr">
-                    <a:lnL w="7620">
-                      <a:noFill/>
-                    </a:lnL>
-                    <a:lnR w="7620">
-                      <a:noFill/>
-                    </a:lnR>
-                    <a:lnT w="7620">
-                      <a:noFill/>
-                    </a:lnT>
-                    <a:lnB w="7620">
-                      <a:noFill/>
-                    </a:lnB>
-                    <a:solidFill>
-                      <a:srgbClr val="FFFEF8"/>
-                    </a:solidFill>
-                  </a:tcPr>
-                </a:tc>
-                <a:tc>
-                  <a:txBody>
-                    <a:bodyPr wrap="square">
-                      <a:noAutofit/>
-                    </a:bodyPr>
-                    <a:lstStyle/>
-                    <a:p>
-                      <a:pPr algn="l">
-                        <a:lnSpc>
-                          <a:spcPts val="1667"/>
-                        </a:lnSpc>
-                        <a:buNone/>
-                        <a:defRPr sz="1450" b="0">
-                          <a:solidFill>
-                            <a:srgbClr val="303437"/>
-                          </a:solidFill>
-                          <a:latin typeface="Noto Sans"/>
-                        </a:defRPr>
-                      </a:pPr>
-                      <a:r>
-                        <a:rPr sz="1450" b="0" lang="ja-JP" altLang="en-US">
-                          <a:solidFill>
-                            <a:srgbClr val="303437"/>
-                          </a:solidFill>
-                          <a:latin typeface="Noto Sans"/>
-                          <a:ea typeface="Noto Sans CJK JP"/>
-                          <a:cs typeface="Noto Sans"/>
-                        </a:rPr>
-                        <a:t>少平和兰香 → 他们</a:t>
-                      </a:r>
-                    </a:p>
-                  </a:txBody>
-                  <a:tcPr marL="63500" marR="63500" marT="38100" marB="38100" anchor="ctr">
-                    <a:lnL w="7620">
-                      <a:noFill/>
-                    </a:lnL>
-                    <a:lnR w="7620">
-                      <a:noFill/>
-                    </a:lnR>
-                    <a:lnT w="7620">
-                      <a:noFill/>
-                    </a:lnT>
-                    <a:lnB w="7620">
-                      <a:noFill/>
-                    </a:lnB>
-                    <a:solidFill>
-                      <a:srgbClr val="FFFEF8"/>
-                    </a:solidFill>
-                  </a:tcPr>
-                </a:tc>
-                <a:tc>
-                  <a:txBody>
-                    <a:bodyPr wrap="square">
-                      <a:noAutofit/>
-                    </a:bodyPr>
-                    <a:lstStyle/>
-                    <a:p>
-                      <a:pPr algn="l">
-                        <a:lnSpc>
-                          <a:spcPts val="1667"/>
-                        </a:lnSpc>
-                        <a:buNone/>
-                        <a:defRPr sz="1450" b="0">
-                          <a:solidFill>
-                            <a:srgbClr val="303437"/>
-                          </a:solidFill>
-                          <a:latin typeface="Noto Sans"/>
-                        </a:defRPr>
-                      </a:pPr>
-                      <a:r>
-                        <a:rPr sz="1450" b="0" lang="ja-JP" altLang="en-US">
-                          <a:solidFill>
-                            <a:srgbClr val="303437"/>
-                          </a:solidFill>
-                          <a:latin typeface="Noto Sans"/>
-                          <a:ea typeface="Noto Sans CJK JP"/>
-                          <a:cs typeface="Noto Sans"/>
-                        </a:rPr>
-                        <a:t>true</a:t>
-                      </a:r>
-                    </a:p>
-                  </a:txBody>
-                  <a:tcPr marL="63500" marR="63500" marT="38100" marB="38100" anchor="ctr">
-                    <a:lnL w="7620">
-                      <a:noFill/>
-                    </a:lnL>
-                    <a:lnR w="7620">
-                      <a:noFill/>
-                    </a:lnR>
-                    <a:lnT w="7620">
-                      <a:noFill/>
-                    </a:lnT>
-                    <a:lnB w="7620">
-                      <a:noFill/>
-                    </a:lnB>
-                    <a:solidFill>
-                      <a:srgbClr val="FFFEF8"/>
-                    </a:solidFill>
-                  </a:tcPr>
-                </a:tc>
-              </a:tr>
-              <a:tr h="326072">
-                <a:tc>
-                  <a:txBody>
-                    <a:bodyPr wrap="square">
-                      <a:noAutofit/>
-                    </a:bodyPr>
-                    <a:lstStyle/>
-                    <a:p>
-                      <a:pPr algn="l">
-                        <a:lnSpc>
-                          <a:spcPts val="1667"/>
-                        </a:lnSpc>
-                        <a:buNone/>
-                        <a:defRPr sz="1450" b="0">
-                          <a:solidFill>
-                            <a:srgbClr val="303437"/>
-                          </a:solidFill>
-                          <a:latin typeface="Noto Sans"/>
-                        </a:defRPr>
-                      </a:pPr>
-                      <a:r>
-                        <a:rPr sz="1450" b="0" lang="ja-JP" altLang="en-US">
-                          <a:solidFill>
-                            <a:srgbClr val="303437"/>
-                          </a:solidFill>
-                          <a:latin typeface="Noto Sans"/>
-                          <a:ea typeface="Noto Sans CJK JP"/>
-                          <a:cs typeface="Noto Sans"/>
-                        </a:rPr>
-                        <a:t>11</a:t>
-                      </a:r>
-                    </a:p>
-                  </a:txBody>
-                  <a:tcPr marL="63500" marR="63500" marT="38100" marB="38100" anchor="ctr">
-                    <a:lnL w="7620">
-                      <a:noFill/>
-                    </a:lnL>
-                    <a:lnR w="7620">
-                      <a:noFill/>
-                    </a:lnR>
-                    <a:lnT w="7620">
-                      <a:noFill/>
-                    </a:lnT>
-                    <a:lnB w="7620">
-                      <a:noFill/>
-                    </a:lnB>
-                    <a:solidFill>
-                      <a:srgbClr val="FFFEF8"/>
-                    </a:solidFill>
-                  </a:tcPr>
-                </a:tc>
-                <a:tc>
-                  <a:txBody>
-                    <a:bodyPr wrap="square">
-                      <a:noAutofit/>
-                    </a:bodyPr>
-                    <a:lstStyle/>
-                    <a:p>
-                      <a:pPr algn="l">
-                        <a:lnSpc>
-                          <a:spcPts val="1667"/>
-                        </a:lnSpc>
-                        <a:buNone/>
-                        <a:defRPr sz="1450" b="0">
-                          <a:solidFill>
-                            <a:srgbClr val="303437"/>
-                          </a:solidFill>
-                          <a:latin typeface="Noto Sans"/>
-                        </a:defRPr>
-                      </a:pPr>
-                      <a:r>
-                        <a:rPr sz="1450" b="0" lang="ja-JP" altLang="en-US">
-                          <a:solidFill>
-                            <a:srgbClr val="303437"/>
-                          </a:solidFill>
-                          <a:latin typeface="Noto Sans"/>
-                          <a:ea typeface="Noto Sans CJK JP"/>
-                          <a:cs typeface="Noto Sans"/>
-                        </a:rPr>
-                        <a:t>dev.json / 61</a:t>
-                      </a:r>
-                    </a:p>
-                  </a:txBody>
-                  <a:tcPr marL="63500" marR="63500" marT="38100" marB="38100" anchor="ctr">
-                    <a:lnL w="7620">
-                      <a:noFill/>
-                    </a:lnL>
-                    <a:lnR w="7620">
-                      <a:noFill/>
-                    </a:lnR>
-                    <a:lnT w="7620">
-                      <a:noFill/>
-                    </a:lnT>
-                    <a:lnB w="7620">
-                      <a:noFill/>
-                    </a:lnB>
-                    <a:solidFill>
-                      <a:srgbClr val="FFFEF8"/>
-                    </a:solidFill>
-                  </a:tcPr>
-                </a:tc>
-                <a:tc>
-                  <a:txBody>
-                    <a:bodyPr wrap="square">
-                      <a:noAutofit/>
-                    </a:bodyPr>
-                    <a:lstStyle/>
-                    <a:p>
-                      <a:pPr algn="l">
-                        <a:lnSpc>
-                          <a:spcPts val="1667"/>
-                        </a:lnSpc>
-                        <a:buNone/>
-                        <a:defRPr sz="1450" b="0">
-                          <a:solidFill>
-                            <a:srgbClr val="303437"/>
-                          </a:solidFill>
-                          <a:latin typeface="Noto Sans"/>
-                        </a:defRPr>
-                      </a:pPr>
-                      <a:r>
-                        <a:rPr sz="1450" b="0" lang="ja-JP" altLang="en-US">
-                          <a:solidFill>
-                            <a:srgbClr val="303437"/>
-                          </a:solidFill>
-                          <a:latin typeface="Noto Sans"/>
-                          <a:ea typeface="Noto Sans CJK JP"/>
-                          <a:cs typeface="Noto Sans"/>
-                        </a:rPr>
-                        <a:t>态度 → 它</a:t>
-                      </a:r>
-                    </a:p>
-                  </a:txBody>
-                  <a:tcPr marL="63500" marR="63500" marT="38100" marB="38100" anchor="ctr">
-                    <a:lnL w="7620">
-                      <a:noFill/>
-                    </a:lnL>
-                    <a:lnR w="7620">
-                      <a:noFill/>
-                    </a:lnR>
-                    <a:lnT w="7620">
-                      <a:noFill/>
-                    </a:lnT>
-                    <a:lnB w="7620">
-                      <a:noFill/>
-                    </a:lnB>
-                    <a:solidFill>
-                      <a:srgbClr val="FFFEF8"/>
-                    </a:solidFill>
-                  </a:tcPr>
-                </a:tc>
-                <a:tc>
-                  <a:txBody>
-                    <a:bodyPr wrap="square">
-                      <a:noAutofit/>
-                    </a:bodyPr>
-                    <a:lstStyle/>
-                    <a:p>
-                      <a:pPr algn="l">
-                        <a:lnSpc>
-                          <a:spcPts val="1667"/>
-                        </a:lnSpc>
-                        <a:buNone/>
-                        <a:defRPr sz="1450" b="0">
-                          <a:solidFill>
-                            <a:srgbClr val="303437"/>
-                          </a:solidFill>
-                          <a:latin typeface="Noto Sans"/>
-                        </a:defRPr>
-                      </a:pPr>
-                      <a:r>
-                        <a:rPr sz="1450" b="0" lang="ja-JP" altLang="en-US">
-                          <a:solidFill>
-                            <a:srgbClr val="303437"/>
-                          </a:solidFill>
-                          <a:latin typeface="Noto Sans"/>
-                          <a:ea typeface="Noto Sans CJK JP"/>
-                          <a:cs typeface="Noto Sans"/>
-                        </a:rPr>
-                        <a:t>false</a:t>
-                      </a:r>
-                    </a:p>
-                  </a:txBody>
-                  <a:tcPr marL="63500" marR="63500" marT="38100" marB="38100" anchor="ctr">
-                    <a:lnL w="7620">
-                      <a:noFill/>
-                    </a:lnL>
-                    <a:lnR w="7620">
-                      <a:noFill/>
-                    </a:lnR>
-                    <a:lnT w="7620">
-                      <a:noFill/>
-                    </a:lnT>
-                    <a:lnB w="7620">
-                      <a:noFill/>
-                    </a:lnB>
-                    <a:solidFill>
-                      <a:srgbClr val="FFFEF8"/>
-                    </a:solidFill>
-                  </a:tcPr>
-                </a:tc>
-              </a:tr>
-              <a:tr h="326072">
-                <a:tc>
-                  <a:txBody>
-                    <a:bodyPr wrap="square">
-                      <a:noAutofit/>
-                    </a:bodyPr>
-                    <a:lstStyle/>
-                    <a:p>
-                      <a:pPr algn="l">
-                        <a:lnSpc>
-                          <a:spcPts val="1667"/>
-                        </a:lnSpc>
-                        <a:buNone/>
-                        <a:defRPr sz="1450" b="0">
-                          <a:solidFill>
-                            <a:srgbClr val="303437"/>
-                          </a:solidFill>
-                          <a:latin typeface="Noto Sans"/>
-                        </a:defRPr>
-                      </a:pPr>
-                      <a:r>
-                        <a:rPr sz="1450" b="0" lang="ja-JP" altLang="en-US">
-                          <a:solidFill>
-                            <a:srgbClr val="303437"/>
-                          </a:solidFill>
-                          <a:latin typeface="Noto Sans"/>
-                          <a:ea typeface="Noto Sans CJK JP"/>
-                          <a:cs typeface="Noto Sans"/>
-                        </a:rPr>
-                        <a:t>12</a:t>
-                      </a:r>
-                    </a:p>
-                  </a:txBody>
-                  <a:tcPr marL="63500" marR="63500" marT="38100" marB="38100" anchor="ctr">
-                    <a:lnL w="7620">
-                      <a:noFill/>
-                    </a:lnL>
-                    <a:lnR w="7620">
-                      <a:noFill/>
-                    </a:lnR>
-                    <a:lnT w="7620">
-                      <a:noFill/>
-                    </a:lnT>
-                    <a:lnB w="7620">
-                      <a:noFill/>
-                    </a:lnB>
-                    <a:solidFill>
-                      <a:srgbClr val="FFFEF8"/>
-                    </a:solidFill>
-                  </a:tcPr>
-                </a:tc>
-                <a:tc>
-                  <a:txBody>
-                    <a:bodyPr wrap="square">
-                      <a:noAutofit/>
-                    </a:bodyPr>
-                    <a:lstStyle/>
-                    <a:p>
-                      <a:pPr algn="l">
-                        <a:lnSpc>
-                          <a:spcPts val="1667"/>
-                        </a:lnSpc>
-                        <a:buNone/>
-                        <a:defRPr sz="1450" b="0">
-                          <a:solidFill>
-                            <a:srgbClr val="303437"/>
-                          </a:solidFill>
-                          <a:latin typeface="Noto Sans"/>
-                        </a:defRPr>
-                      </a:pPr>
-                      <a:r>
-                        <a:rPr sz="1450" b="0" lang="ja-JP" altLang="en-US">
-                          <a:solidFill>
-                            <a:srgbClr val="303437"/>
-                          </a:solidFill>
-                          <a:latin typeface="Noto Sans"/>
-                          <a:ea typeface="Noto Sans CJK JP"/>
-                          <a:cs typeface="Noto Sans"/>
-                        </a:rPr>
-                        <a:t>dev.json / 81</a:t>
-                      </a:r>
-                    </a:p>
-                  </a:txBody>
-                  <a:tcPr marL="63500" marR="63500" marT="38100" marB="38100" anchor="ctr">
-                    <a:lnL w="7620">
-                      <a:noFill/>
-                    </a:lnL>
-                    <a:lnR w="7620">
-                      <a:noFill/>
-                    </a:lnR>
-                    <a:lnT w="7620">
-                      <a:noFill/>
-                    </a:lnT>
-                    <a:lnB w="7620">
-                      <a:noFill/>
-                    </a:lnB>
-                    <a:solidFill>
-                      <a:srgbClr val="FFFEF8"/>
-                    </a:solidFill>
-                  </a:tcPr>
-                </a:tc>
-                <a:tc>
-                  <a:txBody>
-                    <a:bodyPr wrap="square">
-                      <a:noAutofit/>
-                    </a:bodyPr>
-                    <a:lstStyle/>
-                    <a:p>
-                      <a:pPr algn="l">
-                        <a:lnSpc>
-                          <a:spcPts val="1667"/>
-                        </a:lnSpc>
-                        <a:buNone/>
-                        <a:defRPr sz="1450" b="0">
-                          <a:solidFill>
-                            <a:srgbClr val="303437"/>
-                          </a:solidFill>
-                          <a:latin typeface="Noto Sans"/>
-                        </a:defRPr>
-                      </a:pPr>
-                      <a:r>
-                        <a:rPr sz="1450" b="0" lang="ja-JP" altLang="en-US">
-                          <a:solidFill>
-                            <a:srgbClr val="303437"/>
-                          </a:solidFill>
-                          <a:latin typeface="Noto Sans"/>
-                          <a:ea typeface="Noto Sans CJK JP"/>
-                          <a:cs typeface="Noto Sans"/>
-                        </a:rPr>
-                        <a:t>老张一家 → 他们</a:t>
-                      </a:r>
-                    </a:p>
-                  </a:txBody>
-                  <a:tcPr marL="63500" marR="63500" marT="38100" marB="38100" anchor="ctr">
-                    <a:lnL w="7620">
-                      <a:noFill/>
-                    </a:lnL>
-                    <a:lnR w="7620">
-                      <a:noFill/>
-                    </a:lnR>
-                    <a:lnT w="7620">
-                      <a:noFill/>
-                    </a:lnT>
-                    <a:lnB w="7620">
-                      <a:noFill/>
-                    </a:lnB>
-                    <a:solidFill>
-                      <a:srgbClr val="FFFEF8"/>
-                    </a:solidFill>
-                  </a:tcPr>
-                </a:tc>
-                <a:tc>
-                  <a:txBody>
-                    <a:bodyPr wrap="square">
-                      <a:noAutofit/>
-                    </a:bodyPr>
-                    <a:lstStyle/>
-                    <a:p>
-                      <a:pPr algn="l">
-                        <a:lnSpc>
-                          <a:spcPts val="1667"/>
-                        </a:lnSpc>
-                        <a:buNone/>
-                        <a:defRPr sz="1450" b="0">
-                          <a:solidFill>
-                            <a:srgbClr val="303437"/>
-                          </a:solidFill>
-                          <a:latin typeface="Noto Sans"/>
-                        </a:defRPr>
-                      </a:pPr>
-                      <a:r>
-                        <a:rPr sz="1450" b="0" lang="ja-JP" altLang="en-US">
-                          <a:solidFill>
-                            <a:srgbClr val="303437"/>
-                          </a:solidFill>
-                          <a:latin typeface="Noto Sans"/>
-                          <a:ea typeface="Noto Sans CJK JP"/>
-                          <a:cs typeface="Noto Sans"/>
-                        </a:rPr>
-                        <a:t>true</a:t>
-                      </a:r>
-                    </a:p>
-                  </a:txBody>
-                  <a:tcPr marL="63500" marR="63500" marT="38100" marB="38100" anchor="ctr">
-                    <a:lnL w="7620">
-                      <a:noFill/>
-                    </a:lnL>
-                    <a:lnR w="7620">
-                      <a:noFill/>
-                    </a:lnR>
-                    <a:lnT w="7620">
-                      <a:noFill/>
-                    </a:lnT>
-                    <a:lnB w="7620">
-                      <a:noFill/>
-                    </a:lnB>
-                    <a:solidFill>
-                      <a:srgbClr val="FFFEF8"/>
-                    </a:solidFill>
-                  </a:tcPr>
-                </a:tc>
-              </a:tr>
-              <a:tr h="326072">
-                <a:tc>
-                  <a:txBody>
-                    <a:bodyPr wrap="square">
-                      <a:noAutofit/>
-                    </a:bodyPr>
-                    <a:lstStyle/>
-                    <a:p>
-                      <a:pPr algn="l">
-                        <a:lnSpc>
-                          <a:spcPts val="1667"/>
-                        </a:lnSpc>
-                        <a:buNone/>
-                        <a:defRPr sz="1450" b="0">
-                          <a:solidFill>
-                            <a:srgbClr val="303437"/>
-                          </a:solidFill>
-                          <a:latin typeface="Noto Sans"/>
-                        </a:defRPr>
-                      </a:pPr>
-                      <a:r>
-                        <a:rPr sz="1450" b="0" lang="ja-JP" altLang="en-US">
-                          <a:solidFill>
-                            <a:srgbClr val="303437"/>
-                          </a:solidFill>
-                          <a:latin typeface="Noto Sans"/>
-                          <a:ea typeface="Noto Sans CJK JP"/>
-                          <a:cs typeface="Noto Sans"/>
-                        </a:rPr>
-                        <a:t>13</a:t>
-                      </a:r>
-                    </a:p>
-                  </a:txBody>
-                  <a:tcPr marL="63500" marR="63500" marT="38100" marB="38100" anchor="ctr">
-                    <a:lnL w="7620">
-                      <a:noFill/>
-                    </a:lnL>
-                    <a:lnR w="7620">
-                      <a:noFill/>
-                    </a:lnR>
-                    <a:lnT w="7620">
-                      <a:noFill/>
-                    </a:lnT>
-                    <a:lnB w="15240">
-                      <a:solidFill>
-                        <a:srgbClr val="626669"/>
-                      </a:solidFill>
-                      <a:prstDash val="solid"/>
-                    </a:lnB>
-                    <a:solidFill>
-                      <a:srgbClr val="FFFEF8"/>
-                    </a:solidFill>
-                  </a:tcPr>
-                </a:tc>
-                <a:tc>
-                  <a:txBody>
-                    <a:bodyPr wrap="square">
-                      <a:noAutofit/>
-                    </a:bodyPr>
-                    <a:lstStyle/>
-                    <a:p>
-                      <a:pPr algn="l">
-                        <a:lnSpc>
-                          <a:spcPts val="1667"/>
-                        </a:lnSpc>
-                        <a:buNone/>
-                        <a:defRPr sz="1450" b="0">
-                          <a:solidFill>
-                            <a:srgbClr val="303437"/>
-                          </a:solidFill>
-                          <a:latin typeface="Noto Sans"/>
-                        </a:defRPr>
-                      </a:pPr>
-                      <a:r>
-                        <a:rPr sz="1450" b="0" lang="ja-JP" altLang="en-US">
-                          <a:solidFill>
-                            <a:srgbClr val="303437"/>
-                          </a:solidFill>
-                          <a:latin typeface="Noto Sans"/>
-                          <a:ea typeface="Noto Sans CJK JP"/>
-                          <a:cs typeface="Noto Sans"/>
-                        </a:rPr>
-                        <a:t>train.json / 698</a:t>
-                      </a:r>
-                    </a:p>
-                  </a:txBody>
-                  <a:tcPr marL="63500" marR="63500" marT="38100" marB="38100" anchor="ctr">
-                    <a:lnL w="7620">
-                      <a:noFill/>
-                    </a:lnL>
-                    <a:lnR w="7620">
-                      <a:noFill/>
-                    </a:lnR>
-                    <a:lnT w="7620">
-                      <a:noFill/>
-                    </a:lnT>
-                    <a:lnB w="15240">
-                      <a:solidFill>
-                        <a:srgbClr val="626669"/>
-                      </a:solidFill>
-                      <a:prstDash val="solid"/>
-                    </a:lnB>
-                    <a:solidFill>
-                      <a:srgbClr val="FFFEF8"/>
-                    </a:solidFill>
-                  </a:tcPr>
-                </a:tc>
-                <a:tc>
-                  <a:txBody>
-                    <a:bodyPr wrap="square">
-                      <a:noAutofit/>
-                    </a:bodyPr>
-                    <a:lstStyle/>
-                    <a:p>
-                      <a:pPr algn="l">
-                        <a:lnSpc>
-                          <a:spcPts val="1667"/>
-                        </a:lnSpc>
-                        <a:buNone/>
-                        <a:defRPr sz="1450" b="0">
-                          <a:solidFill>
-                            <a:srgbClr val="303437"/>
-                          </a:solidFill>
-                          <a:latin typeface="Noto Sans"/>
-                        </a:defRPr>
-                      </a:pPr>
-                      <a:r>
-                        <a:rPr sz="1450" b="0" lang="ja-JP" altLang="en-US">
-                          <a:solidFill>
-                            <a:srgbClr val="303437"/>
-                          </a:solidFill>
-                          <a:latin typeface="Noto Sans"/>
-                          <a:ea typeface="Noto Sans CJK JP"/>
-                          <a:cs typeface="Noto Sans"/>
-                        </a:rPr>
-                        <a:t>塑料瓶 → 其</a:t>
-                      </a:r>
-                    </a:p>
-                  </a:txBody>
-                  <a:tcPr marL="63500" marR="63500" marT="38100" marB="38100" anchor="ctr">
-                    <a:lnL w="7620">
-                      <a:noFill/>
-                    </a:lnL>
-                    <a:lnR w="7620">
-                      <a:noFill/>
-                    </a:lnR>
-                    <a:lnT w="7620">
-                      <a:noFill/>
-                    </a:lnT>
-                    <a:lnB w="15240">
-                      <a:solidFill>
-                        <a:srgbClr val="626669"/>
-                      </a:solidFill>
-                      <a:prstDash val="solid"/>
-                    </a:lnB>
-                    <a:solidFill>
-                      <a:srgbClr val="FFFEF8"/>
-                    </a:solidFill>
-                  </a:tcPr>
-                </a:tc>
-                <a:tc>
-                  <a:txBody>
-                    <a:bodyPr wrap="square">
-                      <a:noAutofit/>
-                    </a:bodyPr>
-                    <a:lstStyle/>
-                    <a:p>
-                      <a:pPr algn="l">
-                        <a:lnSpc>
-                          <a:spcPts val="1667"/>
-                        </a:lnSpc>
-                        <a:buNone/>
-                        <a:defRPr sz="1450" b="0">
-                          <a:solidFill>
-                            <a:srgbClr val="303437"/>
-                          </a:solidFill>
-                          <a:latin typeface="Noto Sans"/>
-                        </a:defRPr>
-                      </a:pPr>
-                      <a:r>
-                        <a:rPr sz="1450" b="0" lang="ja-JP" altLang="en-US">
-                          <a:solidFill>
-                            <a:srgbClr val="303437"/>
-                          </a:solidFill>
-                          <a:latin typeface="Noto Sans"/>
-                          <a:ea typeface="Noto Sans CJK JP"/>
-                          <a:cs typeface="Noto Sans"/>
-                        </a:rPr>
-                        <a:t>true</a:t>
-                      </a:r>
-                    </a:p>
-                  </a:txBody>
-                  <a:tcPr marL="63500" marR="63500" marT="38100" marB="38100" anchor="ctr">
-                    <a:lnL w="7620">
-                      <a:noFill/>
-                    </a:lnL>
-                    <a:lnR w="7620">
-                      <a:noFill/>
-                    </a:lnR>
-                    <a:lnT w="7620">
-                      <a:noFill/>
-                    </a:lnT>
-                    <a:lnB w="15240">
-                      <a:solidFill>
-                        <a:srgbClr val="626669"/>
-                      </a:solidFill>
-                      <a:prstDash val="solid"/>
-                    </a:lnB>
-                    <a:solidFill>
-                      <a:srgbClr val="FFFEF8"/>
-                    </a:solidFill>
-                  </a:tcPr>
-                </a:tc>
-              </a:tr>
-            </a:tbl>
-          </a:graphicData>
-        </a:graphic>
-      </p:graphicFrame>
-      <p:sp>
-        <p:nvSpPr>
-          <p:cNvPr id="5" name="TextBox 4"/>
-          <p:cNvSpPr txBox="1"/>
-          <p:nvPr/>
-        </p:nvSpPr>
-        <p:spPr>
-          <a:xfrm>
-            <a:off x="594360" y="3882707"/>
-            <a:ext cx="7955279" cy="658368"/>
-          </a:xfrm>
-          <a:prstGeom prst="rect">
-            <a:avLst/>
-          </a:prstGeom>
-          <a:noFill/>
-        </p:spPr>
-        <p:txBody>
-          <a:bodyPr wrap="square" lIns="0" rIns="0" tIns="0" bIns="0">
-            <a:noAutofit/>
-          </a:bodyPr>
-          <a:lstStyle/>
-          <a:p>
-            <a:pPr algn="l">
-              <a:lnSpc>
-                <a:spcPts val="1568"/>
-              </a:lnSpc>
-              <a:spcBef>
-                <a:spcPts val="0"/>
-              </a:spcBef>
-              <a:spcAft>
-                <a:spcPts val="0"/>
-              </a:spcAft>
-              <a:buNone/>
-              <a:defRPr sz="1400" b="0">
-                <a:solidFill>
-                  <a:srgbClr val="303437"/>
-                </a:solidFill>
-                <a:latin typeface="Noto Sans"/>
-              </a:defRPr>
-            </a:pPr>
-            <a:r>
-              <a:rPr sz="1400" b="0" lang="ja-JP" altLang="en-US">
-                <a:solidFill>
-                  <a:srgbClr val="303437"/>
-                </a:solidFill>
-                <a:latin typeface="Noto Sans"/>
-                <a:ea typeface="Noto Sans CJK JP"/>
-                <a:cs typeface="Noto Sans"/>
-              </a:rPr>
-              <a:t>行番号は1起算。学習のidxは一意ではない。各行のSHA256と元レコードを付属記録に保存。</a:t>
-            </a:r>
-          </a:p>
-        </p:txBody>
-      </p:sp>
-      <p:sp>
-        <p:nvSpPr>
-          <p:cNvPr id="6" name="sources"/>
-          <p:cNvSpPr txBox="1"/>
-          <p:nvPr/>
-        </p:nvSpPr>
-        <p:spPr>
-          <a:xfrm>
-            <a:off x="502920" y="4700016"/>
-            <a:ext cx="8183879" cy="530352"/>
-          </a:xfrm>
-          <a:prstGeom prst="rect">
-            <a:avLst/>
-          </a:prstGeom>
-          <a:noFill/>
-        </p:spPr>
-        <p:txBody>
-          <a:bodyPr wrap="square" lIns="0" rIns="0" tIns="0" bIns="0">
-            <a:noAutofit/>
-          </a:bodyPr>
-          <a:lstStyle/>
-          <a:p>
-            <a:pPr algn="l">
-              <a:lnSpc>
-                <a:spcPts val="940"/>
-              </a:lnSpc>
-              <a:spcBef>
-                <a:spcPts val="0"/>
-              </a:spcBef>
-              <a:spcAft>
-                <a:spcPts val="300"/>
-              </a:spcAft>
-              <a:buNone/>
-              <a:defRPr sz="810" b="0">
-                <a:solidFill>
-                  <a:srgbClr val="303437"/>
-                </a:solidFill>
-                <a:latin typeface="Noto Sans"/>
-              </a:defRPr>
-            </a:pPr>
-            <a:r>
-              <a:rPr sz="810" b="0" lang="ja-JP" altLang="en-US">
-                <a:solidFill>
-                  <a:srgbClr val="626669"/>
-                </a:solidFill>
-                <a:latin typeface="Noto Sans"/>
-                <a:ea typeface="Noto Sans CJK JP"/>
-                <a:cs typeface="Noto Sans"/>
-              </a:rPr>
-              <a:t>[1] CLUEbenchmark. cluewsc2020_public.zip; README dated 2021-08-29.</a:t>
-            </a:r>
-            <a:r>
-              <a:rPr sz="810" b="0" lang="ja-JP" altLang="en-US">
-                <a:solidFill>
-                  <a:srgbClr val="626669"/>
-                </a:solidFill>
-                <a:latin typeface="Noto Sans"/>
-                <a:ea typeface="Noto Sans CJK JP"/>
-                <a:cs typeface="Noto Sans"/>
-              </a:rPr>
-              <a:t>  </a:t>
-            </a:r>
-            <a:r>
-              <a:rPr sz="810" b="0" lang="ja-JP" altLang="en-US">
-                <a:solidFill>
-                  <a:srgbClr val="626669"/>
-                </a:solidFill>
-                <a:latin typeface="Noto Sans"/>
-                <a:ea typeface="Noto Sans CJK JP"/>
-                <a:cs typeface="Noto Sans"/>
-                <a:hlinkClick r:id="rId2"/>
-              </a:rPr>
-              <a:t>https://storage.googleapis.com/cluebenchmark/tasks/cluewsc2020_public.zip</a:t>
+              <a:t>Appendix: 2. データの読み方と評価値</a:t>
             </a:r>
           </a:p>
         </p:txBody>
@@ -31620,7 +26152,7 @@
                 <a:ea typeface="Noto Sans CJK JP"/>
                 <a:cs typeface="Noto Sans"/>
               </a:rPr>
-              <a:t>文章が同じでも、対象が違えば別の行</a:t>
+              <a:t>同じ文章で、候補を変えると正解も変わる</a:t>
             </a:r>
           </a:p>
         </p:txBody>
@@ -31668,7 +26200,7 @@
                 <a:ea typeface="Noto Sans CJK JP"/>
                 <a:cs typeface="Noto Sans"/>
               </a:rPr>
-              <a:t>Appendix: 2. 版・原位置・実装</a:t>
+              <a:t>Appendix: 2. データの読み方と評価値</a:t>
             </a:r>
           </a:p>
         </p:txBody>
@@ -31724,7 +26256,7 @@
                           <a:ea typeface="Noto Sans CJK JP"/>
                           <a:cs typeface="Noto Sans"/>
                         </a:rPr>
-                        <a:t>元位置</a:t>
+                        <a:t>文章</a:t>
                       </a:r>
                     </a:p>
                   </a:txBody>
@@ -31950,7 +26482,7 @@
                           <a:ea typeface="Noto Sans CJK JP"/>
                           <a:cs typeface="Noto Sans"/>
                         </a:rPr>
-                        <a:t>train / 345</a:t>
+                        <a:t>実例2</a:t>
                       </a:r>
                     </a:p>
                   </a:txBody>
@@ -32164,7 +26696,7 @@
                           <a:ea typeface="Noto Sans CJK JP"/>
                           <a:cs typeface="Noto Sans"/>
                         </a:rPr>
-                        <a:t>train / 346</a:t>
+                        <a:t>実例2</a:t>
                       </a:r>
                     </a:p>
                   </a:txBody>
@@ -32366,7 +26898,7 @@
                           <a:ea typeface="Noto Sans CJK JP"/>
                           <a:cs typeface="Noto Sans"/>
                         </a:rPr>
-                        <a:t>train / 347</a:t>
+                        <a:t>実例2</a:t>
                       </a:r>
                     </a:p>
                   </a:txBody>
@@ -32568,7 +27100,7 @@
                           <a:ea typeface="Noto Sans CJK JP"/>
                           <a:cs typeface="Noto Sans"/>
                         </a:rPr>
-                        <a:t>train / 681</a:t>
+                        <a:t>実例1</a:t>
                       </a:r>
                     </a:p>
                   </a:txBody>
@@ -32770,7 +27302,7 @@
                           <a:ea typeface="Noto Sans CJK JP"/>
                           <a:cs typeface="Noto Sans"/>
                         </a:rPr>
-                        <a:t>train / 682</a:t>
+                        <a:t>実例1</a:t>
                       </a:r>
                     </a:p>
                   </a:txBody>
@@ -33008,7 +27540,7 @@
                 <a:ea typeface="Noto Sans CJK JP"/>
                 <a:cs typeface="Noto Sans"/>
               </a:rPr>
-              <a:t>同じ文章の行を、13件の独立文章の数へ重複計上していない。</a:t>
+              <a:t>実例2では「准教授」、実例1では「块状物」を候補にするとtrueになる。候補の名詞句も、問題を構成する入力の一部。</a:t>
             </a:r>
           </a:p>
         </p:txBody>
@@ -33062,7 +27594,7 @@
                 <a:ea typeface="Noto Sans CJK JP"/>
                 <a:cs typeface="Noto Sans"/>
               </a:rPr>
-              <a:t>[1] CLUEbenchmark. cluewsc2020_public.zip; README dated 2021-08-29.</a:t>
+              <a:t>[1] CLUEbenchmark. CLUEWSC2020 public data; test update 2021-08-29.</a:t>
             </a:r>
             <a:r>
               <a:rPr sz="810" b="0" lang="ja-JP" altLang="en-US">
@@ -33151,7 +27683,7 @@
                 <a:ea typeface="Noto Sans CJK JP"/>
                 <a:cs typeface="Noto Sans"/>
               </a:rPr>
-              <a:t>文字位置は、UTF-8のバイト位置ではない</a:t>
+              <a:t>指定箇所は、文字位置と語句で表す</a:t>
             </a:r>
           </a:p>
         </p:txBody>
@@ -33204,7 +27736,7 @@
                 <a:ea typeface="Noto Sans CJK JP"/>
                 <a:cs typeface="Noto Sans"/>
               </a:rPr>
-              <a:t>targetのspan1_indexとspan2_indexは0起算の文字位置。指定された位置から文字数分を切り出すと、各spanの文字列に一致する。</a:t>
+              <a:t>targetは、名詞句と代名詞それぞれの文字位置と語句を持つ。span1_indexとspan2_indexは、文章の先頭を0とする文字位置。</a:t>
             </a:r>
           </a:p>
           <a:p>
@@ -33234,7 +27766,7 @@
                 <a:ea typeface="Noto Sans CJK JP"/>
                 <a:cs typeface="Noto Sans"/>
               </a:rPr>
-              <a:t>同じ代名詞が複数回現れる文章では、文字列の検索だけでは指定箇所を確定できない。本資料では位置に従って一箇所だけ色を付けた。</a:t>
+              <a:t>同じ代名詞が文中に繰り返されても、この位置によって、どの箇所が判定対象かが分かる。</a:t>
             </a:r>
           </a:p>
           <a:p>
@@ -33264,7 +27796,7 @@
                 <a:ea typeface="Noto Sans CJK JP"/>
                 <a:cs typeface="Noto Sans"/>
               </a:rPr>
-              <a:t>現在の新テストには、候補名詞句が代名詞より後にある行も464件ある。すべての候補が代名詞より前にあるとは仮定しない。</a:t>
+              <a:t>候補の名詞句が代名詞より後ろにある問題も含む。前後の文脈を読み、指定された二箇所の関係を判断する。</a:t>
             </a:r>
           </a:p>
         </p:txBody>
@@ -33312,7 +27844,7 @@
                 <a:ea typeface="Noto Sans CJK JP"/>
                 <a:cs typeface="Noto Sans"/>
               </a:rPr>
-              <a:t>Appendix: 2. 版・原位置・実装</a:t>
+              <a:t>Appendix: 2. データの読み方と評価値</a:t>
             </a:r>
           </a:p>
         </p:txBody>
@@ -33366,7 +27898,7 @@
                 <a:ea typeface="Noto Sans CJK JP"/>
                 <a:cs typeface="Noto Sans"/>
               </a:rPr>
-              <a:t>[1] CLUEbenchmark. cluewsc2020_public.zip; README dated 2021-08-29.</a:t>
+              <a:t>[1] CLUEbenchmark. CLUEWSC2020 public data; test update 2021-08-29.</a:t>
             </a:r>
             <a:r>
               <a:rPr sz="810" b="0" lang="ja-JP" altLang="en-US">
@@ -33538,7 +28070,7 @@
                 <a:ea typeface="Noto Sans CJK JP"/>
                 <a:cs typeface="Noto Sans"/>
               </a:rPr>
-              <a:t>文中の人物や物の役割を結び付ける。近くにある名詞を機械的に選ぶだけでは、動作の対象や話し手の意図を取り違える。</a:t>
+              <a:t>登場人物や物が何をしているかを読み、代名詞が指す対象を判断する。語の位置だけでなく、動作の対象や話し手の意図が手掛かりになる。</a:t>
             </a:r>
           </a:p>
           <a:p>
@@ -33568,7 +28100,7 @@
                 <a:ea typeface="Noto Sans CJK JP"/>
                 <a:cs typeface="Noto Sans"/>
               </a:rPr>
-              <a:t>2020年にCLUEの新しい指示関係課題として公開された。後にCLEVAの共参照解決にも採用された。</a:t>
+              <a:t>2020年にCLUEの新しい指示関係課題として公開され、後にCLEVAの共参照解決にも採用された。</a:t>
             </a:r>
           </a:p>
         </p:txBody>
@@ -33670,7 +28202,7 @@
                 <a:ea typeface="Noto Sans CJK JP"/>
                 <a:cs typeface="Noto Sans"/>
               </a:rPr>
-              <a:t>[1] CLUE team. CLUEWSC2020: data format and task description.</a:t>
+              <a:t>[1] CLUE team. CLUEWSC2020: WSC Winograd模式挑战中文版，中文指代消解任务.</a:t>
             </a:r>
           </a:p>
           <a:p>
@@ -33751,310 +28283,6 @@
                 <a:hlinkClick r:id="rId3"/>
               </a:rPr>
               <a:t>https://aclanthology.org/2023.emnlp-demo.17/</a:t>
-            </a:r>
-          </a:p>
-        </p:txBody>
-      </p:sp>
-    </p:spTree>
-  </p:cSld>
-  <p:clrMapOvr>
-    <a:masterClrMapping/>
-  </p:clrMapOvr>
-</p:sld>
-</file>
-
-<file path=ppt/slides/slide50.xml><?xml version="1.0" encoding="utf-8"?>
-<p:sld xmlns:a="http://schemas.openxmlformats.org/drawingml/2006/main" xmlns:p="http://schemas.openxmlformats.org/presentationml/2006/main" xmlns:r="http://schemas.openxmlformats.org/officeDocument/2006/relationships">
-  <p:cSld>
-    <p:spTree>
-      <p:nvGrpSpPr>
-        <p:cNvPr id="1" name=""/>
-        <p:cNvGrpSpPr/>
-        <p:nvPr/>
-      </p:nvGrpSpPr>
-      <p:grpSpPr/>
-      <p:sp>
-        <p:nvSpPr>
-          <p:cNvPr id="2" name="Title 1"/>
-          <p:cNvSpPr>
-            <a:spLocks noGrp="1"/>
-          </p:cNvSpPr>
-          <p:nvPr>
-            <p:ph type="title"/>
-          </p:nvPr>
-        </p:nvSpPr>
-        <p:spPr>
-          <a:xfrm>
-            <a:off x="468172" y="650138"/>
-            <a:ext cx="8206740" cy="616305"/>
-          </a:xfrm>
-        </p:spPr>
-        <p:txBody>
-          <a:bodyPr wrap="square" lIns="0" rIns="0" tIns="0" bIns="0">
-            <a:noAutofit/>
-          </a:bodyPr>
-          <a:lstStyle/>
-          <a:p>
-            <a:pPr algn="l">
-              <a:lnSpc>
-                <a:spcPct val="110000"/>
-              </a:lnSpc>
-              <a:buNone/>
-              <a:defRPr sz="2800" b="0">
-                <a:solidFill>
-                  <a:srgbClr val="303437"/>
-                </a:solidFill>
-                <a:latin typeface="Noto Sans"/>
-              </a:defRPr>
-            </a:pPr>
-            <a:r>
-              <a:rPr sz="2800" b="1" lang="ja-JP" altLang="en-US">
-                <a:solidFill>
-                  <a:srgbClr val="303437"/>
-                </a:solidFill>
-                <a:latin typeface="Noto Sans"/>
-                <a:ea typeface="Noto Sans CJK JP"/>
-                <a:cs typeface="Noto Sans"/>
-              </a:rPr>
-              <a:t>一意なIDと、一意な入力は違う</a:t>
-            </a:r>
-          </a:p>
-        </p:txBody>
-      </p:sp>
-      <p:sp>
-        <p:nvSpPr>
-          <p:cNvPr id="3" name="Text Placeholder 2"/>
-          <p:cNvSpPr>
-            <a:spLocks noGrp="1"/>
-          </p:cNvSpPr>
-          <p:nvPr>
-            <p:ph type="body" idx="1"/>
-          </p:nvPr>
-        </p:nvSpPr>
-        <p:spPr>
-          <a:xfrm>
-            <a:off x="594360" y="1463040"/>
-            <a:ext cx="7955279" cy="3044952"/>
-          </a:xfrm>
-        </p:spPr>
-        <p:txBody>
-          <a:bodyPr wrap="square" tIns="91440" bIns="91440">
-            <a:noAutofit/>
-          </a:bodyPr>
-          <a:lstStyle/>
-          <a:p>
-            <a:pPr marL="457200" indent="-355600">
-              <a:lnSpc>
-                <a:spcPts val="2320"/>
-              </a:lnSpc>
-              <a:spcAft>
-                <a:spcPts val="700"/>
-              </a:spcAft>
-              <a:buSzPct val="68205"/>
-              <a:buFont typeface="Noto Sans CJK JP"/>
-              <a:buChar char="●"/>
-              <a:defRPr sz="1950" b="0">
-                <a:solidFill>
-                  <a:srgbClr val="303437"/>
-                </a:solidFill>
-                <a:latin typeface="Noto Sans"/>
-              </a:defRPr>
-            </a:pPr>
-            <a:r>
-              <a:rPr sz="1950" b="0" lang="ja-JP" altLang="en-US">
-                <a:solidFill>
-                  <a:srgbClr val="303437"/>
-                </a:solidFill>
-                <a:latin typeface="Noto Sans"/>
-                <a:ea typeface="Noto Sans CJK JP"/>
-                <a:cs typeface="Noto Sans"/>
-              </a:rPr>
-              <a:t>学習1,244行にあるidxは347種類。同じidxを持つ行があるため、原位置はファイル名、行番号、元行のSHA256で固定する。</a:t>
-            </a:r>
-          </a:p>
-          <a:p>
-            <a:pPr marL="457200" indent="-355600">
-              <a:lnSpc>
-                <a:spcPts val="2320"/>
-              </a:lnSpc>
-              <a:spcAft>
-                <a:spcPts val="700"/>
-              </a:spcAft>
-              <a:buSzPct val="68205"/>
-              <a:buFont typeface="Noto Sans CJK JP"/>
-              <a:buChar char="●"/>
-              <a:defRPr sz="1950" b="0">
-                <a:solidFill>
-                  <a:srgbClr val="303437"/>
-                </a:solidFill>
-                <a:latin typeface="Noto Sans"/>
-              </a:defRPr>
-            </a:pPr>
-            <a:r>
-              <a:rPr sz="1950" b="0" lang="ja-JP" altLang="en-US">
-                <a:solidFill>
-                  <a:srgbClr val="303437"/>
-                </a:solidFill>
-                <a:latin typeface="Noto Sans"/>
-                <a:ea typeface="Noto Sans CJK JP"/>
-                <a:cs typeface="Noto Sans"/>
-              </a:rPr>
-              <a:t>文章とtargetを組にした異なる入力は、学習1,239種類、新テスト2,568種類。異なる行が同じ入力を繰り返す場合もある。</a:t>
-            </a:r>
-          </a:p>
-          <a:p>
-            <a:pPr marL="457200" indent="-355600">
-              <a:lnSpc>
-                <a:spcPts val="2320"/>
-              </a:lnSpc>
-              <a:spcAft>
-                <a:spcPts val="0"/>
-              </a:spcAft>
-              <a:buSzPct val="68205"/>
-              <a:buFont typeface="Noto Sans CJK JP"/>
-              <a:buChar char="●"/>
-              <a:defRPr sz="1950" b="0">
-                <a:solidFill>
-                  <a:srgbClr val="303437"/>
-                </a:solidFill>
-                <a:latin typeface="Noto Sans"/>
-              </a:defRPr>
-            </a:pPr>
-            <a:r>
-              <a:rPr sz="1950" b="0" lang="ja-JP" altLang="en-US">
-                <a:solidFill>
-                  <a:srgbClr val="303437"/>
-                </a:solidFill>
-                <a:latin typeface="Noto Sans"/>
-                <a:ea typeface="Noto Sans CJK JP"/>
-                <a:cs typeface="Noto Sans"/>
-              </a:rPr>
-              <a:t>四ファイル間に完全一致するtextはなかった。ただし、同じ作品・著者・近い文章が分割をまたがないことまで保証する検査ではない。</a:t>
-            </a:r>
-          </a:p>
-        </p:txBody>
-      </p:sp>
-      <p:sp>
-        <p:nvSpPr>
-          <p:cNvPr id="4" name="Title 3"/>
-          <p:cNvSpPr>
-            <a:spLocks noGrp="1"/>
-          </p:cNvSpPr>
-          <p:nvPr>
-            <p:ph type="title" idx="2"/>
-          </p:nvPr>
-        </p:nvSpPr>
-        <p:spPr>
-          <a:xfrm>
-            <a:off x="75895" y="0"/>
-            <a:ext cx="8115300" cy="480060"/>
-          </a:xfrm>
-        </p:spPr>
-        <p:txBody>
-          <a:bodyPr wrap="square" lIns="0" rIns="0" tIns="0" bIns="0" anchor="ctr">
-            <a:noAutofit/>
-          </a:bodyPr>
-          <a:lstStyle/>
-          <a:p>
-            <a:pPr algn="l">
-              <a:lnSpc>
-                <a:spcPct val="110000"/>
-              </a:lnSpc>
-              <a:buNone/>
-              <a:defRPr sz="1400" b="0">
-                <a:solidFill>
-                  <a:srgbClr val="303437"/>
-                </a:solidFill>
-                <a:latin typeface="Noto Sans"/>
-              </a:defRPr>
-            </a:pPr>
-            <a:r>
-              <a:rPr sz="1400" b="1" lang="ja-JP" altLang="en-US">
-                <a:solidFill>
-                  <a:srgbClr val="FFFEF8"/>
-                </a:solidFill>
-                <a:latin typeface="Noto Sans"/>
-                <a:ea typeface="Noto Sans CJK JP"/>
-                <a:cs typeface="Noto Sans"/>
-              </a:rPr>
-              <a:t>Appendix: 2. 版・原位置・実装</a:t>
-            </a:r>
-          </a:p>
-        </p:txBody>
-      </p:sp>
-      <p:sp>
-        <p:nvSpPr>
-          <p:cNvPr id="5" name="sources"/>
-          <p:cNvSpPr txBox="1"/>
-          <p:nvPr/>
-        </p:nvSpPr>
-        <p:spPr>
-          <a:xfrm>
-            <a:off x="502920" y="4700016"/>
-            <a:ext cx="8183879" cy="530352"/>
-          </a:xfrm>
-          <a:prstGeom prst="rect">
-            <a:avLst/>
-          </a:prstGeom>
-          <a:noFill/>
-        </p:spPr>
-        <p:txBody>
-          <a:bodyPr wrap="square" lIns="0" rIns="0" tIns="0" bIns="0">
-            <a:noAutofit/>
-          </a:bodyPr>
-          <a:lstStyle/>
-          <a:p>
-            <a:pPr algn="l">
-              <a:lnSpc>
-                <a:spcPts val="940"/>
-              </a:lnSpc>
-              <a:spcBef>
-                <a:spcPts val="0"/>
-              </a:spcBef>
-              <a:spcAft>
-                <a:spcPts val="300"/>
-              </a:spcAft>
-              <a:buNone/>
-              <a:defRPr sz="810" b="0">
-                <a:solidFill>
-                  <a:srgbClr val="303437"/>
-                </a:solidFill>
-                <a:latin typeface="Noto Sans"/>
-              </a:defRPr>
-            </a:pPr>
-            <a:r>
-              <a:rPr sz="810" b="0" lang="ja-JP" altLang="en-US">
-                <a:solidFill>
-                  <a:srgbClr val="626669"/>
-                </a:solidFill>
-                <a:latin typeface="Noto Sans"/>
-                <a:ea typeface="Noto Sans CJK JP"/>
-                <a:cs typeface="Noto Sans"/>
-              </a:rPr>
-              <a:t>[1] CLUEbenchmark. cluewsc2020_public.zip; README dated 2021-08-29.</a:t>
-            </a:r>
-            <a:r>
-              <a:rPr sz="810" b="0" lang="ja-JP" altLang="en-US">
-                <a:solidFill>
-                  <a:srgbClr val="626669"/>
-                </a:solidFill>
-                <a:latin typeface="Noto Sans"/>
-                <a:ea typeface="Noto Sans CJK JP"/>
-                <a:cs typeface="Noto Sans"/>
-              </a:rPr>
-              <a:t>  </a:t>
-            </a:r>
-            <a:r>
-              <a:rPr sz="810" b="0" lang="ja-JP" altLang="en-US">
-                <a:solidFill>
-                  <a:srgbClr val="626669"/>
-                </a:solidFill>
-                <a:latin typeface="Noto Sans"/>
-                <a:ea typeface="Noto Sans CJK JP"/>
-                <a:cs typeface="Noto Sans"/>
-                <a:hlinkClick r:id="rId2"/>
-              </a:rPr>
-              <a:t>https://storage.googleapis.com/cluebenchmark/tasks/cluewsc2020_public.zip</a:t>
             </a:r>
           </a:p>
         </p:txBody>
@@ -34168,7 +28396,7 @@
                 <a:ea typeface="Noto Sans CJK JP"/>
                 <a:cs typeface="Noto Sans"/>
               </a:rPr>
-              <a:t>Appendix: 2. 版・原位置・実装</a:t>
+              <a:t>Appendix: 2. データの読み方と評価値</a:t>
             </a:r>
           </a:p>
         </p:txBody>
@@ -34882,7 +29110,7 @@
                 <a:ea typeface="Noto Sans CJK JP"/>
                 <a:cs typeface="Noto Sans"/>
               </a:rPr>
-              <a:t>2020年の旧test 290問。現在の公開testや、CLEVAの公開runによる値ではない。</a:t>
+              <a:t>2020年のテスト290問に対する正答率。3回の微調整から、開発成績が最良のモデルを選択。</a:t>
             </a:r>
           </a:p>
         </p:txBody>
@@ -35073,7 +29301,7 @@
                 <a:ea typeface="Noto Sans CJK JP"/>
                 <a:cs typeface="Noto Sans"/>
               </a:rPr>
-              <a:t>Appendix: 2. 版・原位置・実装</a:t>
+              <a:t>Appendix: 2. データの読み方と評価値</a:t>
             </a:r>
           </a:p>
         </p:txBody>
@@ -35685,7 +29913,7 @@
                 <a:ea typeface="Noto Sans CJK JP"/>
                 <a:cs typeface="Noto Sans"/>
               </a:rPr>
-              <a:t>2020年の旧test 290問。現在の公開testや、CLEVAの公開runによる値ではない。</a:t>
+              <a:t>2020年のテスト290問に対する正答率。3回の微調整から、開発成績が最良のモデルを選択。</a:t>
             </a:r>
           </a:p>
         </p:txBody>
@@ -35828,7 +30056,7 @@
                 <a:ea typeface="Noto Sans CJK JP"/>
                 <a:cs typeface="Noto Sans"/>
               </a:rPr>
-              <a:t>ラベルを保って、公開の一行を読む</a:t>
+              <a:t>学習データの一問を読み込む</a:t>
             </a:r>
           </a:p>
         </p:txBody>
@@ -35876,7 +30104,7 @@
                 <a:ea typeface="Noto Sans CJK JP"/>
                 <a:cs typeface="Noto Sans"/>
               </a:rPr>
-              <a:t>Appendix: 2. 版・原位置・実装</a:t>
+              <a:t>Appendix: 2. データの読み方と評価値</a:t>
             </a:r>
           </a:p>
         </p:txBody>
@@ -35890,7 +30118,7 @@
         <p:spPr>
           <a:xfrm>
             <a:off x="548640" y="1536192"/>
-            <a:ext cx="8046720" cy="2269066"/>
+            <a:ext cx="8046720" cy="1673352"/>
           </a:xfrm>
           <a:prstGeom prst="rect">
             <a:avLst/>
@@ -36012,7 +30240,7 @@
                 <a:ea typeface="Noto Sans CJK JP"/>
                 <a:cs typeface="Liberation Mono"/>
               </a:rPr>
-              <a:t>    row = json.loads(f.readlines()[680])</a:t>
+              <a:t>    row = json.loads(next(f))</a:t>
             </a:r>
           </a:p>
           <a:p>
@@ -36043,7 +30271,7 @@
                 <a:ea typeface="Noto Sans CJK JP"/>
                 <a:cs typeface="Liberation Mono"/>
               </a:rPr>
-              <a:t>t = row['target']</a:t>
+              <a:t>print(row['text'])</a:t>
             </a:r>
           </a:p>
           <a:p>
@@ -36074,7 +30302,7 @@
                 <a:ea typeface="Noto Sans CJK JP"/>
                 <a:cs typeface="Liberation Mono"/>
               </a:rPr>
-              <a:t>for k in ('span1', 'span2'):</a:t>
+              <a:t>target = row['target']</a:t>
             </a:r>
           </a:p>
           <a:p>
@@ -36105,7 +30333,7 @@
                 <a:ea typeface="Noto Sans CJK JP"/>
                 <a:cs typeface="Liberation Mono"/>
               </a:rPr>
-              <a:t>    start = t[k + '_index']</a:t>
+              <a:t>print(target['span1_text'], target['span2_text'])</a:t>
             </a:r>
           </a:p>
           <a:p>
@@ -36136,100 +30364,7 @@
                 <a:ea typeface="Noto Sans CJK JP"/>
                 <a:cs typeface="Liberation Mono"/>
               </a:rPr>
-              <a:t>    span = t[k + '_text']</a:t>
-            </a:r>
-          </a:p>
-          <a:p>
-            <a:pPr algn="l">
-              <a:lnSpc>
-                <a:spcPts val="1666"/>
-              </a:lnSpc>
-              <a:spcBef>
-                <a:spcPts val="0"/>
-              </a:spcBef>
-              <a:spcAft>
-                <a:spcPts val="0"/>
-              </a:spcAft>
-              <a:buNone/>
-              <a:defRPr sz="1400" b="0">
-                <a:solidFill>
-                  <a:srgbClr val="303437"/>
-                </a:solidFill>
-                <a:latin typeface="Noto Sans"/>
-              </a:defRPr>
-            </a:pPr>
-            <a:r>
-              <a:rPr sz="1400" b="0" lang="ja-JP" altLang="en-US">
-                <a:solidFill>
-                  <a:srgbClr val="303437"/>
-                </a:solidFill>
-                <a:latin typeface="Liberation Mono"/>
-                <a:ea typeface="Noto Sans CJK JP"/>
-                <a:cs typeface="Liberation Mono"/>
-              </a:rPr>
-              <a:t>    assert row['text'][start:start + len(span)] == span</a:t>
-            </a:r>
-          </a:p>
-          <a:p>
-            <a:pPr algn="l">
-              <a:lnSpc>
-                <a:spcPts val="1666"/>
-              </a:lnSpc>
-              <a:spcBef>
-                <a:spcPts val="0"/>
-              </a:spcBef>
-              <a:spcAft>
-                <a:spcPts val="0"/>
-              </a:spcAft>
-              <a:buNone/>
-              <a:defRPr sz="1400" b="0">
-                <a:solidFill>
-                  <a:srgbClr val="303437"/>
-                </a:solidFill>
-                <a:latin typeface="Noto Sans"/>
-              </a:defRPr>
-            </a:pPr>
-            <a:r>
-              <a:rPr sz="1400" b="0" lang="ja-JP" altLang="en-US">
-                <a:solidFill>
-                  <a:srgbClr val="303437"/>
-                </a:solidFill>
-                <a:latin typeface="Liberation Mono"/>
-                <a:ea typeface="Noto Sans CJK JP"/>
-                <a:cs typeface="Liberation Mono"/>
-              </a:rPr>
-              <a:t>assert row['label'] == 'true'</a:t>
-            </a:r>
-          </a:p>
-          <a:p>
-            <a:pPr algn="l">
-              <a:lnSpc>
-                <a:spcPts val="1666"/>
-              </a:lnSpc>
-              <a:spcBef>
-                <a:spcPts val="0"/>
-              </a:spcBef>
-              <a:spcAft>
-                <a:spcPts val="0"/>
-              </a:spcAft>
-              <a:buNone/>
-              <a:defRPr sz="1400" b="0">
-                <a:solidFill>
-                  <a:srgbClr val="303437"/>
-                </a:solidFill>
-                <a:latin typeface="Noto Sans"/>
-              </a:defRPr>
-            </a:pPr>
-            <a:r>
-              <a:rPr sz="1400" b="0" lang="ja-JP" altLang="en-US">
-                <a:solidFill>
-                  <a:srgbClr val="303437"/>
-                </a:solidFill>
-                <a:latin typeface="Liberation Mono"/>
-                <a:ea typeface="Noto Sans CJK JP"/>
-                <a:cs typeface="Liberation Mono"/>
-              </a:rPr>
-              <a:t>print(t['span1_text'], t['span2_text'], row['label'])</a:t>
+              <a:t>print(row['label'])</a:t>
             </a:r>
           </a:p>
         </p:txBody>
@@ -36242,8 +30377,8 @@
         </p:nvSpPr>
         <p:spPr>
           <a:xfrm>
-            <a:off x="594360" y="4151207"/>
-            <a:ext cx="7955279" cy="310896"/>
+            <a:off x="594360" y="3429000"/>
+            <a:ext cx="7955279" cy="546100"/>
           </a:xfrm>
           <a:prstGeom prst="rect">
             <a:avLst/>
@@ -36283,7 +30418,7 @@
                 <a:ea typeface="Noto Sans CJK JP"/>
                 <a:cs typeface="Noto Sans"/>
               </a:rPr>
-              <a:t>拡張子は.jsonだが、各行が独立したJSON。上の680は0起算。</a:t>
+              <a:t>拡張子は.jsonだが、中身は1行1問のJSON。文章・二つの指定語句・正解を読み出せる。</a:t>
             </a:r>
           </a:p>
         </p:txBody>
@@ -36337,7 +30472,7 @@
                 <a:ea typeface="Noto Sans CJK JP"/>
                 <a:cs typeface="Noto Sans"/>
               </a:rPr>
-              <a:t>[1] CLUEbenchmark. CLUEWSC2020 / train.json / line 681 / idx 25.</a:t>
+              <a:t>[1] CLUEbenchmark. CLUEWSC2020 public data.</a:t>
             </a:r>
             <a:r>
               <a:rPr sz="810" b="0" lang="ja-JP" altLang="en-US">
@@ -36361,677 +30496,6 @@
                 <a:hlinkClick r:id="rId2"/>
               </a:rPr>
               <a:t>https://storage.googleapis.com/cluebenchmark/tasks/cluewsc2020_public.zip</a:t>
-            </a:r>
-          </a:p>
-        </p:txBody>
-      </p:sp>
-    </p:spTree>
-  </p:cSld>
-  <p:clrMapOvr>
-    <a:masterClrMapping/>
-  </p:clrMapOvr>
-</p:sld>
-</file>
-
-<file path=ppt/slides/slide54.xml><?xml version="1.0" encoding="utf-8"?>
-<p:sld xmlns:a="http://schemas.openxmlformats.org/drawingml/2006/main" xmlns:p="http://schemas.openxmlformats.org/presentationml/2006/main" xmlns:r="http://schemas.openxmlformats.org/officeDocument/2006/relationships">
-  <p:cSld>
-    <p:spTree>
-      <p:nvGrpSpPr>
-        <p:cNvPr id="1" name=""/>
-        <p:cNvGrpSpPr/>
-        <p:nvPr/>
-      </p:nvGrpSpPr>
-      <p:grpSpPr/>
-      <p:sp>
-        <p:nvSpPr>
-          <p:cNvPr id="2" name="Title 1"/>
-          <p:cNvSpPr>
-            <a:spLocks noGrp="1"/>
-          </p:cNvSpPr>
-          <p:nvPr>
-            <p:ph type="title"/>
-          </p:nvPr>
-        </p:nvSpPr>
-        <p:spPr>
-          <a:xfrm>
-            <a:off x="468172" y="650138"/>
-            <a:ext cx="8206740" cy="616305"/>
-          </a:xfrm>
-        </p:spPr>
-        <p:txBody>
-          <a:bodyPr wrap="square" lIns="0" rIns="0" tIns="0" bIns="0">
-            <a:noAutofit/>
-          </a:bodyPr>
-          <a:lstStyle/>
-          <a:p>
-            <a:pPr algn="l">
-              <a:lnSpc>
-                <a:spcPct val="110000"/>
-              </a:lnSpc>
-              <a:buNone/>
-              <a:defRPr sz="2800" b="0">
-                <a:solidFill>
-                  <a:srgbClr val="303437"/>
-                </a:solidFill>
-                <a:latin typeface="Noto Sans"/>
-              </a:defRPr>
-            </a:pPr>
-            <a:r>
-              <a:rPr sz="2800" b="1" lang="ja-JP" altLang="en-US">
-                <a:solidFill>
-                  <a:srgbClr val="303437"/>
-                </a:solidFill>
-                <a:latin typeface="Noto Sans"/>
-                <a:ea typeface="Noto Sans CJK JP"/>
-                <a:cs typeface="Noto Sans"/>
-              </a:rPr>
-              <a:t>HELMはテンプレートから入力と参照を作る</a:t>
-            </a:r>
-          </a:p>
-        </p:txBody>
-      </p:sp>
-      <p:sp>
-        <p:nvSpPr>
-          <p:cNvPr id="3" name="Text Placeholder 2"/>
-          <p:cNvSpPr>
-            <a:spLocks noGrp="1"/>
-          </p:cNvSpPr>
-          <p:nvPr>
-            <p:ph type="body" idx="1"/>
-          </p:nvPr>
-        </p:nvSpPr>
-        <p:spPr>
-          <a:xfrm>
-            <a:off x="594360" y="1463040"/>
-            <a:ext cx="7955279" cy="3044952"/>
-          </a:xfrm>
-        </p:spPr>
-        <p:txBody>
-          <a:bodyPr wrap="square" tIns="91440" bIns="91440">
-            <a:noAutofit/>
-          </a:bodyPr>
-          <a:lstStyle/>
-          <a:p>
-            <a:pPr marL="457200" indent="-355600">
-              <a:lnSpc>
-                <a:spcPts val="2261"/>
-              </a:lnSpc>
-              <a:spcAft>
-                <a:spcPts val="700"/>
-              </a:spcAft>
-              <a:buSzPct val="70000"/>
-              <a:buFont typeface="Noto Sans CJK JP"/>
-              <a:buChar char="●"/>
-              <a:defRPr sz="1900" b="0">
-                <a:solidFill>
-                  <a:srgbClr val="303437"/>
-                </a:solidFill>
-                <a:latin typeface="Noto Sans"/>
-              </a:defRPr>
-            </a:pPr>
-            <a:r>
-              <a:rPr sz="1900" b="0" lang="ja-JP" altLang="en-US">
-                <a:solidFill>
-                  <a:srgbClr val="303437"/>
-                </a:solidFill>
-                <a:latin typeface="Noto Sans"/>
-                <a:ea typeface="Noto Sans CJK JP"/>
-                <a:cs typeface="Noto Sans"/>
-              </a:rPr>
-              <a:t>Converterは変換済みのinputとchoicesを読み、labelに含まれる候補位置へ正解タグを付ける。文字列ラベルのtrue/falseを、全タスク共通でそのまま比較する仕組みではない。</a:t>
-            </a:r>
-          </a:p>
-          <a:p>
-            <a:pPr marL="457200" indent="-355600">
-              <a:lnSpc>
-                <a:spcPts val="2261"/>
-              </a:lnSpc>
-              <a:spcAft>
-                <a:spcPts val="700"/>
-              </a:spcAft>
-              <a:buSzPct val="70000"/>
-              <a:buFont typeface="Noto Sans CJK JP"/>
-              <a:buChar char="●"/>
-              <a:defRPr sz="1900" b="0">
-                <a:solidFill>
-                  <a:srgbClr val="303437"/>
-                </a:solidFill>
-                <a:latin typeface="Noto Sans"/>
-              </a:defRPr>
-            </a:pPr>
-            <a:r>
-              <a:rPr sz="1900" b="0" lang="ja-JP" altLang="en-US">
-                <a:solidFill>
-                  <a:srgbClr val="303437"/>
-                </a:solidFill>
-                <a:latin typeface="Noto Sans"/>
-                <a:ea typeface="Noto Sans CJK JP"/>
-                <a:cs typeface="Noto Sans"/>
-              </a:rPr>
-              <a:t>提示方法はpromptのmeta.mul_as_genなどで分岐する。生成、選択肢の一括提示、候補ごとの比較という方法を切り替えられる。</a:t>
-            </a:r>
-          </a:p>
-          <a:p>
-            <a:pPr marL="457200" indent="-355600">
-              <a:lnSpc>
-                <a:spcPts val="2261"/>
-              </a:lnSpc>
-              <a:spcAft>
-                <a:spcPts val="0"/>
-              </a:spcAft>
-              <a:buSzPct val="70000"/>
-              <a:buFont typeface="Noto Sans CJK JP"/>
-              <a:buChar char="●"/>
-              <a:defRPr sz="1900" b="0">
-                <a:solidFill>
-                  <a:srgbClr val="303437"/>
-                </a:solidFill>
-                <a:latin typeface="Noto Sans"/>
-              </a:defRPr>
-            </a:pPr>
-            <a:r>
-              <a:rPr sz="1900" b="0" lang="ja-JP" altLang="en-US">
-                <a:solidFill>
-                  <a:srgbClr val="303437"/>
-                </a:solidFill>
-                <a:latin typeface="Noto Sans"/>
-                <a:ea typeface="Noto Sans CJK JP"/>
-                <a:cs typeface="Noto Sans"/>
-              </a:rPr>
-              <a:t>具体的な推論値はinfer_params.jsonから読む。未取得の値を、温度0・5提示例・出力1候補などで補っていない。</a:t>
-            </a:r>
-          </a:p>
-        </p:txBody>
-      </p:sp>
-      <p:sp>
-        <p:nvSpPr>
-          <p:cNvPr id="4" name="Title 3"/>
-          <p:cNvSpPr>
-            <a:spLocks noGrp="1"/>
-          </p:cNvSpPr>
-          <p:nvPr>
-            <p:ph type="title" idx="2"/>
-          </p:nvPr>
-        </p:nvSpPr>
-        <p:spPr>
-          <a:xfrm>
-            <a:off x="75895" y="0"/>
-            <a:ext cx="8115300" cy="480060"/>
-          </a:xfrm>
-        </p:spPr>
-        <p:txBody>
-          <a:bodyPr wrap="square" lIns="0" rIns="0" tIns="0" bIns="0" anchor="ctr">
-            <a:noAutofit/>
-          </a:bodyPr>
-          <a:lstStyle/>
-          <a:p>
-            <a:pPr algn="l">
-              <a:lnSpc>
-                <a:spcPct val="110000"/>
-              </a:lnSpc>
-              <a:buNone/>
-              <a:defRPr sz="1400" b="0">
-                <a:solidFill>
-                  <a:srgbClr val="303437"/>
-                </a:solidFill>
-                <a:latin typeface="Noto Sans"/>
-              </a:defRPr>
-            </a:pPr>
-            <a:r>
-              <a:rPr sz="1400" b="1" lang="ja-JP" altLang="en-US">
-                <a:solidFill>
-                  <a:srgbClr val="FFFEF8"/>
-                </a:solidFill>
-                <a:latin typeface="Noto Sans"/>
-                <a:ea typeface="Noto Sans CJK JP"/>
-                <a:cs typeface="Noto Sans"/>
-              </a:rPr>
-              <a:t>Appendix: 2. 版・原位置・実装</a:t>
-            </a:r>
-          </a:p>
-        </p:txBody>
-      </p:sp>
-      <p:sp>
-        <p:nvSpPr>
-          <p:cNvPr id="5" name="sources"/>
-          <p:cNvSpPr txBox="1"/>
-          <p:nvPr/>
-        </p:nvSpPr>
-        <p:spPr>
-          <a:xfrm>
-            <a:off x="502920" y="4700016"/>
-            <a:ext cx="8183879" cy="530352"/>
-          </a:xfrm>
-          <a:prstGeom prst="rect">
-            <a:avLst/>
-          </a:prstGeom>
-          <a:noFill/>
-        </p:spPr>
-        <p:txBody>
-          <a:bodyPr wrap="square" lIns="0" rIns="0" tIns="0" bIns="0">
-            <a:noAutofit/>
-          </a:bodyPr>
-          <a:lstStyle/>
-          <a:p>
-            <a:pPr algn="l">
-              <a:lnSpc>
-                <a:spcPts val="940"/>
-              </a:lnSpc>
-              <a:spcBef>
-                <a:spcPts val="0"/>
-              </a:spcBef>
-              <a:spcAft>
-                <a:spcPts val="300"/>
-              </a:spcAft>
-              <a:buNone/>
-              <a:defRPr sz="810" b="0">
-                <a:solidFill>
-                  <a:srgbClr val="303437"/>
-                </a:solidFill>
-                <a:latin typeface="Noto Sans"/>
-              </a:defRPr>
-            </a:pPr>
-            <a:r>
-              <a:rPr sz="810" b="0" lang="ja-JP" altLang="en-US">
-                <a:solidFill>
-                  <a:srgbClr val="626669"/>
-                </a:solidFill>
-                <a:latin typeface="Noto Sans"/>
-                <a:ea typeface="Noto Sans CJK JP"/>
-                <a:cs typeface="Noto Sans"/>
-              </a:rPr>
-              <a:t>[1] Stanford CRFM. CLEVACoreferenceResolutionScenario / Converter. HELM v0.4.0.</a:t>
-            </a:r>
-          </a:p>
-          <a:p>
-            <a:pPr>
-              <a:lnSpc>
-                <a:spcPts val="940"/>
-              </a:lnSpc>
-              <a:spcAft>
-                <a:spcPts val="300"/>
-              </a:spcAft>
-              <a:buNone/>
-              <a:defRPr sz="810" b="0">
-                <a:solidFill>
-                  <a:srgbClr val="303437"/>
-                </a:solidFill>
-                <a:latin typeface="Noto Sans"/>
-              </a:defRPr>
-            </a:pPr>
-            <a:r>
-              <a:rPr sz="810" b="0" lang="ja-JP" altLang="en-US">
-                <a:solidFill>
-                  <a:srgbClr val="626669"/>
-                </a:solidFill>
-                <a:latin typeface="Noto Sans"/>
-                <a:ea typeface="Noto Sans CJK JP"/>
-                <a:cs typeface="Noto Sans"/>
-                <a:hlinkClick r:id="rId2"/>
-              </a:rPr>
-              <a:t>https://github.com/stanford-crfm/helm/blob/v0.4.0/src/helm/benchmark/scenarios/cleva_scenario.py</a:t>
-            </a:r>
-          </a:p>
-        </p:txBody>
-      </p:sp>
-    </p:spTree>
-  </p:cSld>
-  <p:clrMapOvr>
-    <a:masterClrMapping/>
-  </p:clrMapOvr>
-</p:sld>
-</file>
-
-<file path=ppt/slides/slide55.xml><?xml version="1.0" encoding="utf-8"?>
-<p:sld xmlns:a="http://schemas.openxmlformats.org/drawingml/2006/main" xmlns:p="http://schemas.openxmlformats.org/presentationml/2006/main" xmlns:r="http://schemas.openxmlformats.org/officeDocument/2006/relationships">
-  <p:cSld>
-    <p:spTree>
-      <p:nvGrpSpPr>
-        <p:cNvPr id="1" name=""/>
-        <p:cNvGrpSpPr/>
-        <p:nvPr/>
-      </p:nvGrpSpPr>
-      <p:grpSpPr/>
-      <p:sp>
-        <p:nvSpPr>
-          <p:cNvPr id="2" name="Title 1"/>
-          <p:cNvSpPr>
-            <a:spLocks noGrp="1"/>
-          </p:cNvSpPr>
-          <p:nvPr>
-            <p:ph type="title"/>
-          </p:nvPr>
-        </p:nvSpPr>
-        <p:spPr>
-          <a:xfrm>
-            <a:off x="468172" y="650138"/>
-            <a:ext cx="8206740" cy="616305"/>
-          </a:xfrm>
-        </p:spPr>
-        <p:txBody>
-          <a:bodyPr wrap="square" lIns="0" rIns="0" tIns="0" bIns="0">
-            <a:noAutofit/>
-          </a:bodyPr>
-          <a:lstStyle/>
-          <a:p>
-            <a:pPr algn="l">
-              <a:lnSpc>
-                <a:spcPct val="110000"/>
-              </a:lnSpc>
-              <a:buNone/>
-              <a:defRPr sz="2800" b="0">
-                <a:solidFill>
-                  <a:srgbClr val="303437"/>
-                </a:solidFill>
-                <a:latin typeface="Noto Sans"/>
-              </a:defRPr>
-            </a:pPr>
-            <a:r>
-              <a:rPr sz="2800" b="1" lang="ja-JP" altLang="en-US">
-                <a:solidFill>
-                  <a:srgbClr val="303437"/>
-                </a:solidFill>
-                <a:latin typeface="Noto Sans"/>
-                <a:ea typeface="Noto Sans CJK JP"/>
-                <a:cs typeface="Noto Sans"/>
-              </a:rPr>
-              <a:t>公開されていない条件を、得点へ補わない</a:t>
-            </a:r>
-          </a:p>
-        </p:txBody>
-      </p:sp>
-      <p:sp>
-        <p:nvSpPr>
-          <p:cNvPr id="3" name="Text Placeholder 2"/>
-          <p:cNvSpPr>
-            <a:spLocks noGrp="1"/>
-          </p:cNvSpPr>
-          <p:nvPr>
-            <p:ph type="body" idx="1"/>
-          </p:nvPr>
-        </p:nvSpPr>
-        <p:spPr>
-          <a:xfrm>
-            <a:off x="594360" y="1463040"/>
-            <a:ext cx="7955279" cy="3044952"/>
-          </a:xfrm>
-        </p:spPr>
-        <p:txBody>
-          <a:bodyPr wrap="square" tIns="91440" bIns="91440">
-            <a:noAutofit/>
-          </a:bodyPr>
-          <a:lstStyle/>
-          <a:p>
-            <a:pPr marL="457200" indent="-355600">
-              <a:lnSpc>
-                <a:spcPts val="2320"/>
-              </a:lnSpc>
-              <a:spcAft>
-                <a:spcPts val="700"/>
-              </a:spcAft>
-              <a:buSzPct val="68205"/>
-              <a:buFont typeface="Noto Sans CJK JP"/>
-              <a:buChar char="●"/>
-              <a:defRPr sz="1950" b="0">
-                <a:solidFill>
-                  <a:srgbClr val="303437"/>
-                </a:solidFill>
-                <a:latin typeface="Noto Sans"/>
-              </a:defRPr>
-            </a:pPr>
-            <a:r>
-              <a:rPr sz="1950" b="0" lang="ja-JP" altLang="en-US">
-                <a:solidFill>
-                  <a:srgbClr val="303437"/>
-                </a:solidFill>
-                <a:latin typeface="Noto Sans"/>
-                <a:ea typeface="Noto Sans CJK JP"/>
-                <a:cs typeface="Noto Sans"/>
-              </a:rPr>
-              <a:t>Classic v0.4.0公開run索引の8,526件と、runからsuiteへの対応表を対象にCLEVA名を照合したが、該当は0件だった。</a:t>
-            </a:r>
-          </a:p>
-          <a:p>
-            <a:pPr marL="457200" indent="-355600">
-              <a:lnSpc>
-                <a:spcPts val="2320"/>
-              </a:lnSpc>
-              <a:spcAft>
-                <a:spcPts val="700"/>
-              </a:spcAft>
-              <a:buSzPct val="68205"/>
-              <a:buFont typeface="Noto Sans CJK JP"/>
-              <a:buChar char="●"/>
-              <a:defRPr sz="1950" b="0">
-                <a:solidFill>
-                  <a:srgbClr val="303437"/>
-                </a:solidFill>
-                <a:latin typeface="Noto Sans"/>
-              </a:defRPr>
-            </a:pPr>
-            <a:r>
-              <a:rPr sz="1950" b="0" lang="ja-JP" altLang="en-US">
-                <a:solidFill>
-                  <a:srgbClr val="303437"/>
-                </a:solidFill>
-                <a:latin typeface="Noto Sans"/>
-                <a:ea typeface="Noto Sans CJK JP"/>
-                <a:cs typeface="Noto Sans"/>
-              </a:rPr>
-              <a:t>CLEVA v1の設定には共参照解決の6種類のprompt_idが存在する。設定ファイルと、公開された実行結果・モデル出力は別の資料である。</a:t>
-            </a:r>
-          </a:p>
-          <a:p>
-            <a:pPr marL="457200" indent="-355600">
-              <a:lnSpc>
-                <a:spcPts val="2320"/>
-              </a:lnSpc>
-              <a:spcAft>
-                <a:spcPts val="0"/>
-              </a:spcAft>
-              <a:buSzPct val="68205"/>
-              <a:buFont typeface="Noto Sans CJK JP"/>
-              <a:buChar char="●"/>
-              <a:defRPr sz="1950" b="0">
-                <a:solidFill>
-                  <a:srgbClr val="303437"/>
-                </a:solidFill>
-                <a:latin typeface="Noto Sans"/>
-              </a:defRPr>
-            </a:pPr>
-            <a:r>
-              <a:rPr sz="1950" b="0" lang="ja-JP" altLang="en-US">
-                <a:solidFill>
-                  <a:srgbClr val="303437"/>
-                </a:solidFill>
-                <a:latin typeface="Noto Sans"/>
-                <a:ea typeface="Noto Sans CJK JP"/>
-                <a:cs typeface="Noto Sans"/>
-              </a:rPr>
-              <a:t>変換済み集合や推論値を取得できていないため、元のCLUEWSC2020と同一条件のCLEVA得点は示さない。</a:t>
-            </a:r>
-          </a:p>
-        </p:txBody>
-      </p:sp>
-      <p:sp>
-        <p:nvSpPr>
-          <p:cNvPr id="4" name="Title 3"/>
-          <p:cNvSpPr>
-            <a:spLocks noGrp="1"/>
-          </p:cNvSpPr>
-          <p:nvPr>
-            <p:ph type="title" idx="2"/>
-          </p:nvPr>
-        </p:nvSpPr>
-        <p:spPr>
-          <a:xfrm>
-            <a:off x="75895" y="0"/>
-            <a:ext cx="8115300" cy="480060"/>
-          </a:xfrm>
-        </p:spPr>
-        <p:txBody>
-          <a:bodyPr wrap="square" lIns="0" rIns="0" tIns="0" bIns="0" anchor="ctr">
-            <a:noAutofit/>
-          </a:bodyPr>
-          <a:lstStyle/>
-          <a:p>
-            <a:pPr algn="l">
-              <a:lnSpc>
-                <a:spcPct val="110000"/>
-              </a:lnSpc>
-              <a:buNone/>
-              <a:defRPr sz="1400" b="0">
-                <a:solidFill>
-                  <a:srgbClr val="303437"/>
-                </a:solidFill>
-                <a:latin typeface="Noto Sans"/>
-              </a:defRPr>
-            </a:pPr>
-            <a:r>
-              <a:rPr sz="1400" b="1" lang="ja-JP" altLang="en-US">
-                <a:solidFill>
-                  <a:srgbClr val="FFFEF8"/>
-                </a:solidFill>
-                <a:latin typeface="Noto Sans"/>
-                <a:ea typeface="Noto Sans CJK JP"/>
-                <a:cs typeface="Noto Sans"/>
-              </a:rPr>
-              <a:t>Appendix: 2. 版・原位置・実装</a:t>
-            </a:r>
-          </a:p>
-        </p:txBody>
-      </p:sp>
-      <p:sp>
-        <p:nvSpPr>
-          <p:cNvPr id="5" name="sources"/>
-          <p:cNvSpPr txBox="1"/>
-          <p:nvPr/>
-        </p:nvSpPr>
-        <p:spPr>
-          <a:xfrm>
-            <a:off x="502920" y="4517136"/>
-            <a:ext cx="8183879" cy="530352"/>
-          </a:xfrm>
-          <a:prstGeom prst="rect">
-            <a:avLst/>
-          </a:prstGeom>
-          <a:noFill/>
-        </p:spPr>
-        <p:txBody>
-          <a:bodyPr wrap="square" lIns="0" rIns="0" tIns="0" bIns="0">
-            <a:noAutofit/>
-          </a:bodyPr>
-          <a:lstStyle/>
-          <a:p>
-            <a:pPr algn="l">
-              <a:lnSpc>
-                <a:spcPts val="940"/>
-              </a:lnSpc>
-              <a:spcBef>
-                <a:spcPts val="0"/>
-              </a:spcBef>
-              <a:spcAft>
-                <a:spcPts val="300"/>
-              </a:spcAft>
-              <a:buNone/>
-              <a:defRPr sz="810" b="0">
-                <a:solidFill>
-                  <a:srgbClr val="303437"/>
-                </a:solidFill>
-                <a:latin typeface="Noto Sans"/>
-              </a:defRPr>
-            </a:pPr>
-            <a:r>
-              <a:rPr sz="810" b="0" lang="ja-JP" altLang="en-US">
-                <a:solidFill>
-                  <a:srgbClr val="626669"/>
-                </a:solidFill>
-                <a:latin typeface="Noto Sans"/>
-                <a:ea typeface="Noto Sans CJK JP"/>
-                <a:cs typeface="Noto Sans"/>
-              </a:rPr>
-              <a:t>[1] Stanford CRFM. CLEVA v1 run configuration. HELM v0.4.0.</a:t>
-            </a:r>
-          </a:p>
-          <a:p>
-            <a:pPr>
-              <a:lnSpc>
-                <a:spcPts val="940"/>
-              </a:lnSpc>
-              <a:spcAft>
-                <a:spcPts val="300"/>
-              </a:spcAft>
-              <a:buNone/>
-              <a:defRPr sz="810" b="0">
-                <a:solidFill>
-                  <a:srgbClr val="303437"/>
-                </a:solidFill>
-                <a:latin typeface="Noto Sans"/>
-              </a:defRPr>
-            </a:pPr>
-            <a:r>
-              <a:rPr sz="810" b="0" lang="ja-JP" altLang="en-US">
-                <a:solidFill>
-                  <a:srgbClr val="626669"/>
-                </a:solidFill>
-                <a:latin typeface="Noto Sans"/>
-                <a:ea typeface="Noto Sans CJK JP"/>
-                <a:cs typeface="Noto Sans"/>
-                <a:hlinkClick r:id="rId2"/>
-              </a:rPr>
-              <a:t>https://github.com/stanford-crfm/helm/blob/v0.4.0/src/helm/benchmark/presentation/run_specs_cleva_v1.conf</a:t>
-            </a:r>
-          </a:p>
-          <a:p>
-            <a:pPr>
-              <a:lnSpc>
-                <a:spcPts val="940"/>
-              </a:lnSpc>
-              <a:spcAft>
-                <a:spcPts val="300"/>
-              </a:spcAft>
-              <a:buNone/>
-              <a:defRPr sz="810" b="0">
-                <a:solidFill>
-                  <a:srgbClr val="303437"/>
-                </a:solidFill>
-                <a:latin typeface="Noto Sans"/>
-              </a:defRPr>
-            </a:pPr>
-            <a:r>
-              <a:rPr sz="810" b="0" lang="ja-JP" altLang="en-US">
-                <a:solidFill>
-                  <a:srgbClr val="626669"/>
-                </a:solidFill>
-                <a:latin typeface="Noto Sans"/>
-                <a:ea typeface="Noto Sans CJK JP"/>
-                <a:cs typeface="Noto Sans"/>
-              </a:rPr>
-              <a:t>[2] Stanford CRFM. HELM Classic v0.4.0 public release / run index.</a:t>
-            </a:r>
-            <a:r>
-              <a:rPr sz="810" b="0" lang="ja-JP" altLang="en-US">
-                <a:solidFill>
-                  <a:srgbClr val="626669"/>
-                </a:solidFill>
-                <a:latin typeface="Noto Sans"/>
-                <a:ea typeface="Noto Sans CJK JP"/>
-                <a:cs typeface="Noto Sans"/>
-              </a:rPr>
-              <a:t>  </a:t>
-            </a:r>
-            <a:r>
-              <a:rPr sz="810" b="0" lang="ja-JP" altLang="en-US">
-                <a:solidFill>
-                  <a:srgbClr val="626669"/>
-                </a:solidFill>
-                <a:latin typeface="Noto Sans"/>
-                <a:ea typeface="Noto Sans CJK JP"/>
-                <a:cs typeface="Noto Sans"/>
-                <a:hlinkClick r:id="rId3"/>
-              </a:rPr>
-              <a:t>https://crfm.stanford.edu/helm/classic/v0.4.0/</a:t>
             </a:r>
           </a:p>
         </p:txBody>
@@ -38713,7 +32177,7 @@
                 <a:ea typeface="Noto Sans CJK JP"/>
                 <a:cs typeface="Noto Sans"/>
               </a:rPr>
-              <a:t>train.json / 行681 / idx 25　　緑：候補の名詞句　青：指定された代名詞</a:t>
+              <a:t>緑：候補の名詞句／青：指定された代名詞</a:t>
             </a:r>
           </a:p>
         </p:txBody>
@@ -38767,7 +32231,7 @@
                 <a:ea typeface="Noto Sans CJK JP"/>
                 <a:cs typeface="Noto Sans"/>
               </a:rPr>
-              <a:t>中国語：配布text全文と指定span</a:t>
+              <a:t>中国語：文章全文と指定された語句</a:t>
             </a:r>
           </a:p>
         </p:txBody>
@@ -39106,7 +32570,7 @@
                 <a:ea typeface="Noto Sans CJK JP"/>
                 <a:cs typeface="Noto Sans"/>
               </a:rPr>
-              <a:t>次第に、煮汁の中に塊がいくつもできた。それらをすくい上げて盆に入れて冷ますと、石けんがこの世に生まれた。</a:t>
+              <a:t>次第に、煮汁の中に塊がいくつもできた。それらをすくい上げてボウルに入れて冷ますと、石けんがこの世に生まれた。</a:t>
             </a:r>
           </a:p>
           <a:p>
@@ -39307,7 +32771,7 @@
                 <a:ea typeface="Noto Sans CJK JP"/>
                 <a:cs typeface="Noto Sans"/>
               </a:rPr>
-              <a:t>[1] CLUEbenchmark. CLUEWSC2020 / train.json / line 681 / idx 25.</a:t>
+              <a:t>[1] CLUEbenchmark. CLUEWSC2020 public data.</a:t>
             </a:r>
             <a:r>
               <a:rPr sz="810" b="0" lang="ja-JP" altLang="en-US">
@@ -39997,7 +33461,7 @@
                 <a:ea typeface="Noto Sans CJK JP"/>
                 <a:cs typeface="Noto Sans"/>
               </a:rPr>
-              <a:t>すくい上げて冷ます対象は、煮汁の中にできた塊。動作と対象の関係を読む。</a:t>
+              <a:t>すくい上げて冷ます対象は、煮汁の中にできた塊。「它们」は複数の塊を指すので、答えはtrueになる。</a:t>
             </a:r>
           </a:p>
           <a:p>
@@ -40027,7 +33491,7 @@
                 <a:ea typeface="Noto Sans CJK JP"/>
                 <a:cs typeface="Noto Sans"/>
               </a:rPr>
-              <a:t>同じ文には煮汁も出てくるが、指定された「它们」は複数の塊を受ける。ラベルは単語の一致ではなく、指示関係の一致を表す。</a:t>
+              <a:t>「煮汁」と「塊」の両方が出てくる文章で、代名詞と動作の対象を結び付ける問題になっている。</a:t>
             </a:r>
           </a:p>
           <a:p>
@@ -40057,7 +33521,7 @@
                 <a:ea typeface="Noto Sans CJK JP"/>
                 <a:cs typeface="Noto Sans"/>
               </a:rPr>
-              <a:t>この文章と対象の組は、HELMのCLEVAシナリオにも例として載る。元CLUE公開データの一件と、実装中の説明例を区別して示している。</a:t>
+              <a:t>この問題は、HELMにあるCLEVAの共参照解決シナリオでも説明例に使われている。</a:t>
             </a:r>
           </a:p>
         </p:txBody>
@@ -40159,7 +33623,7 @@
                 <a:ea typeface="Noto Sans CJK JP"/>
                 <a:cs typeface="Noto Sans"/>
               </a:rPr>
-              <a:t>[1] CLUEbenchmark. CLUEWSC2020 / train.json / line 681 / idx 25.</a:t>
+              <a:t>[1] CLUEbenchmark. CLUEWSC2020 public data.</a:t>
             </a:r>
             <a:r>
               <a:rPr sz="810" b="0" lang="ja-JP" altLang="en-US">
@@ -40305,7 +33769,7 @@
                 <a:ea typeface="Noto Sans CJK JP"/>
                 <a:cs typeface="Noto Sans"/>
               </a:rPr>
-              <a:t>実例2：招いた人と、招かれた人を分ける</a:t>
+              <a:t>実例2：同業者が招いたのは、准教授</a:t>
             </a:r>
           </a:p>
         </p:txBody>
@@ -40407,7 +33871,7 @@
                 <a:ea typeface="Noto Sans CJK JP"/>
                 <a:cs typeface="Noto Sans"/>
               </a:rPr>
-              <a:t>train.json / 行346 / idx 154　　緑：候補の名詞句　青：指定された代名詞</a:t>
+              <a:t>緑：候補の名詞句／青：指定された代名詞</a:t>
             </a:r>
           </a:p>
         </p:txBody>
@@ -40461,7 +33925,7 @@
                 <a:ea typeface="Noto Sans CJK JP"/>
                 <a:cs typeface="Noto Sans"/>
               </a:rPr>
-              <a:t>中国語：配布text全文と指定span</a:t>
+              <a:t>中国語：文章全文と指定された語句</a:t>
             </a:r>
           </a:p>
         </p:txBody>
@@ -40800,7 +34264,7 @@
                 <a:ea typeface="Noto Sans CJK JP"/>
                 <a:cs typeface="Noto Sans"/>
               </a:rPr>
-              <a:t>蒋盈波が以前所属していた教研室のある副教授が、学術行事に参加するためドイツへ行った。そこで中国系ドイツ人の同業者と知り合い、その同業者は自宅で彼を一度もてなした。話すうちに、双方は偶然の一致の多さと、世間の狭さに気付いた。</a:t>
+              <a:t>蒋盈波が以前所属していた教育・研究部門の准教授が、学術行事に参加するためドイツへ行った。そこで中国系ドイツ人の同業者と知り合い、その同業者は自宅で彼を一度もてなした。話すうちに、双方は偶然の一致の多さと、世間の狭さに気付いた。</a:t>
             </a:r>
           </a:p>
           <a:p>
@@ -41001,7 +34465,7 @@
                 <a:ea typeface="Noto Sans CJK JP"/>
                 <a:cs typeface="Noto Sans"/>
               </a:rPr>
-              <a:t>[1] CLUEbenchmark. CLUEWSC2020 / train.json / line 346 / idx 154.</a:t>
+              <a:t>[1] CLUEbenchmark. CLUEWSC2020 public data.</a:t>
             </a:r>
             <a:r>
               <a:rPr sz="810" b="0" lang="ja-JP" altLang="en-US">
@@ -41090,7 +34554,7 @@
                 <a:ea typeface="Noto Sans CJK JP"/>
                 <a:cs typeface="Noto Sans"/>
               </a:rPr>
-              <a:t>同業者が招いたのは、副教授</a:t>
+              <a:t>同業者が招いたのは、准教授</a:t>
             </a:r>
           </a:p>
         </p:txBody>
@@ -41143,7 +34607,7 @@
                 <a:ea typeface="Noto Sans CJK JP"/>
                 <a:cs typeface="Noto Sans"/>
               </a:rPr>
-              <a:t>自宅に招いたのは同業者で、招かれたのはドイツへ行った副教授。二人の役割を区別する。</a:t>
+              <a:t>自宅に招いたのは同業者で、招かれたのはドイツへ行った准教授。「他」が指す准教授と、候補の同業者は別人なのでfalseになる。</a:t>
             </a:r>
           </a:p>
           <a:p>
@@ -41173,7 +34637,7 @@
                 <a:ea typeface="Noto Sans CJK JP"/>
                 <a:cs typeface="Noto Sans"/>
               </a:rPr>
-              <a:t>同じ文章に蒋盈波、副教授、同業者が登場する。文の主語が変わっても、誰が誰を自宅へ招いたかを保つ必要がある。</a:t>
+              <a:t>蒋盈波、准教授、同業者という複数の人物が出てくる。誰が誰を招いたかを、文の主語が変わっても追う必要がある。</a:t>
             </a:r>
           </a:p>
           <a:p>
@@ -41203,7 +34667,7 @@
                 <a:ea typeface="Noto Sans CJK JP"/>
                 <a:cs typeface="Noto Sans"/>
               </a:rPr>
-              <a:t>この「同行」と「他」を問う組は、CLEVAの紙面例と一致する。元の一文からは複数の対象組を作れるため、文章だけでは一問を識別できない。</a:t>
+              <a:t>CLEVAの論文でも、この文章と二つの指定箇所が共参照解決の例に使われている。</a:t>
             </a:r>
           </a:p>
         </p:txBody>
@@ -41305,7 +34769,7 @@
                 <a:ea typeface="Noto Sans CJK JP"/>
                 <a:cs typeface="Noto Sans"/>
               </a:rPr>
-              <a:t>[1] CLUEbenchmark. CLUEWSC2020 / train.json / line 346 / idx 154.</a:t>
+              <a:t>[1] CLUEbenchmark. CLUEWSC2020 public data.</a:t>
             </a:r>
             <a:r>
               <a:rPr sz="810" b="0" lang="ja-JP" altLang="en-US">

--- a/slides/datasets-in-10-minutes-cluewsc2020.pptx
+++ b/slides/datasets-in-10-minutes-cluewsc2020.pptx
@@ -25,10 +25,8 @@
     <p:sldId id="274" r:id="rId24"/>
     <p:sldId id="275" r:id="rId25"/>
     <p:sldId id="276" r:id="rId26"/>
-    <p:sldId id="277" r:id="rId27"/>
     <p:sldId id="278" r:id="rId28"/>
     <p:sldId id="279" r:id="rId29"/>
-    <p:sldId id="280" r:id="rId30"/>
     <p:sldId id="282" r:id="rId32"/>
     <p:sldId id="283" r:id="rId33"/>
     <p:sldId id="284" r:id="rId34"/>
@@ -54,10 +52,8 @@
     <p:sldId id="307" r:id="rId57"/>
     <p:sldId id="308" r:id="rId58"/>
     <p:sldId id="311" r:id="rId61"/>
-    <p:sldId id="312" r:id="rId62"/>
     <p:sldId id="313" r:id="rId63"/>
     <p:sldId id="314" r:id="rId64"/>
-    <p:sldId id="315" r:id="rId65"/>
   </p:sldIdLst>
   <p:sldSz cx="9144000" cy="5143500" type="screen16x9"/>
   <p:notesSz cx="6858000" cy="9144000"/>
@@ -12074,36 +12070,6 @@
               <a:t>次のモデル性能は、構築時の2020年テスト290問に対する報告値。現在公開されているテストは2,574問に更新されている。</a:t>
             </a:r>
           </a:p>
-          <a:p>
-            <a:pPr marL="457200" indent="-355600">
-              <a:lnSpc>
-                <a:spcPts val="2320"/>
-              </a:lnSpc>
-              <a:spcAft>
-                <a:spcPts val="0"/>
-              </a:spcAft>
-              <a:buSzPct val="68205"/>
-              <a:buFont typeface="Noto Sans CJK JP"/>
-              <a:buChar char="●"/>
-              <a:defRPr sz="1950" b="0">
-                <a:solidFill>
-                  <a:srgbClr val="303437"/>
-                </a:solidFill>
-                <a:latin typeface="Noto Sans"/>
-              </a:defRPr>
-            </a:pPr>
-            <a:r>
-              <a:rPr sz="1950" b="0" lang="ja-JP" altLang="en-US">
-                <a:solidFill>
-                  <a:srgbClr val="303437"/>
-                </a:solidFill>
-                <a:latin typeface="Noto Sans"/>
-                <a:ea typeface="Noto Sans CJK JP"/>
-                <a:cs typeface="Noto Sans"/>
-              </a:rPr>
-              <a:t>CLEVAの共参照解決でも正答率を用い、言語モデルがプロンプトへ答える形で評価する。</a:t>
-            </a:r>
-          </a:p>
         </p:txBody>
       </p:sp>
       <p:sp>
@@ -12227,57 +12193,6 @@
                 <a:hlinkClick r:id="rId2"/>
               </a:rPr>
               <a:t>https://aclanthology.org/2020.coling-main.419/</a:t>
-            </a:r>
-          </a:p>
-          <a:p>
-            <a:pPr>
-              <a:lnSpc>
-                <a:spcPts val="940"/>
-              </a:lnSpc>
-              <a:spcAft>
-                <a:spcPts val="300"/>
-              </a:spcAft>
-              <a:buNone/>
-              <a:defRPr sz="810" b="0">
-                <a:solidFill>
-                  <a:srgbClr val="303437"/>
-                </a:solidFill>
-                <a:latin typeface="Noto Sans"/>
-              </a:defRPr>
-            </a:pPr>
-            <a:r>
-              <a:rPr sz="810" b="0" lang="ja-JP" altLang="en-US">
-                <a:solidFill>
-                  <a:srgbClr val="626669"/>
-                </a:solidFill>
-                <a:latin typeface="Noto Sans"/>
-                <a:ea typeface="Noto Sans CJK JP"/>
-                <a:cs typeface="Noto Sans"/>
-              </a:rPr>
-              <a:t>[2] Li et al. (2023). CLEVA: Chinese Language Models EVAluation Platform. EMNLP System Demonstrations.</a:t>
-            </a:r>
-            <a:r>
-              <a:rPr sz="810" b="0" lang="ja-JP" altLang="en-US">
-                <a:solidFill>
-                  <a:srgbClr val="626669"/>
-                </a:solidFill>
-                <a:latin typeface="Noto Sans"/>
-                <a:ea typeface="Noto Sans CJK JP"/>
-                <a:cs typeface="Noto Sans"/>
-              </a:rPr>
-              <a:t>  </a:t>
-            </a:r>
-            <a:r>
-              <a:rPr sz="810" b="0" lang="ja-JP" altLang="en-US">
-                <a:solidFill>
-                  <a:srgbClr val="626669"/>
-                </a:solidFill>
-                <a:latin typeface="Noto Sans"/>
-                <a:ea typeface="Noto Sans CJK JP"/>
-                <a:cs typeface="Noto Sans"/>
-                <a:hlinkClick r:id="rId3"/>
-              </a:rPr>
-              <a:t>https://aclanthology.org/2023.emnlp-demo.17/</a:t>
             </a:r>
           </a:p>
         </p:txBody>
@@ -13024,337 +12939,6 @@
 </p:sld>
 </file>
 
-<file path=ppt/slides/slide22.xml><?xml version="1.0" encoding="utf-8"?>
-<p:sld xmlns:a="http://schemas.openxmlformats.org/drawingml/2006/main" xmlns:p="http://schemas.openxmlformats.org/presentationml/2006/main" xmlns:r="http://schemas.openxmlformats.org/officeDocument/2006/relationships">
-  <p:cSld>
-    <p:spTree>
-      <p:nvGrpSpPr>
-        <p:cNvPr id="1" name=""/>
-        <p:cNvGrpSpPr/>
-        <p:nvPr/>
-      </p:nvGrpSpPr>
-      <p:grpSpPr/>
-      <p:sp>
-        <p:nvSpPr>
-          <p:cNvPr id="2" name="Title 1"/>
-          <p:cNvSpPr>
-            <a:spLocks noGrp="1"/>
-          </p:cNvSpPr>
-          <p:nvPr>
-            <p:ph type="title"/>
-          </p:nvPr>
-        </p:nvSpPr>
-        <p:spPr>
-          <a:xfrm>
-            <a:off x="468172" y="650138"/>
-            <a:ext cx="8206740" cy="616305"/>
-          </a:xfrm>
-        </p:spPr>
-        <p:txBody>
-          <a:bodyPr wrap="square" lIns="0" rIns="0" tIns="0" bIns="0">
-            <a:noAutofit/>
-          </a:bodyPr>
-          <a:lstStyle/>
-          <a:p>
-            <a:pPr algn="l">
-              <a:lnSpc>
-                <a:spcPct val="110000"/>
-              </a:lnSpc>
-              <a:buNone/>
-              <a:defRPr sz="2800" b="0">
-                <a:solidFill>
-                  <a:srgbClr val="303437"/>
-                </a:solidFill>
-                <a:latin typeface="Noto Sans"/>
-              </a:defRPr>
-            </a:pPr>
-            <a:r>
-              <a:rPr sz="2800" b="1" lang="ja-JP" altLang="en-US">
-                <a:solidFill>
-                  <a:srgbClr val="303437"/>
-                </a:solidFill>
-                <a:latin typeface="Noto Sans"/>
-                <a:ea typeface="Noto Sans CJK JP"/>
-                <a:cs typeface="Noto Sans"/>
-              </a:rPr>
-              <a:t>モデルは3回微調整し、開発成績で選ぶ</a:t>
-            </a:r>
-          </a:p>
-        </p:txBody>
-      </p:sp>
-      <p:sp>
-        <p:nvSpPr>
-          <p:cNvPr id="3" name="Text Placeholder 2"/>
-          <p:cNvSpPr>
-            <a:spLocks noGrp="1"/>
-          </p:cNvSpPr>
-          <p:nvPr>
-            <p:ph type="body" idx="1"/>
-          </p:nvPr>
-        </p:nvSpPr>
-        <p:spPr>
-          <a:xfrm>
-            <a:off x="594360" y="1463040"/>
-            <a:ext cx="7955279" cy="3044952"/>
-          </a:xfrm>
-        </p:spPr>
-        <p:txBody>
-          <a:bodyPr wrap="square" tIns="91440" bIns="91440">
-            <a:noAutofit/>
-          </a:bodyPr>
-          <a:lstStyle/>
-          <a:p>
-            <a:pPr marL="457200" indent="-355600">
-              <a:lnSpc>
-                <a:spcPts val="2261"/>
-              </a:lnSpc>
-              <a:spcAft>
-                <a:spcPts val="700"/>
-              </a:spcAft>
-              <a:buSzPct val="70000"/>
-              <a:buFont typeface="Noto Sans CJK JP"/>
-              <a:buChar char="●"/>
-              <a:defRPr sz="1900" b="0">
-                <a:solidFill>
-                  <a:srgbClr val="303437"/>
-                </a:solidFill>
-                <a:latin typeface="Noto Sans"/>
-              </a:defRPr>
-            </a:pPr>
-            <a:r>
-              <a:rPr sz="1900" b="0" lang="ja-JP" altLang="en-US">
-                <a:solidFill>
-                  <a:srgbClr val="303437"/>
-                </a:solidFill>
-                <a:latin typeface="Noto Sans"/>
-                <a:ea typeface="Noto Sans CJK JP"/>
-                <a:cs typeface="Noto Sans"/>
-              </a:rPr>
-              <a:t>各モデルを3回微調整し、開発データで最も良い成績を出したモデルのテスト値を報告した。</a:t>
-            </a:r>
-          </a:p>
-          <a:p>
-            <a:pPr marL="457200" indent="-355600">
-              <a:lnSpc>
-                <a:spcPts val="2261"/>
-              </a:lnSpc>
-              <a:spcAft>
-                <a:spcPts val="700"/>
-              </a:spcAft>
-              <a:buSzPct val="70000"/>
-              <a:buFont typeface="Noto Sans CJK JP"/>
-              <a:buChar char="●"/>
-              <a:defRPr sz="1900" b="0">
-                <a:solidFill>
-                  <a:srgbClr val="303437"/>
-                </a:solidFill>
-                <a:latin typeface="Noto Sans"/>
-              </a:defRPr>
-            </a:pPr>
-            <a:r>
-              <a:rPr sz="1900" b="0" lang="ja-JP" altLang="en-US">
-                <a:solidFill>
-                  <a:srgbClr val="303437"/>
-                </a:solidFill>
-                <a:latin typeface="Noto Sans"/>
-                <a:ea typeface="Noto Sans CJK JP"/>
-                <a:cs typeface="Noto Sans"/>
-              </a:rPr>
-              <a:t>この結果は、教師あり学習で指示関係を判定するモデルの歴史的な比較。後にCLEVAでは、生成モデルにプロンプトを与えて答えさせる課題としても利用された。</a:t>
-            </a:r>
-          </a:p>
-        </p:txBody>
-      </p:sp>
-      <p:sp>
-        <p:nvSpPr>
-          <p:cNvPr id="4" name="Title 3"/>
-          <p:cNvSpPr>
-            <a:spLocks noGrp="1"/>
-          </p:cNvSpPr>
-          <p:nvPr>
-            <p:ph type="title" idx="2"/>
-          </p:nvPr>
-        </p:nvSpPr>
-        <p:spPr>
-          <a:xfrm>
-            <a:off x="75895" y="0"/>
-            <a:ext cx="8115300" cy="480060"/>
-          </a:xfrm>
-        </p:spPr>
-        <p:txBody>
-          <a:bodyPr wrap="square" lIns="0" rIns="0" tIns="0" bIns="0" anchor="ctr">
-            <a:noAutofit/>
-          </a:bodyPr>
-          <a:lstStyle/>
-          <a:p>
-            <a:pPr algn="l">
-              <a:lnSpc>
-                <a:spcPct val="110000"/>
-              </a:lnSpc>
-              <a:buNone/>
-              <a:defRPr sz="1400" b="0">
-                <a:solidFill>
-                  <a:srgbClr val="303437"/>
-                </a:solidFill>
-                <a:latin typeface="Noto Sans"/>
-              </a:defRPr>
-            </a:pPr>
-            <a:r>
-              <a:rPr sz="1400" b="1" lang="ja-JP" altLang="en-US">
-                <a:solidFill>
-                  <a:srgbClr val="FFFEF8"/>
-                </a:solidFill>
-                <a:latin typeface="Noto Sans"/>
-                <a:ea typeface="Noto Sans CJK JP"/>
-                <a:cs typeface="Noto Sans"/>
-              </a:rPr>
-              <a:t>3. 評価と歴史的な性能</a:t>
-            </a:r>
-          </a:p>
-        </p:txBody>
-      </p:sp>
-      <p:sp>
-        <p:nvSpPr>
-          <p:cNvPr id="5" name="sources"/>
-          <p:cNvSpPr txBox="1"/>
-          <p:nvPr/>
-        </p:nvSpPr>
-        <p:spPr>
-          <a:xfrm>
-            <a:off x="502920" y="4517136"/>
-            <a:ext cx="8183879" cy="530352"/>
-          </a:xfrm>
-          <a:prstGeom prst="rect">
-            <a:avLst/>
-          </a:prstGeom>
-          <a:noFill/>
-        </p:spPr>
-        <p:txBody>
-          <a:bodyPr wrap="square" lIns="0" rIns="0" tIns="0" bIns="0">
-            <a:noAutofit/>
-          </a:bodyPr>
-          <a:lstStyle/>
-          <a:p>
-            <a:pPr algn="l">
-              <a:lnSpc>
-                <a:spcPts val="940"/>
-              </a:lnSpc>
-              <a:spcBef>
-                <a:spcPts val="0"/>
-              </a:spcBef>
-              <a:spcAft>
-                <a:spcPts val="300"/>
-              </a:spcAft>
-              <a:buNone/>
-              <a:defRPr sz="810" b="0">
-                <a:solidFill>
-                  <a:srgbClr val="303437"/>
-                </a:solidFill>
-                <a:latin typeface="Noto Sans"/>
-              </a:defRPr>
-            </a:pPr>
-            <a:r>
-              <a:rPr sz="810" b="0" lang="ja-JP" altLang="en-US">
-                <a:solidFill>
-                  <a:srgbClr val="626669"/>
-                </a:solidFill>
-                <a:latin typeface="Noto Sans"/>
-                <a:ea typeface="Noto Sans CJK JP"/>
-                <a:cs typeface="Noto Sans"/>
-              </a:rPr>
-              <a:t>[1] Xu et al. (2020). CLUE: A Chinese Language Understanding Evaluation Benchmark. COLING, pp.4762–4772.</a:t>
-            </a:r>
-            <a:r>
-              <a:rPr sz="810" b="0" lang="ja-JP" altLang="en-US">
-                <a:solidFill>
-                  <a:srgbClr val="626669"/>
-                </a:solidFill>
-                <a:latin typeface="Noto Sans"/>
-                <a:ea typeface="Noto Sans CJK JP"/>
-                <a:cs typeface="Noto Sans"/>
-              </a:rPr>
-              <a:t>  </a:t>
-            </a:r>
-            <a:r>
-              <a:rPr sz="810" b="0" lang="ja-JP" altLang="en-US">
-                <a:solidFill>
-                  <a:srgbClr val="626669"/>
-                </a:solidFill>
-                <a:latin typeface="Noto Sans"/>
-                <a:ea typeface="Noto Sans CJK JP"/>
-                <a:cs typeface="Noto Sans"/>
-                <a:hlinkClick r:id="rId2"/>
-              </a:rPr>
-              <a:t>https://aclanthology.org/2020.coling-main.419/</a:t>
-            </a:r>
-          </a:p>
-          <a:p>
-            <a:pPr>
-              <a:lnSpc>
-                <a:spcPts val="940"/>
-              </a:lnSpc>
-              <a:spcAft>
-                <a:spcPts val="300"/>
-              </a:spcAft>
-              <a:buNone/>
-              <a:defRPr sz="810" b="0">
-                <a:solidFill>
-                  <a:srgbClr val="303437"/>
-                </a:solidFill>
-                <a:latin typeface="Noto Sans"/>
-              </a:defRPr>
-            </a:pPr>
-            <a:r>
-              <a:rPr sz="810" b="0" lang="ja-JP" altLang="en-US">
-                <a:solidFill>
-                  <a:srgbClr val="626669"/>
-                </a:solidFill>
-                <a:latin typeface="Noto Sans"/>
-                <a:ea typeface="Noto Sans CJK JP"/>
-                <a:cs typeface="Noto Sans"/>
-              </a:rPr>
-              <a:t>[2] CLUE team. CLUEWSC2020: WSC Winograd模式挑战中文版，中文指代消解任务.</a:t>
-            </a:r>
-          </a:p>
-          <a:p>
-            <a:pPr>
-              <a:lnSpc>
-                <a:spcPts val="940"/>
-              </a:lnSpc>
-              <a:spcAft>
-                <a:spcPts val="300"/>
-              </a:spcAft>
-              <a:buNone/>
-              <a:defRPr sz="810" b="0">
-                <a:solidFill>
-                  <a:srgbClr val="303437"/>
-                </a:solidFill>
-                <a:latin typeface="Noto Sans"/>
-              </a:defRPr>
-            </a:pPr>
-            <a:r>
-              <a:rPr sz="810" b="0" lang="ja-JP" altLang="en-US">
-                <a:solidFill>
-                  <a:srgbClr val="626669"/>
-                </a:solidFill>
-                <a:latin typeface="Noto Sans"/>
-                <a:ea typeface="Noto Sans CJK JP"/>
-                <a:cs typeface="Noto Sans"/>
-                <a:hlinkClick r:id="rId3"/>
-              </a:rPr>
-              <a:t>https://github.com/CLUEbenchmark/CLUEWSC2020/blob/446646278671444c79a67e7434b3a1d1d1cbbe88/README.md</a:t>
-            </a:r>
-          </a:p>
-        </p:txBody>
-      </p:sp>
-    </p:spTree>
-  </p:cSld>
-  <p:clrMapOvr>
-    <a:masterClrMapping/>
-  </p:clrMapOvr>
-</p:sld>
-</file>
-
 <file path=ppt/slides/slide23.xml><?xml version="1.0" encoding="utf-8"?>
 <p:sld xmlns:a="http://schemas.openxmlformats.org/drawingml/2006/main" xmlns:p="http://schemas.openxmlformats.org/presentationml/2006/main" xmlns:r="http://schemas.openxmlformats.org/officeDocument/2006/relationships">
   <p:cSld>
@@ -13408,7 +12992,7 @@
                 <a:ea typeface="Noto Sans CJK JP"/>
                 <a:cs typeface="Noto Sans"/>
               </a:rPr>
-              <a:t>中国語の指示関係を、モデル評価へ</a:t>
+              <a:t>4. 課題の特徴と利用条件</a:t>
             </a:r>
           </a:p>
         </p:txBody>
@@ -13456,7 +13040,7 @@
                 <a:ea typeface="Noto Sans CJK JP"/>
                 <a:cs typeface="Noto Sans"/>
               </a:rPr>
-              <a:t>4. CLUEとCLEVAでの利用</a:t>
+              <a:t>4. 課題の特徴と利用条件</a:t>
             </a:r>
           </a:p>
         </p:txBody>
@@ -13683,7 +13267,7 @@
                 <a:ea typeface="Noto Sans CJK JP"/>
                 <a:cs typeface="Noto Sans"/>
               </a:rPr>
-              <a:t>4. CLUEとCLEVAでの利用</a:t>
+              <a:t>4. 課題の特徴と利用条件</a:t>
             </a:r>
           </a:p>
         </p:txBody>
@@ -13812,367 +13396,6 @@
                 <a:hlinkClick r:id="rId3"/>
               </a:rPr>
               <a:t>https://aclanthology.org/2020.coling-main.419/</a:t>
-            </a:r>
-          </a:p>
-        </p:txBody>
-      </p:sp>
-    </p:spTree>
-  </p:cSld>
-  <p:clrMapOvr>
-    <a:masterClrMapping/>
-  </p:clrMapOvr>
-</p:sld>
-</file>
-
-<file path=ppt/slides/slide25.xml><?xml version="1.0" encoding="utf-8"?>
-<p:sld xmlns:a="http://schemas.openxmlformats.org/drawingml/2006/main" xmlns:p="http://schemas.openxmlformats.org/presentationml/2006/main" xmlns:r="http://schemas.openxmlformats.org/officeDocument/2006/relationships">
-  <p:cSld>
-    <p:spTree>
-      <p:nvGrpSpPr>
-        <p:cNvPr id="1" name=""/>
-        <p:cNvGrpSpPr/>
-        <p:nvPr/>
-      </p:nvGrpSpPr>
-      <p:grpSpPr/>
-      <p:sp>
-        <p:nvSpPr>
-          <p:cNvPr id="2" name="Title 1"/>
-          <p:cNvSpPr>
-            <a:spLocks noGrp="1"/>
-          </p:cNvSpPr>
-          <p:nvPr>
-            <p:ph type="title"/>
-          </p:nvPr>
-        </p:nvSpPr>
-        <p:spPr>
-          <a:xfrm>
-            <a:off x="468172" y="650138"/>
-            <a:ext cx="8206740" cy="616305"/>
-          </a:xfrm>
-        </p:spPr>
-        <p:txBody>
-          <a:bodyPr wrap="square" lIns="0" rIns="0" tIns="0" bIns="0">
-            <a:noAutofit/>
-          </a:bodyPr>
-          <a:lstStyle/>
-          <a:p>
-            <a:pPr algn="l">
-              <a:lnSpc>
-                <a:spcPct val="110000"/>
-              </a:lnSpc>
-              <a:buNone/>
-              <a:defRPr sz="2800" b="0">
-                <a:solidFill>
-                  <a:srgbClr val="303437"/>
-                </a:solidFill>
-                <a:latin typeface="Noto Sans"/>
-              </a:defRPr>
-            </a:pPr>
-            <a:r>
-              <a:rPr sz="2800" b="1" lang="ja-JP" altLang="en-US">
-                <a:solidFill>
-                  <a:srgbClr val="303437"/>
-                </a:solidFill>
-                <a:latin typeface="Noto Sans"/>
-                <a:ea typeface="Noto Sans CJK JP"/>
-                <a:cs typeface="Noto Sans"/>
-              </a:rPr>
-              <a:t>CLEVAは、CLUEWSCから問題を採用</a:t>
-            </a:r>
-          </a:p>
-        </p:txBody>
-      </p:sp>
-      <p:sp>
-        <p:nvSpPr>
-          <p:cNvPr id="3" name="Text Placeholder 2"/>
-          <p:cNvSpPr>
-            <a:spLocks noGrp="1"/>
-          </p:cNvSpPr>
-          <p:nvPr>
-            <p:ph type="body" idx="1"/>
-          </p:nvPr>
-        </p:nvSpPr>
-        <p:spPr>
-          <a:xfrm>
-            <a:off x="594360" y="1463040"/>
-            <a:ext cx="7955279" cy="3044952"/>
-          </a:xfrm>
-        </p:spPr>
-        <p:txBody>
-          <a:bodyPr wrap="square" tIns="91440" bIns="91440">
-            <a:noAutofit/>
-          </a:bodyPr>
-          <a:lstStyle/>
-          <a:p>
-            <a:pPr marL="457200" indent="-355600">
-              <a:lnSpc>
-                <a:spcPts val="2261"/>
-              </a:lnSpc>
-              <a:spcAft>
-                <a:spcPts val="700"/>
-              </a:spcAft>
-              <a:buSzPct val="70000"/>
-              <a:buFont typeface="Noto Sans CJK JP"/>
-              <a:buChar char="●"/>
-              <a:defRPr sz="1900" b="0">
-                <a:solidFill>
-                  <a:srgbClr val="303437"/>
-                </a:solidFill>
-                <a:latin typeface="Noto Sans"/>
-              </a:defRPr>
-            </a:pPr>
-            <a:r>
-              <a:rPr sz="1900" b="0" lang="ja-JP" altLang="en-US">
-                <a:solidFill>
-                  <a:srgbClr val="303437"/>
-                </a:solidFill>
-                <a:latin typeface="Noto Sans"/>
-                <a:ea typeface="Noto Sans CJK JP"/>
-                <a:cs typeface="Noto Sans"/>
-              </a:rPr>
-              <a:t>CLEVAは、CLUEWSCから抽出した問題を共参照解決の評価に使う。論文に掲載された例が、本資料の実例2に当たる。</a:t>
-            </a:r>
-          </a:p>
-          <a:p>
-            <a:pPr marL="457200" indent="-355600">
-              <a:lnSpc>
-                <a:spcPts val="2261"/>
-              </a:lnSpc>
-              <a:spcAft>
-                <a:spcPts val="700"/>
-              </a:spcAft>
-              <a:buSzPct val="70000"/>
-              <a:buFont typeface="Noto Sans CJK JP"/>
-              <a:buChar char="●"/>
-              <a:defRPr sz="1900" b="0">
-                <a:solidFill>
-                  <a:srgbClr val="303437"/>
-                </a:solidFill>
-                <a:latin typeface="Noto Sans"/>
-              </a:defRPr>
-            </a:pPr>
-            <a:r>
-              <a:rPr sz="1900" b="0" lang="ja-JP" altLang="en-US">
-                <a:solidFill>
-                  <a:srgbClr val="303437"/>
-                </a:solidFill>
-                <a:latin typeface="Noto Sans"/>
-                <a:ea typeface="Noto Sans CJK JP"/>
-                <a:cs typeface="Noto Sans"/>
-              </a:rPr>
-              <a:t>HELMのCLEVA実装では、プロンプトに文章と問いを組み込み、回答候補を用意する。実例1は「不是／是」の二候補を使う説明例として載っている。</a:t>
-            </a:r>
-          </a:p>
-          <a:p>
-            <a:pPr marL="457200" indent="-355600">
-              <a:lnSpc>
-                <a:spcPts val="2261"/>
-              </a:lnSpc>
-              <a:spcAft>
-                <a:spcPts val="0"/>
-              </a:spcAft>
-              <a:buSzPct val="70000"/>
-              <a:buFont typeface="Noto Sans CJK JP"/>
-              <a:buChar char="●"/>
-              <a:defRPr sz="1900" b="0">
-                <a:solidFill>
-                  <a:srgbClr val="303437"/>
-                </a:solidFill>
-                <a:latin typeface="Noto Sans"/>
-              </a:defRPr>
-            </a:pPr>
-            <a:r>
-              <a:rPr sz="1900" b="0" lang="ja-JP" altLang="en-US">
-                <a:solidFill>
-                  <a:srgbClr val="303437"/>
-                </a:solidFill>
-                <a:latin typeface="Noto Sans"/>
-                <a:ea typeface="Noto Sans CJK JP"/>
-                <a:cs typeface="Noto Sans"/>
-              </a:rPr>
-              <a:t>CLEVAで選定された全問題や推論条件の詳細は確認できないため、ここでは元のCLUEWSC2020の構成と、公開されている利用方法を紹介する。</a:t>
-            </a:r>
-          </a:p>
-        </p:txBody>
-      </p:sp>
-      <p:sp>
-        <p:nvSpPr>
-          <p:cNvPr id="4" name="Title 3"/>
-          <p:cNvSpPr>
-            <a:spLocks noGrp="1"/>
-          </p:cNvSpPr>
-          <p:nvPr>
-            <p:ph type="title" idx="2"/>
-          </p:nvPr>
-        </p:nvSpPr>
-        <p:spPr>
-          <a:xfrm>
-            <a:off x="75895" y="0"/>
-            <a:ext cx="8115300" cy="480060"/>
-          </a:xfrm>
-        </p:spPr>
-        <p:txBody>
-          <a:bodyPr wrap="square" lIns="0" rIns="0" tIns="0" bIns="0" anchor="ctr">
-            <a:noAutofit/>
-          </a:bodyPr>
-          <a:lstStyle/>
-          <a:p>
-            <a:pPr algn="l">
-              <a:lnSpc>
-                <a:spcPct val="110000"/>
-              </a:lnSpc>
-              <a:buNone/>
-              <a:defRPr sz="1400" b="0">
-                <a:solidFill>
-                  <a:srgbClr val="303437"/>
-                </a:solidFill>
-                <a:latin typeface="Noto Sans"/>
-              </a:defRPr>
-            </a:pPr>
-            <a:r>
-              <a:rPr sz="1400" b="1" lang="ja-JP" altLang="en-US">
-                <a:solidFill>
-                  <a:srgbClr val="FFFEF8"/>
-                </a:solidFill>
-                <a:latin typeface="Noto Sans"/>
-                <a:ea typeface="Noto Sans CJK JP"/>
-                <a:cs typeface="Noto Sans"/>
-              </a:rPr>
-              <a:t>4. CLUEとCLEVAでの利用</a:t>
-            </a:r>
-          </a:p>
-        </p:txBody>
-      </p:sp>
-      <p:sp>
-        <p:nvSpPr>
-          <p:cNvPr id="5" name="sources"/>
-          <p:cNvSpPr txBox="1"/>
-          <p:nvPr/>
-        </p:nvSpPr>
-        <p:spPr>
-          <a:xfrm>
-            <a:off x="502920" y="4517136"/>
-            <a:ext cx="8183879" cy="530352"/>
-          </a:xfrm>
-          <a:prstGeom prst="rect">
-            <a:avLst/>
-          </a:prstGeom>
-          <a:noFill/>
-        </p:spPr>
-        <p:txBody>
-          <a:bodyPr wrap="square" lIns="0" rIns="0" tIns="0" bIns="0">
-            <a:noAutofit/>
-          </a:bodyPr>
-          <a:lstStyle/>
-          <a:p>
-            <a:pPr algn="l">
-              <a:lnSpc>
-                <a:spcPts val="940"/>
-              </a:lnSpc>
-              <a:spcBef>
-                <a:spcPts val="0"/>
-              </a:spcBef>
-              <a:spcAft>
-                <a:spcPts val="300"/>
-              </a:spcAft>
-              <a:buNone/>
-              <a:defRPr sz="810" b="0">
-                <a:solidFill>
-                  <a:srgbClr val="303437"/>
-                </a:solidFill>
-                <a:latin typeface="Noto Sans"/>
-              </a:defRPr>
-            </a:pPr>
-            <a:r>
-              <a:rPr sz="810" b="0" lang="ja-JP" altLang="en-US">
-                <a:solidFill>
-                  <a:srgbClr val="626669"/>
-                </a:solidFill>
-                <a:latin typeface="Noto Sans"/>
-                <a:ea typeface="Noto Sans CJK JP"/>
-                <a:cs typeface="Noto Sans"/>
-              </a:rPr>
-              <a:t>[1] Li et al. (2023). CLEVA: Chinese Language Models EVAluation Platform. EMNLP System Demonstrations.</a:t>
-            </a:r>
-            <a:r>
-              <a:rPr sz="810" b="0" lang="ja-JP" altLang="en-US">
-                <a:solidFill>
-                  <a:srgbClr val="626669"/>
-                </a:solidFill>
-                <a:latin typeface="Noto Sans"/>
-                <a:ea typeface="Noto Sans CJK JP"/>
-                <a:cs typeface="Noto Sans"/>
-              </a:rPr>
-              <a:t>  </a:t>
-            </a:r>
-            <a:r>
-              <a:rPr sz="810" b="0" lang="ja-JP" altLang="en-US">
-                <a:solidFill>
-                  <a:srgbClr val="626669"/>
-                </a:solidFill>
-                <a:latin typeface="Noto Sans"/>
-                <a:ea typeface="Noto Sans CJK JP"/>
-                <a:cs typeface="Noto Sans"/>
-                <a:hlinkClick r:id="rId2"/>
-              </a:rPr>
-              <a:t>https://aclanthology.org/2023.emnlp-demo.17/</a:t>
-            </a:r>
-          </a:p>
-          <a:p>
-            <a:pPr>
-              <a:lnSpc>
-                <a:spcPts val="940"/>
-              </a:lnSpc>
-              <a:spcAft>
-                <a:spcPts val="300"/>
-              </a:spcAft>
-              <a:buNone/>
-              <a:defRPr sz="810" b="0">
-                <a:solidFill>
-                  <a:srgbClr val="303437"/>
-                </a:solidFill>
-                <a:latin typeface="Noto Sans"/>
-              </a:defRPr>
-            </a:pPr>
-            <a:r>
-              <a:rPr sz="810" b="0" lang="ja-JP" altLang="en-US">
-                <a:solidFill>
-                  <a:srgbClr val="626669"/>
-                </a:solidFill>
-                <a:latin typeface="Noto Sans"/>
-                <a:ea typeface="Noto Sans CJK JP"/>
-                <a:cs typeface="Noto Sans"/>
-              </a:rPr>
-              <a:t>[2] Stanford CRFM. CLEVACoreferenceResolutionScenario / Converter. HELM v0.4.0.</a:t>
-            </a:r>
-          </a:p>
-          <a:p>
-            <a:pPr>
-              <a:lnSpc>
-                <a:spcPts val="940"/>
-              </a:lnSpc>
-              <a:spcAft>
-                <a:spcPts val="300"/>
-              </a:spcAft>
-              <a:buNone/>
-              <a:defRPr sz="810" b="0">
-                <a:solidFill>
-                  <a:srgbClr val="303437"/>
-                </a:solidFill>
-                <a:latin typeface="Noto Sans"/>
-              </a:defRPr>
-            </a:pPr>
-            <a:r>
-              <a:rPr sz="810" b="0" lang="ja-JP" altLang="en-US">
-                <a:solidFill>
-                  <a:srgbClr val="626669"/>
-                </a:solidFill>
-                <a:latin typeface="Noto Sans"/>
-                <a:ea typeface="Noto Sans CJK JP"/>
-                <a:cs typeface="Noto Sans"/>
-                <a:hlinkClick r:id="rId3"/>
-              </a:rPr>
-              <a:t>https://github.com/stanford-crfm/helm/blob/v0.4.0/src/helm/benchmark/scenarios/cleva_scenario.py</a:t>
             </a:r>
           </a:p>
         </p:txBody>
@@ -14369,7 +13592,7 @@
                 <a:ea typeface="Noto Sans CJK JP"/>
                 <a:cs typeface="Noto Sans"/>
               </a:rPr>
-              <a:t>4. CLUEとCLEVAでの利用</a:t>
+              <a:t>4. 課題の特徴と利用条件</a:t>
             </a:r>
           </a:p>
         </p:txBody>
@@ -14682,7 +13905,7 @@
                 <a:ea typeface="Noto Sans CJK JP"/>
                 <a:cs typeface="Noto Sans"/>
               </a:rPr>
-              <a:t>構築時のテストでは最良モデルの正答率が81.38％、100問の人手評価は多数決で98％だった。中国語理解の課題として、CLUEからCLEVAへと利用が広がった。</a:t>
+              <a:t>構築時のテストでは最良モデルの正答率が81.38％、100問の人手評価は多数決で98％だった。文章と指定された二つの語句を合わせて、中国語の文脈理解を調べる。</a:t>
             </a:r>
           </a:p>
         </p:txBody>
@@ -14730,7 +13953,7 @@
                 <a:ea typeface="Noto Sans CJK JP"/>
                 <a:cs typeface="Noto Sans"/>
               </a:rPr>
-              <a:t>4. CLUEとCLEVAでの利用</a:t>
+              <a:t>4. 課題の特徴と利用条件</a:t>
             </a:r>
           </a:p>
         </p:txBody>
@@ -15130,7 +14353,7 @@
                 <a:ea typeface="Noto Sans CJK JP"/>
                 <a:cs typeface="Noto Sans"/>
               </a:rPr>
-              <a:t>CLUEとCLEVAでの利用</a:t>
+              <a:t>課題の特徴と利用条件</a:t>
             </a:r>
           </a:p>
         </p:txBody>
@@ -28100,7 +27323,7 @@
                 <a:ea typeface="Noto Sans CJK JP"/>
                 <a:cs typeface="Noto Sans"/>
               </a:rPr>
-              <a:t>2020年にCLUEの新しい指示関係課題として公開され、後にCLEVAの共参照解決にも採用された。</a:t>
+              <a:t>CLUEチームが2020年に公開した、中国語の自然な文脈で指示関係を調べる課題である。</a:t>
             </a:r>
           </a:p>
         </p:txBody>
@@ -28232,57 +27455,6 @@
                 <a:hlinkClick r:id="rId2"/>
               </a:rPr>
               <a:t>https://github.com/CLUEbenchmark/CLUEWSC2020/blob/446646278671444c79a67e7434b3a1d1d1cbbe88/README.md</a:t>
-            </a:r>
-          </a:p>
-          <a:p>
-            <a:pPr>
-              <a:lnSpc>
-                <a:spcPts val="940"/>
-              </a:lnSpc>
-              <a:spcAft>
-                <a:spcPts val="300"/>
-              </a:spcAft>
-              <a:buNone/>
-              <a:defRPr sz="810" b="0">
-                <a:solidFill>
-                  <a:srgbClr val="303437"/>
-                </a:solidFill>
-                <a:latin typeface="Noto Sans"/>
-              </a:defRPr>
-            </a:pPr>
-            <a:r>
-              <a:rPr sz="810" b="0" lang="ja-JP" altLang="en-US">
-                <a:solidFill>
-                  <a:srgbClr val="626669"/>
-                </a:solidFill>
-                <a:latin typeface="Noto Sans"/>
-                <a:ea typeface="Noto Sans CJK JP"/>
-                <a:cs typeface="Noto Sans"/>
-              </a:rPr>
-              <a:t>[2] Li et al. (2023). CLEVA: Chinese Language Models EVAluation Platform. EMNLP System Demonstrations.</a:t>
-            </a:r>
-            <a:r>
-              <a:rPr sz="810" b="0" lang="ja-JP" altLang="en-US">
-                <a:solidFill>
-                  <a:srgbClr val="626669"/>
-                </a:solidFill>
-                <a:latin typeface="Noto Sans"/>
-                <a:ea typeface="Noto Sans CJK JP"/>
-                <a:cs typeface="Noto Sans"/>
-              </a:rPr>
-              <a:t>  </a:t>
-            </a:r>
-            <a:r>
-              <a:rPr sz="810" b="0" lang="ja-JP" altLang="en-US">
-                <a:solidFill>
-                  <a:srgbClr val="626669"/>
-                </a:solidFill>
-                <a:latin typeface="Noto Sans"/>
-                <a:ea typeface="Noto Sans CJK JP"/>
-                <a:cs typeface="Noto Sans"/>
-                <a:hlinkClick r:id="rId3"/>
-              </a:rPr>
-              <a:t>https://aclanthology.org/2023.emnlp-demo.17/</a:t>
             </a:r>
           </a:p>
         </p:txBody>
@@ -28348,7 +27520,7 @@
                 <a:ea typeface="Noto Sans CJK JP"/>
                 <a:cs typeface="Noto Sans"/>
               </a:rPr>
-              <a:t>正式論文で報告された9モデルの精度</a:t>
+              <a:t>2020年：モデル別のテスト正答率（1/2）</a:t>
             </a:r>
           </a:p>
         </p:txBody>
@@ -29110,7 +28282,7 @@
                 <a:ea typeface="Noto Sans CJK JP"/>
                 <a:cs typeface="Noto Sans"/>
               </a:rPr>
-              <a:t>2020年のテスト290問に対する正答率。3回の微調整から、開発成績が最良のモデルを選択。</a:t>
+              <a:t>2020年のテスト290問に対する正答率。開発成績に基づいて選んだモデルを評価。</a:t>
             </a:r>
           </a:p>
         </p:txBody>
@@ -29253,7 +28425,7 @@
                 <a:ea typeface="Noto Sans CJK JP"/>
                 <a:cs typeface="Noto Sans"/>
               </a:rPr>
-              <a:t>正式論文で報告された9モデルの精度</a:t>
+              <a:t>2020年：モデル別のテスト正答率（2/2）</a:t>
             </a:r>
           </a:p>
         </p:txBody>
@@ -29913,7 +29085,7 @@
                 <a:ea typeface="Noto Sans CJK JP"/>
                 <a:cs typeface="Noto Sans"/>
               </a:rPr>
-              <a:t>2020年のテスト290問に対する正答率。3回の微調整から、開発成績が最良のモデルを選択。</a:t>
+              <a:t>2020年のテスト290問に対する正答率。開発成績に基づいて選んだモデルを評価。</a:t>
             </a:r>
           </a:p>
         </p:txBody>
@@ -30117,7 +29289,7 @@
         </p:nvSpPr>
         <p:spPr>
           <a:xfrm>
-            <a:off x="548640" y="1536192"/>
+            <a:off x="548640" y="1510792"/>
             <a:ext cx="8046720" cy="1673352"/>
           </a:xfrm>
           <a:prstGeom prst="rect">
@@ -30146,7 +29318,7 @@
           </a:fontRef>
         </p:style>
         <p:txBody>
-          <a:bodyPr rtlCol="0" anchor="t" wrap="none" lIns="152400" rIns="152400" tIns="54525" bIns="127000">
+          <a:bodyPr rtlCol="0" anchor="t" wrap="none" lIns="152400" rIns="152400" tIns="79925" bIns="127000">
             <a:noAutofit/>
           </a:bodyPr>
           <a:lstStyle/>
@@ -30610,310 +29782,6 @@
                 <a:cs typeface="Noto Sans"/>
               </a:rPr>
               <a:t>Appendix: 3. 研究と参考文献</a:t>
-            </a:r>
-          </a:p>
-        </p:txBody>
-      </p:sp>
-    </p:spTree>
-  </p:cSld>
-  <p:clrMapOvr>
-    <a:masterClrMapping/>
-  </p:clrMapOvr>
-</p:sld>
-</file>
-
-<file path=ppt/slides/slide57.xml><?xml version="1.0" encoding="utf-8"?>
-<p:sld xmlns:a="http://schemas.openxmlformats.org/drawingml/2006/main" xmlns:p="http://schemas.openxmlformats.org/presentationml/2006/main" xmlns:r="http://schemas.openxmlformats.org/officeDocument/2006/relationships">
-  <p:cSld>
-    <p:spTree>
-      <p:nvGrpSpPr>
-        <p:cNvPr id="1" name=""/>
-        <p:cNvGrpSpPr/>
-        <p:nvPr/>
-      </p:nvGrpSpPr>
-      <p:grpSpPr/>
-      <p:sp>
-        <p:nvSpPr>
-          <p:cNvPr id="2" name="Title 1"/>
-          <p:cNvSpPr>
-            <a:spLocks noGrp="1"/>
-          </p:cNvSpPr>
-          <p:nvPr>
-            <p:ph type="title"/>
-          </p:nvPr>
-        </p:nvSpPr>
-        <p:spPr>
-          <a:xfrm>
-            <a:off x="468172" y="650138"/>
-            <a:ext cx="8206740" cy="616305"/>
-          </a:xfrm>
-        </p:spPr>
-        <p:txBody>
-          <a:bodyPr wrap="square" lIns="0" rIns="0" tIns="0" bIns="0">
-            <a:noAutofit/>
-          </a:bodyPr>
-          <a:lstStyle/>
-          <a:p>
-            <a:pPr algn="l">
-              <a:lnSpc>
-                <a:spcPct val="110000"/>
-              </a:lnSpc>
-              <a:buNone/>
-              <a:defRPr sz="2800" b="0">
-                <a:solidFill>
-                  <a:srgbClr val="303437"/>
-                </a:solidFill>
-                <a:latin typeface="Noto Sans"/>
-              </a:defRPr>
-            </a:pPr>
-            <a:r>
-              <a:rPr sz="2800" b="1" lang="ja-JP" altLang="en-US">
-                <a:solidFill>
-                  <a:srgbClr val="303437"/>
-                </a:solidFill>
-                <a:latin typeface="Noto Sans"/>
-                <a:ea typeface="Noto Sans CJK JP"/>
-                <a:cs typeface="Noto Sans"/>
-              </a:rPr>
-              <a:t>中国語の言語理解を、共通の基盤で測る</a:t>
-            </a:r>
-          </a:p>
-        </p:txBody>
-      </p:sp>
-      <p:sp>
-        <p:nvSpPr>
-          <p:cNvPr id="3" name="Text Placeholder 2"/>
-          <p:cNvSpPr>
-            <a:spLocks noGrp="1"/>
-          </p:cNvSpPr>
-          <p:nvPr>
-            <p:ph type="body" idx="1"/>
-          </p:nvPr>
-        </p:nvSpPr>
-        <p:spPr>
-          <a:xfrm>
-            <a:off x="594360" y="1463040"/>
-            <a:ext cx="7955279" cy="3044952"/>
-          </a:xfrm>
-        </p:spPr>
-        <p:txBody>
-          <a:bodyPr wrap="square" tIns="91440" bIns="91440">
-            <a:noAutofit/>
-          </a:bodyPr>
-          <a:lstStyle/>
-          <a:p>
-            <a:pPr marL="457200" indent="-355600">
-              <a:lnSpc>
-                <a:spcPts val="2320"/>
-              </a:lnSpc>
-              <a:spcAft>
-                <a:spcPts val="700"/>
-              </a:spcAft>
-              <a:buSzPct val="68205"/>
-              <a:buFont typeface="Noto Sans CJK JP"/>
-              <a:buChar char="●"/>
-              <a:defRPr sz="1950" b="0">
-                <a:solidFill>
-                  <a:srgbClr val="303437"/>
-                </a:solidFill>
-                <a:latin typeface="Noto Sans"/>
-              </a:defRPr>
-            </a:pPr>
-            <a:r>
-              <a:rPr sz="1950" b="0" lang="ja-JP" altLang="en-US">
-                <a:solidFill>
-                  <a:srgbClr val="303437"/>
-                </a:solidFill>
-                <a:latin typeface="Noto Sans"/>
-                <a:ea typeface="Noto Sans CJK JP"/>
-                <a:cs typeface="Noto Sans"/>
-              </a:rPr>
-              <a:t>CLUEチームは、Liang Xu、Hai Hu、Xuanwei Zhangらによる共同プロジェクト。COLING 2020では9種類の中国語理解課題と事前学習モデルの比較を示した。</a:t>
-            </a:r>
-          </a:p>
-          <a:p>
-            <a:pPr marL="457200" indent="-355600">
-              <a:lnSpc>
-                <a:spcPts val="2320"/>
-              </a:lnSpc>
-              <a:spcAft>
-                <a:spcPts val="700"/>
-              </a:spcAft>
-              <a:buSzPct val="68205"/>
-              <a:buFont typeface="Noto Sans CJK JP"/>
-              <a:buChar char="●"/>
-              <a:defRPr sz="1950" b="0">
-                <a:solidFill>
-                  <a:srgbClr val="303437"/>
-                </a:solidFill>
-                <a:latin typeface="Noto Sans"/>
-              </a:defRPr>
-            </a:pPr>
-            <a:r>
-              <a:rPr sz="1950" b="0" lang="ja-JP" altLang="en-US">
-                <a:solidFill>
-                  <a:srgbClr val="303437"/>
-                </a:solidFill>
-                <a:latin typeface="Noto Sans"/>
-                <a:ea typeface="Noto Sans CJK JP"/>
-                <a:cs typeface="Noto Sans"/>
-              </a:rPr>
-              <a:t>CLUEWSC2020はそのうち、指定された代名詞の指示対象を判定する課題。英語中心の評価基盤を補い、中国語の自然な文脈で理解を測る位置付けを持つ。</a:t>
-            </a:r>
-          </a:p>
-          <a:p>
-            <a:pPr marL="457200" indent="-355600">
-              <a:lnSpc>
-                <a:spcPts val="2320"/>
-              </a:lnSpc>
-              <a:spcAft>
-                <a:spcPts val="0"/>
-              </a:spcAft>
-              <a:buSzPct val="68205"/>
-              <a:buFont typeface="Noto Sans CJK JP"/>
-              <a:buChar char="●"/>
-              <a:defRPr sz="1950" b="0">
-                <a:solidFill>
-                  <a:srgbClr val="303437"/>
-                </a:solidFill>
-                <a:latin typeface="Noto Sans"/>
-              </a:defRPr>
-            </a:pPr>
-            <a:r>
-              <a:rPr sz="1950" b="0" lang="ja-JP" altLang="en-US">
-                <a:solidFill>
-                  <a:srgbClr val="303437"/>
-                </a:solidFill>
-                <a:latin typeface="Noto Sans"/>
-                <a:ea typeface="Noto Sans CJK JP"/>
-                <a:cs typeface="Noto Sans"/>
-              </a:rPr>
-              <a:t>元WSCの発想、CLUEでの中国語データ整備、CLEVAでの言語モデル評価という、異なる段階の取り組みがつながっている。</a:t>
-            </a:r>
-          </a:p>
-        </p:txBody>
-      </p:sp>
-      <p:sp>
-        <p:nvSpPr>
-          <p:cNvPr id="4" name="Title 3"/>
-          <p:cNvSpPr>
-            <a:spLocks noGrp="1"/>
-          </p:cNvSpPr>
-          <p:nvPr>
-            <p:ph type="title" idx="2"/>
-          </p:nvPr>
-        </p:nvSpPr>
-        <p:spPr>
-          <a:xfrm>
-            <a:off x="75895" y="0"/>
-            <a:ext cx="8115300" cy="480060"/>
-          </a:xfrm>
-        </p:spPr>
-        <p:txBody>
-          <a:bodyPr wrap="square" lIns="0" rIns="0" tIns="0" bIns="0" anchor="ctr">
-            <a:noAutofit/>
-          </a:bodyPr>
-          <a:lstStyle/>
-          <a:p>
-            <a:pPr algn="l">
-              <a:lnSpc>
-                <a:spcPct val="110000"/>
-              </a:lnSpc>
-              <a:buNone/>
-              <a:defRPr sz="1400" b="0">
-                <a:solidFill>
-                  <a:srgbClr val="303437"/>
-                </a:solidFill>
-                <a:latin typeface="Noto Sans"/>
-              </a:defRPr>
-            </a:pPr>
-            <a:r>
-              <a:rPr sz="1400" b="1" lang="ja-JP" altLang="en-US">
-                <a:solidFill>
-                  <a:srgbClr val="FFFEF8"/>
-                </a:solidFill>
-                <a:latin typeface="Noto Sans"/>
-                <a:ea typeface="Noto Sans CJK JP"/>
-                <a:cs typeface="Noto Sans"/>
-              </a:rPr>
-              <a:t>Appendix: 3. 研究と参考文献</a:t>
-            </a:r>
-          </a:p>
-        </p:txBody>
-      </p:sp>
-      <p:sp>
-        <p:nvSpPr>
-          <p:cNvPr id="5" name="sources"/>
-          <p:cNvSpPr txBox="1"/>
-          <p:nvPr/>
-        </p:nvSpPr>
-        <p:spPr>
-          <a:xfrm>
-            <a:off x="502920" y="4700016"/>
-            <a:ext cx="8183879" cy="530352"/>
-          </a:xfrm>
-          <a:prstGeom prst="rect">
-            <a:avLst/>
-          </a:prstGeom>
-          <a:noFill/>
-        </p:spPr>
-        <p:txBody>
-          <a:bodyPr wrap="square" lIns="0" rIns="0" tIns="0" bIns="0">
-            <a:noAutofit/>
-          </a:bodyPr>
-          <a:lstStyle/>
-          <a:p>
-            <a:pPr algn="l">
-              <a:lnSpc>
-                <a:spcPts val="940"/>
-              </a:lnSpc>
-              <a:spcBef>
-                <a:spcPts val="0"/>
-              </a:spcBef>
-              <a:spcAft>
-                <a:spcPts val="300"/>
-              </a:spcAft>
-              <a:buNone/>
-              <a:defRPr sz="810" b="0">
-                <a:solidFill>
-                  <a:srgbClr val="303437"/>
-                </a:solidFill>
-                <a:latin typeface="Noto Sans"/>
-              </a:defRPr>
-            </a:pPr>
-            <a:r>
-              <a:rPr sz="810" b="0" lang="ja-JP" altLang="en-US">
-                <a:solidFill>
-                  <a:srgbClr val="626669"/>
-                </a:solidFill>
-                <a:latin typeface="Noto Sans"/>
-                <a:ea typeface="Noto Sans CJK JP"/>
-                <a:cs typeface="Noto Sans"/>
-              </a:rPr>
-              <a:t>[1] Xu et al. (2020). CLUE: A Chinese Language Understanding Evaluation Benchmark. COLING, pp.4762–4772.</a:t>
-            </a:r>
-            <a:r>
-              <a:rPr sz="810" b="0" lang="ja-JP" altLang="en-US">
-                <a:solidFill>
-                  <a:srgbClr val="626669"/>
-                </a:solidFill>
-                <a:latin typeface="Noto Sans"/>
-                <a:ea typeface="Noto Sans CJK JP"/>
-                <a:cs typeface="Noto Sans"/>
-              </a:rPr>
-              <a:t>  </a:t>
-            </a:r>
-            <a:r>
-              <a:rPr sz="810" b="0" lang="ja-JP" altLang="en-US">
-                <a:solidFill>
-                  <a:srgbClr val="626669"/>
-                </a:solidFill>
-                <a:latin typeface="Noto Sans"/>
-                <a:ea typeface="Noto Sans CJK JP"/>
-                <a:cs typeface="Noto Sans"/>
-                <a:hlinkClick r:id="rId2"/>
-              </a:rPr>
-              <a:t>https://aclanthology.org/2020.coling-main.419/</a:t>
             </a:r>
           </a:p>
         </p:txBody>
@@ -32807,554 +31675,6 @@
 </p:sld>
 </file>
 
-<file path=ppt/slides/slide60.xml><?xml version="1.0" encoding="utf-8"?>
-<p:sld xmlns:a="http://schemas.openxmlformats.org/drawingml/2006/main" xmlns:p="http://schemas.openxmlformats.org/presentationml/2006/main" xmlns:r="http://schemas.openxmlformats.org/officeDocument/2006/relationships">
-  <p:cSld>
-    <p:spTree>
-      <p:nvGrpSpPr>
-        <p:cNvPr id="1" name=""/>
-        <p:cNvGrpSpPr/>
-        <p:nvPr/>
-      </p:nvGrpSpPr>
-      <p:grpSpPr/>
-      <p:sp>
-        <p:nvSpPr>
-          <p:cNvPr id="2" name="Title 1"/>
-          <p:cNvSpPr>
-            <a:spLocks noGrp="1"/>
-          </p:cNvSpPr>
-          <p:nvPr>
-            <p:ph type="title"/>
-          </p:nvPr>
-        </p:nvSpPr>
-        <p:spPr>
-          <a:xfrm>
-            <a:off x="468172" y="650138"/>
-            <a:ext cx="8206740" cy="616305"/>
-          </a:xfrm>
-        </p:spPr>
-        <p:txBody>
-          <a:bodyPr wrap="square" lIns="0" rIns="0" tIns="0" bIns="0">
-            <a:noAutofit/>
-          </a:bodyPr>
-          <a:lstStyle/>
-          <a:p>
-            <a:pPr algn="l">
-              <a:lnSpc>
-                <a:spcPct val="110000"/>
-              </a:lnSpc>
-              <a:buNone/>
-              <a:defRPr sz="2800" b="0">
-                <a:solidFill>
-                  <a:srgbClr val="303437"/>
-                </a:solidFill>
-                <a:latin typeface="Noto Sans"/>
-              </a:defRPr>
-            </a:pPr>
-            <a:r>
-              <a:rPr sz="2800" b="1" lang="ja-JP" altLang="en-US">
-                <a:solidFill>
-                  <a:srgbClr val="303437"/>
-                </a:solidFill>
-                <a:latin typeface="Noto Sans"/>
-                <a:ea typeface="Noto Sans CJK JP"/>
-                <a:cs typeface="Noto Sans"/>
-              </a:rPr>
-              <a:t>参考文献</a:t>
-            </a:r>
-          </a:p>
-        </p:txBody>
-      </p:sp>
-      <p:sp>
-        <p:nvSpPr>
-          <p:cNvPr id="3" name="Title 2"/>
-          <p:cNvSpPr>
-            <a:spLocks noGrp="1"/>
-          </p:cNvSpPr>
-          <p:nvPr>
-            <p:ph type="title" idx="2"/>
-          </p:nvPr>
-        </p:nvSpPr>
-        <p:spPr>
-          <a:xfrm>
-            <a:off x="75895" y="0"/>
-            <a:ext cx="8115300" cy="480060"/>
-          </a:xfrm>
-        </p:spPr>
-        <p:txBody>
-          <a:bodyPr wrap="square" lIns="0" rIns="0" tIns="0" bIns="0" anchor="ctr">
-            <a:noAutofit/>
-          </a:bodyPr>
-          <a:lstStyle/>
-          <a:p>
-            <a:pPr algn="l">
-              <a:lnSpc>
-                <a:spcPct val="110000"/>
-              </a:lnSpc>
-              <a:buNone/>
-              <a:defRPr sz="1400" b="0">
-                <a:solidFill>
-                  <a:srgbClr val="303437"/>
-                </a:solidFill>
-                <a:latin typeface="Noto Sans"/>
-              </a:defRPr>
-            </a:pPr>
-            <a:r>
-              <a:rPr sz="1400" b="1" lang="ja-JP" altLang="en-US">
-                <a:solidFill>
-                  <a:srgbClr val="FFFEF8"/>
-                </a:solidFill>
-                <a:latin typeface="Noto Sans"/>
-                <a:ea typeface="Noto Sans CJK JP"/>
-                <a:cs typeface="Noto Sans"/>
-              </a:rPr>
-              <a:t>Appendix: 3. 研究と参考文献</a:t>
-            </a:r>
-          </a:p>
-        </p:txBody>
-      </p:sp>
-      <p:sp>
-        <p:nvSpPr>
-          <p:cNvPr id="4" name="TextBox 3"/>
-          <p:cNvSpPr txBox="1"/>
-          <p:nvPr/>
-        </p:nvSpPr>
-        <p:spPr>
-          <a:xfrm>
-            <a:off x="548640" y="1325880"/>
-            <a:ext cx="8046720" cy="585216"/>
-          </a:xfrm>
-          <a:prstGeom prst="rect">
-            <a:avLst/>
-          </a:prstGeom>
-          <a:noFill/>
-        </p:spPr>
-        <p:txBody>
-          <a:bodyPr wrap="square" lIns="0" rIns="0" tIns="0" bIns="0">
-            <a:noAutofit/>
-          </a:bodyPr>
-          <a:lstStyle/>
-          <a:p>
-            <a:pPr algn="l">
-              <a:lnSpc>
-                <a:spcPts val="1920"/>
-              </a:lnSpc>
-              <a:spcBef>
-                <a:spcPts val="0"/>
-              </a:spcBef>
-              <a:spcAft>
-                <a:spcPts val="0"/>
-              </a:spcAft>
-              <a:buNone/>
-              <a:defRPr sz="1700" b="0">
-                <a:solidFill>
-                  <a:srgbClr val="303437"/>
-                </a:solidFill>
-                <a:latin typeface="Noto Sans"/>
-              </a:defRPr>
-            </a:pPr>
-            <a:r>
-              <a:rPr sz="1700" b="1" lang="ja-JP" altLang="en-US">
-                <a:solidFill>
-                  <a:srgbClr val="303437"/>
-                </a:solidFill>
-                <a:latin typeface="Noto Sans"/>
-                <a:ea typeface="Noto Sans CJK JP"/>
-                <a:cs typeface="Noto Sans"/>
-              </a:rPr>
-              <a:t>CLEVA: Chinese Language Models EVAluation Platform</a:t>
-            </a:r>
-          </a:p>
-        </p:txBody>
-      </p:sp>
-      <p:sp>
-        <p:nvSpPr>
-          <p:cNvPr id="5" name="TextBox 4"/>
-          <p:cNvSpPr txBox="1"/>
-          <p:nvPr/>
-        </p:nvSpPr>
-        <p:spPr>
-          <a:xfrm>
-            <a:off x="548640" y="1956815"/>
-            <a:ext cx="8046720" cy="228600"/>
-          </a:xfrm>
-          <a:prstGeom prst="rect">
-            <a:avLst/>
-          </a:prstGeom>
-          <a:noFill/>
-        </p:spPr>
-        <p:txBody>
-          <a:bodyPr wrap="square" lIns="0" rIns="0" tIns="0" bIns="0">
-            <a:noAutofit/>
-          </a:bodyPr>
-          <a:lstStyle/>
-          <a:p>
-            <a:pPr algn="l">
-              <a:lnSpc>
-                <a:spcPts val="1404"/>
-              </a:lnSpc>
-              <a:spcBef>
-                <a:spcPts val="0"/>
-              </a:spcBef>
-              <a:spcAft>
-                <a:spcPts val="0"/>
-              </a:spcAft>
-              <a:buNone/>
-              <a:defRPr sz="1200" b="0">
-                <a:solidFill>
-                  <a:srgbClr val="303437"/>
-                </a:solidFill>
-                <a:latin typeface="Noto Sans"/>
-              </a:defRPr>
-            </a:pPr>
-            <a:r>
-              <a:rPr sz="1200" b="0" lang="ja-JP" altLang="en-US">
-                <a:solidFill>
-                  <a:srgbClr val="626669"/>
-                </a:solidFill>
-                <a:latin typeface="Noto Sans"/>
-                <a:ea typeface="Noto Sans CJK JP"/>
-                <a:cs typeface="Noto Sans"/>
-              </a:rPr>
-              <a:t>Li et al. · 2023 · EMNLP System Demonstrations</a:t>
-            </a:r>
-          </a:p>
-        </p:txBody>
-      </p:sp>
-      <p:sp>
-        <p:nvSpPr>
-          <p:cNvPr id="6" name="TextBox 5"/>
-          <p:cNvSpPr txBox="1"/>
-          <p:nvPr/>
-        </p:nvSpPr>
-        <p:spPr>
-          <a:xfrm>
-            <a:off x="548640" y="2240280"/>
-            <a:ext cx="8046720" cy="457200"/>
-          </a:xfrm>
-          <a:prstGeom prst="rect">
-            <a:avLst/>
-          </a:prstGeom>
-          <a:noFill/>
-        </p:spPr>
-        <p:txBody>
-          <a:bodyPr wrap="square" lIns="0" rIns="0" tIns="0" bIns="0">
-            <a:noAutofit/>
-          </a:bodyPr>
-          <a:lstStyle/>
-          <a:p>
-            <a:pPr algn="l">
-              <a:lnSpc>
-                <a:spcPts val="1823"/>
-              </a:lnSpc>
-              <a:spcBef>
-                <a:spcPts val="0"/>
-              </a:spcBef>
-              <a:spcAft>
-                <a:spcPts val="0"/>
-              </a:spcAft>
-              <a:buNone/>
-              <a:defRPr sz="1600" b="0">
-                <a:solidFill>
-                  <a:srgbClr val="303437"/>
-                </a:solidFill>
-                <a:latin typeface="Noto Sans"/>
-              </a:defRPr>
-            </a:pPr>
-            <a:r>
-              <a:rPr sz="1600" b="0" lang="ja-JP" altLang="en-US">
-                <a:solidFill>
-                  <a:srgbClr val="303437"/>
-                </a:solidFill>
-                <a:latin typeface="Noto Sans"/>
-                <a:ea typeface="Noto Sans CJK JP"/>
-                <a:cs typeface="Noto Sans"/>
-              </a:rPr>
-              <a:t>中国語モデルの多面的評価基盤。付録B.1.1でCLUEWSCの採用と共参照例を示す。</a:t>
-            </a:r>
-          </a:p>
-        </p:txBody>
-      </p:sp>
-      <p:sp>
-        <p:nvSpPr>
-          <p:cNvPr id="7" name="TextBox 6"/>
-          <p:cNvSpPr txBox="1"/>
-          <p:nvPr/>
-        </p:nvSpPr>
-        <p:spPr>
-          <a:xfrm>
-            <a:off x="548640" y="2752344"/>
-            <a:ext cx="8046720" cy="228600"/>
-          </a:xfrm>
-          <a:prstGeom prst="rect">
-            <a:avLst/>
-          </a:prstGeom>
-          <a:noFill/>
-        </p:spPr>
-        <p:txBody>
-          <a:bodyPr wrap="square" lIns="0" rIns="0" tIns="0" bIns="0">
-            <a:noAutofit/>
-          </a:bodyPr>
-          <a:lstStyle/>
-          <a:p>
-            <a:pPr algn="l">
-              <a:lnSpc>
-                <a:spcPts val="1263"/>
-              </a:lnSpc>
-              <a:spcBef>
-                <a:spcPts val="0"/>
-              </a:spcBef>
-              <a:spcAft>
-                <a:spcPts val="0"/>
-              </a:spcAft>
-              <a:buNone/>
-              <a:defRPr sz="1080" b="0">
-                <a:solidFill>
-                  <a:srgbClr val="303437"/>
-                </a:solidFill>
-                <a:latin typeface="Noto Sans"/>
-              </a:defRPr>
-            </a:pPr>
-            <a:r>
-              <a:rPr sz="1080" b="0" lang="ja-JP" altLang="en-US">
-                <a:solidFill>
-                  <a:srgbClr val="2166AC"/>
-                </a:solidFill>
-                <a:latin typeface="Noto Sans"/>
-                <a:ea typeface="Noto Sans CJK JP"/>
-                <a:cs typeface="Noto Sans"/>
-                <a:hlinkClick r:id="rId2"/>
-              </a:rPr>
-              <a:t>https://aclanthology.org/2023.emnlp-demo.17/</a:t>
-            </a:r>
-          </a:p>
-        </p:txBody>
-      </p:sp>
-      <p:sp>
-        <p:nvSpPr>
-          <p:cNvPr id="8" name="TextBox 7"/>
-          <p:cNvSpPr txBox="1"/>
-          <p:nvPr/>
-        </p:nvSpPr>
-        <p:spPr>
-          <a:xfrm>
-            <a:off x="548640" y="3063239"/>
-            <a:ext cx="8046720" cy="585216"/>
-          </a:xfrm>
-          <a:prstGeom prst="rect">
-            <a:avLst/>
-          </a:prstGeom>
-          <a:noFill/>
-        </p:spPr>
-        <p:txBody>
-          <a:bodyPr wrap="square" lIns="0" rIns="0" tIns="0" bIns="0">
-            <a:noAutofit/>
-          </a:bodyPr>
-          <a:lstStyle/>
-          <a:p>
-            <a:pPr algn="l">
-              <a:lnSpc>
-                <a:spcPts val="1920"/>
-              </a:lnSpc>
-              <a:spcBef>
-                <a:spcPts val="0"/>
-              </a:spcBef>
-              <a:spcAft>
-                <a:spcPts val="0"/>
-              </a:spcAft>
-              <a:buNone/>
-              <a:defRPr sz="1700" b="0">
-                <a:solidFill>
-                  <a:srgbClr val="303437"/>
-                </a:solidFill>
-                <a:latin typeface="Noto Sans"/>
-              </a:defRPr>
-            </a:pPr>
-            <a:r>
-              <a:rPr sz="1700" b="1" lang="ja-JP" altLang="en-US">
-                <a:solidFill>
-                  <a:srgbClr val="303437"/>
-                </a:solidFill>
-                <a:latin typeface="Noto Sans"/>
-                <a:ea typeface="Noto Sans CJK JP"/>
-                <a:cs typeface="Noto Sans"/>
-              </a:rPr>
-              <a:t>CLEVACoreferenceResolutionScenario and Converter</a:t>
-            </a:r>
-          </a:p>
-        </p:txBody>
-      </p:sp>
-      <p:sp>
-        <p:nvSpPr>
-          <p:cNvPr id="9" name="TextBox 8"/>
-          <p:cNvSpPr txBox="1"/>
-          <p:nvPr/>
-        </p:nvSpPr>
-        <p:spPr>
-          <a:xfrm>
-            <a:off x="548640" y="3694175"/>
-            <a:ext cx="8046720" cy="228600"/>
-          </a:xfrm>
-          <a:prstGeom prst="rect">
-            <a:avLst/>
-          </a:prstGeom>
-          <a:noFill/>
-        </p:spPr>
-        <p:txBody>
-          <a:bodyPr wrap="square" lIns="0" rIns="0" tIns="0" bIns="0">
-            <a:noAutofit/>
-          </a:bodyPr>
-          <a:lstStyle/>
-          <a:p>
-            <a:pPr algn="l">
-              <a:lnSpc>
-                <a:spcPts val="1404"/>
-              </a:lnSpc>
-              <a:spcBef>
-                <a:spcPts val="0"/>
-              </a:spcBef>
-              <a:spcAft>
-                <a:spcPts val="0"/>
-              </a:spcAft>
-              <a:buNone/>
-              <a:defRPr sz="1200" b="0">
-                <a:solidFill>
-                  <a:srgbClr val="303437"/>
-                </a:solidFill>
-                <a:latin typeface="Noto Sans"/>
-              </a:defRPr>
-            </a:pPr>
-            <a:r>
-              <a:rPr sz="1200" b="0" lang="ja-JP" altLang="en-US">
-                <a:solidFill>
-                  <a:srgbClr val="626669"/>
-                </a:solidFill>
-                <a:latin typeface="Noto Sans"/>
-                <a:ea typeface="Noto Sans CJK JP"/>
-                <a:cs typeface="Noto Sans"/>
-              </a:rPr>
-              <a:t>Stanford CRFM · 2023 · HELM v0.4.0 implementation</a:t>
-            </a:r>
-          </a:p>
-        </p:txBody>
-      </p:sp>
-      <p:sp>
-        <p:nvSpPr>
-          <p:cNvPr id="10" name="TextBox 9"/>
-          <p:cNvSpPr txBox="1"/>
-          <p:nvPr/>
-        </p:nvSpPr>
-        <p:spPr>
-          <a:xfrm>
-            <a:off x="548640" y="3977639"/>
-            <a:ext cx="8046720" cy="457200"/>
-          </a:xfrm>
-          <a:prstGeom prst="rect">
-            <a:avLst/>
-          </a:prstGeom>
-          <a:noFill/>
-        </p:spPr>
-        <p:txBody>
-          <a:bodyPr wrap="square" lIns="0" rIns="0" tIns="0" bIns="0">
-            <a:noAutofit/>
-          </a:bodyPr>
-          <a:lstStyle/>
-          <a:p>
-            <a:pPr algn="l">
-              <a:lnSpc>
-                <a:spcPts val="1823"/>
-              </a:lnSpc>
-              <a:spcBef>
-                <a:spcPts val="0"/>
-              </a:spcBef>
-              <a:spcAft>
-                <a:spcPts val="0"/>
-              </a:spcAft>
-              <a:buNone/>
-              <a:defRPr sz="1600" b="0">
-                <a:solidFill>
-                  <a:srgbClr val="303437"/>
-                </a:solidFill>
-                <a:latin typeface="Noto Sans"/>
-              </a:defRPr>
-            </a:pPr>
-            <a:r>
-              <a:rPr sz="1600" b="0" lang="ja-JP" altLang="en-US">
-                <a:solidFill>
-                  <a:srgbClr val="303437"/>
-                </a:solidFill>
-                <a:latin typeface="Noto Sans"/>
-                <a:ea typeface="Noto Sans CJK JP"/>
-                <a:cs typeface="Noto Sans"/>
-              </a:rPr>
-              <a:t>テンプレートから入力と参照を作る。塊と代名詞の一致を問う中国語の例を含む。</a:t>
-            </a:r>
-          </a:p>
-        </p:txBody>
-      </p:sp>
-      <p:sp>
-        <p:nvSpPr>
-          <p:cNvPr id="11" name="TextBox 10"/>
-          <p:cNvSpPr txBox="1"/>
-          <p:nvPr/>
-        </p:nvSpPr>
-        <p:spPr>
-          <a:xfrm>
-            <a:off x="548640" y="4489704"/>
-            <a:ext cx="8046720" cy="228600"/>
-          </a:xfrm>
-          <a:prstGeom prst="rect">
-            <a:avLst/>
-          </a:prstGeom>
-          <a:noFill/>
-        </p:spPr>
-        <p:txBody>
-          <a:bodyPr wrap="square" lIns="0" rIns="0" tIns="0" bIns="0">
-            <a:noAutofit/>
-          </a:bodyPr>
-          <a:lstStyle/>
-          <a:p>
-            <a:pPr algn="l">
-              <a:lnSpc>
-                <a:spcPts val="1263"/>
-              </a:lnSpc>
-              <a:spcBef>
-                <a:spcPts val="0"/>
-              </a:spcBef>
-              <a:spcAft>
-                <a:spcPts val="0"/>
-              </a:spcAft>
-              <a:buNone/>
-              <a:defRPr sz="1080" b="0">
-                <a:solidFill>
-                  <a:srgbClr val="303437"/>
-                </a:solidFill>
-                <a:latin typeface="Noto Sans"/>
-              </a:defRPr>
-            </a:pPr>
-            <a:r>
-              <a:rPr sz="1080" b="0" lang="ja-JP" altLang="en-US">
-                <a:solidFill>
-                  <a:srgbClr val="2166AC"/>
-                </a:solidFill>
-                <a:latin typeface="Noto Sans"/>
-                <a:ea typeface="Noto Sans CJK JP"/>
-                <a:cs typeface="Noto Sans"/>
-                <a:hlinkClick r:id="rId3"/>
-              </a:rPr>
-              <a:t>https://github.com/stanford-crfm/helm/blob/v0.4.0/src/helm/benchmark/scenarios/cleva_scenario.py</a:t>
-            </a:r>
-          </a:p>
-        </p:txBody>
-      </p:sp>
-    </p:spTree>
-  </p:cSld>
-  <p:clrMapOvr>
-    <a:masterClrMapping/>
-  </p:clrMapOvr>
-</p:sld>
-</file>
-
 <file path=ppt/slides/slide7.xml><?xml version="1.0" encoding="utf-8"?>
 <p:sld xmlns:a="http://schemas.openxmlformats.org/drawingml/2006/main" xmlns:p="http://schemas.openxmlformats.org/presentationml/2006/main" xmlns:r="http://schemas.openxmlformats.org/officeDocument/2006/relationships">
   <p:cSld>
@@ -33494,36 +31814,6 @@
               <a:t>「煮汁」と「塊」の両方が出てくる文章で、代名詞と動作の対象を結び付ける問題になっている。</a:t>
             </a:r>
           </a:p>
-          <a:p>
-            <a:pPr marL="457200" indent="-355600">
-              <a:lnSpc>
-                <a:spcPts val="2320"/>
-              </a:lnSpc>
-              <a:spcAft>
-                <a:spcPts val="0"/>
-              </a:spcAft>
-              <a:buSzPct val="68205"/>
-              <a:buFont typeface="Noto Sans CJK JP"/>
-              <a:buChar char="●"/>
-              <a:defRPr sz="1950" b="0">
-                <a:solidFill>
-                  <a:srgbClr val="303437"/>
-                </a:solidFill>
-                <a:latin typeface="Noto Sans"/>
-              </a:defRPr>
-            </a:pPr>
-            <a:r>
-              <a:rPr sz="1950" b="0" lang="ja-JP" altLang="en-US">
-                <a:solidFill>
-                  <a:srgbClr val="303437"/>
-                </a:solidFill>
-                <a:latin typeface="Noto Sans"/>
-                <a:ea typeface="Noto Sans CJK JP"/>
-                <a:cs typeface="Noto Sans"/>
-              </a:rPr>
-              <a:t>この問題は、HELMにあるCLEVAの共参照解決シナリオでも説明例に使われている。</a:t>
-            </a:r>
-          </a:p>
         </p:txBody>
       </p:sp>
       <p:sp>
@@ -33647,63 +31937,6 @@
                 <a:hlinkClick r:id="rId2"/>
               </a:rPr>
               <a:t>https://storage.googleapis.com/cluebenchmark/tasks/cluewsc2020_public.zip</a:t>
-            </a:r>
-          </a:p>
-          <a:p>
-            <a:pPr>
-              <a:lnSpc>
-                <a:spcPts val="940"/>
-              </a:lnSpc>
-              <a:spcAft>
-                <a:spcPts val="300"/>
-              </a:spcAft>
-              <a:buNone/>
-              <a:defRPr sz="810" b="0">
-                <a:solidFill>
-                  <a:srgbClr val="303437"/>
-                </a:solidFill>
-                <a:latin typeface="Noto Sans"/>
-              </a:defRPr>
-            </a:pPr>
-            <a:r>
-              <a:rPr sz="810" b="0" lang="ja-JP" altLang="en-US">
-                <a:solidFill>
-                  <a:srgbClr val="626669"/>
-                </a:solidFill>
-                <a:latin typeface="Noto Sans"/>
-                <a:ea typeface="Noto Sans CJK JP"/>
-                <a:cs typeface="Noto Sans"/>
-              </a:rPr>
-              <a:t>[2] Stanford CRFM. CLEVACoreferenceResolutionScenario / Converter. HELM v0.4.0.</a:t>
-            </a:r>
-          </a:p>
-          <a:p>
-            <a:pPr>
-              <a:lnSpc>
-                <a:spcPts val="940"/>
-              </a:lnSpc>
-              <a:spcAft>
-                <a:spcPts val="300"/>
-              </a:spcAft>
-              <a:buNone/>
-              <a:defRPr sz="810" b="0">
-                <a:solidFill>
-                  <a:srgbClr val="303437"/>
-                </a:solidFill>
-                <a:latin typeface="Noto Sans"/>
-              </a:defRPr>
-            </a:pPr>
-            <a:r>
-              <a:rPr sz="810" b="0" lang="ja-JP" altLang="en-US">
-                <a:solidFill>
-                  <a:srgbClr val="626669"/>
-                </a:solidFill>
-                <a:latin typeface="Noto Sans"/>
-                <a:ea typeface="Noto Sans CJK JP"/>
-                <a:cs typeface="Noto Sans"/>
-                <a:hlinkClick r:id="rId3"/>
-              </a:rPr>
-              <a:t>https://github.com/stanford-crfm/helm/blob/v0.4.0/src/helm/benchmark/scenarios/cleva_scenario.py</a:t>
             </a:r>
           </a:p>
         </p:txBody>
@@ -34640,36 +32873,6 @@
               <a:t>蒋盈波、准教授、同業者という複数の人物が出てくる。誰が誰を招いたかを、文の主語が変わっても追う必要がある。</a:t>
             </a:r>
           </a:p>
-          <a:p>
-            <a:pPr marL="457200" indent="-355600">
-              <a:lnSpc>
-                <a:spcPts val="2320"/>
-              </a:lnSpc>
-              <a:spcAft>
-                <a:spcPts val="0"/>
-              </a:spcAft>
-              <a:buSzPct val="68205"/>
-              <a:buFont typeface="Noto Sans CJK JP"/>
-              <a:buChar char="●"/>
-              <a:defRPr sz="1950" b="0">
-                <a:solidFill>
-                  <a:srgbClr val="303437"/>
-                </a:solidFill>
-                <a:latin typeface="Noto Sans"/>
-              </a:defRPr>
-            </a:pPr>
-            <a:r>
-              <a:rPr sz="1950" b="0" lang="ja-JP" altLang="en-US">
-                <a:solidFill>
-                  <a:srgbClr val="303437"/>
-                </a:solidFill>
-                <a:latin typeface="Noto Sans"/>
-                <a:ea typeface="Noto Sans CJK JP"/>
-                <a:cs typeface="Noto Sans"/>
-              </a:rPr>
-              <a:t>CLEVAの論文でも、この文章と二つの指定箇所が共参照解決の例に使われている。</a:t>
-            </a:r>
-          </a:p>
         </p:txBody>
       </p:sp>
       <p:sp>
@@ -34793,57 +32996,6 @@
                 <a:hlinkClick r:id="rId2"/>
               </a:rPr>
               <a:t>https://storage.googleapis.com/cluebenchmark/tasks/cluewsc2020_public.zip</a:t>
-            </a:r>
-          </a:p>
-          <a:p>
-            <a:pPr>
-              <a:lnSpc>
-                <a:spcPts val="940"/>
-              </a:lnSpc>
-              <a:spcAft>
-                <a:spcPts val="300"/>
-              </a:spcAft>
-              <a:buNone/>
-              <a:defRPr sz="810" b="0">
-                <a:solidFill>
-                  <a:srgbClr val="303437"/>
-                </a:solidFill>
-                <a:latin typeface="Noto Sans"/>
-              </a:defRPr>
-            </a:pPr>
-            <a:r>
-              <a:rPr sz="810" b="0" lang="ja-JP" altLang="en-US">
-                <a:solidFill>
-                  <a:srgbClr val="626669"/>
-                </a:solidFill>
-                <a:latin typeface="Noto Sans"/>
-                <a:ea typeface="Noto Sans CJK JP"/>
-                <a:cs typeface="Noto Sans"/>
-              </a:rPr>
-              <a:t>[2] Li et al. (2023). CLEVA: Chinese Language Models EVAluation Platform. EMNLP System Demonstrations.</a:t>
-            </a:r>
-            <a:r>
-              <a:rPr sz="810" b="0" lang="ja-JP" altLang="en-US">
-                <a:solidFill>
-                  <a:srgbClr val="626669"/>
-                </a:solidFill>
-                <a:latin typeface="Noto Sans"/>
-                <a:ea typeface="Noto Sans CJK JP"/>
-                <a:cs typeface="Noto Sans"/>
-              </a:rPr>
-              <a:t>  </a:t>
-            </a:r>
-            <a:r>
-              <a:rPr sz="810" b="0" lang="ja-JP" altLang="en-US">
-                <a:solidFill>
-                  <a:srgbClr val="626669"/>
-                </a:solidFill>
-                <a:latin typeface="Noto Sans"/>
-                <a:ea typeface="Noto Sans CJK JP"/>
-                <a:cs typeface="Noto Sans"/>
-                <a:hlinkClick r:id="rId3"/>
-              </a:rPr>
-              <a:t>https://aclanthology.org/2023.emnlp-demo.17/</a:t>
             </a:r>
           </a:p>
         </p:txBody>
